--- a/발표자료양식모음/발표 PPT 양식.pptx
+++ b/발표자료양식모음/발표 PPT 양식.pptx
@@ -1,34 +1,33 @@
 
 <file path=ppt/presentation.xml><?xml version="1.0" encoding="utf-8"?>
-<p:presentation xmlns:a="http://schemas.openxmlformats.org/drawingml/2006/main" xmlns:r="http://schemas.openxmlformats.org/officeDocument/2006/relationships" xmlns:mc="http://schemas.openxmlformats.org/markup-compatibility/2006" xmlns:mv="urn:schemas-microsoft-com:mac:vml" xmlns:p="http://schemas.openxmlformats.org/presentationml/2006/main" xmlns:c="http://schemas.openxmlformats.org/drawingml/2006/chart" xmlns:dgm="http://schemas.openxmlformats.org/drawingml/2006/diagram" xmlns:o="urn:schemas-microsoft-com:office:office" xmlns:v="urn:schemas-microsoft-com:vml" xmlns:pvml="urn:schemas-microsoft-com:office:powerpoint" xmlns:com="http://schemas.openxmlformats.org/drawingml/2006/compatibility" xmlns:p14="http://schemas.microsoft.com/office/powerpoint/2010/main" xmlns:p15="http://schemas.microsoft.com/office/powerpoint/2012/main" xmlns:ahyp="http://schemas.microsoft.com/office/drawing/2018/hyperlinkcolor" autoCompressPictures="0" embedTrueTypeFonts="1" strictFirstAndLastChars="0" saveSubsetFonts="1">
+<p:presentation xmlns:a="http://schemas.openxmlformats.org/drawingml/2006/main" xmlns:r="http://schemas.openxmlformats.org/officeDocument/2006/relationships" xmlns:p="http://schemas.openxmlformats.org/presentationml/2006/main" strictFirstAndLastChars="0" embedTrueTypeFonts="1" saveSubsetFonts="1" autoCompressPictures="0">
   <p:sldMasterIdLst>
-    <p:sldMasterId id="2147483659" r:id="rId4"/>
+    <p:sldMasterId id="2147483659" r:id="rId1"/>
   </p:sldMasterIdLst>
   <p:notesMasterIdLst>
-    <p:notesMasterId r:id="rId5"/>
+    <p:notesMasterId r:id="rId6"/>
   </p:notesMasterIdLst>
   <p:sldIdLst>
-    <p:sldId id="256" r:id="rId6"/>
-    <p:sldId id="257" r:id="rId7"/>
-    <p:sldId id="258" r:id="rId8"/>
-    <p:sldId id="259" r:id="rId9"/>
-    <p:sldId id="260" r:id="rId10"/>
+    <p:sldId id="256" r:id="rId2"/>
+    <p:sldId id="258" r:id="rId3"/>
+    <p:sldId id="259" r:id="rId4"/>
+    <p:sldId id="260" r:id="rId5"/>
   </p:sldIdLst>
-  <p:sldSz cy="5143500" cx="9144000"/>
+  <p:sldSz cx="9144000" cy="5143500" type="screen16x9"/>
   <p:notesSz cx="6858000" cy="9144000"/>
   <p:embeddedFontLst>
     <p:embeddedFont>
-      <p:font typeface="NanumGothicExtraBold"/>
-      <p:bold r:id="rId11"/>
+      <p:font typeface="Nanum Gothic" panose="020B0600000101010101" charset="-127"/>
+      <p:regular r:id="rId7"/>
+      <p:bold r:id="rId8"/>
     </p:embeddedFont>
     <p:embeddedFont>
-      <p:font typeface="Nanum Gothic"/>
-      <p:regular r:id="rId12"/>
-      <p:bold r:id="rId13"/>
+      <p:font typeface="NanumGothicExtraBold" panose="020D0904000000000000" pitchFamily="50" charset="-127"/>
+      <p:bold r:id="rId9"/>
     </p:embeddedFont>
   </p:embeddedFontLst>
   <p:defaultTextStyle>
-    <a:defPPr lvl="0" marR="0" rtl="0" algn="l">
+    <a:defPPr marR="0" lvl="0" algn="l" rtl="0">
       <a:lnSpc>
         <a:spcPct val="100000"/>
       </a:lnSpc>
@@ -39,7 +38,7 @@
         <a:spcPts val="0"/>
       </a:spcAft>
     </a:defPPr>
-    <a:lvl1pPr lvl="0" marR="0" rtl="0" algn="l">
+    <a:lvl1pPr marR="0" lvl="0" algn="l" rtl="0">
       <a:lnSpc>
         <a:spcPct val="100000"/>
       </a:lnSpc>
@@ -53,7 +52,7 @@
         <a:srgbClr val="000000"/>
       </a:buClr>
       <a:buFont typeface="Arial"/>
-      <a:defRPr b="0" i="0" sz="1400" u="none" cap="none" strike="noStrike">
+      <a:defRPr sz="1400" b="0" i="0" u="none" strike="noStrike" cap="none">
         <a:solidFill>
           <a:srgbClr val="000000"/>
         </a:solidFill>
@@ -63,7 +62,7 @@
         <a:sym typeface="Arial"/>
       </a:defRPr>
     </a:lvl1pPr>
-    <a:lvl2pPr lvl="1" marR="0" rtl="0" algn="l">
+    <a:lvl2pPr marR="0" lvl="1" algn="l" rtl="0">
       <a:lnSpc>
         <a:spcPct val="100000"/>
       </a:lnSpc>
@@ -77,7 +76,7 @@
         <a:srgbClr val="000000"/>
       </a:buClr>
       <a:buFont typeface="Arial"/>
-      <a:defRPr b="0" i="0" sz="1400" u="none" cap="none" strike="noStrike">
+      <a:defRPr sz="1400" b="0" i="0" u="none" strike="noStrike" cap="none">
         <a:solidFill>
           <a:srgbClr val="000000"/>
         </a:solidFill>
@@ -87,7 +86,7 @@
         <a:sym typeface="Arial"/>
       </a:defRPr>
     </a:lvl2pPr>
-    <a:lvl3pPr lvl="2" marR="0" rtl="0" algn="l">
+    <a:lvl3pPr marR="0" lvl="2" algn="l" rtl="0">
       <a:lnSpc>
         <a:spcPct val="100000"/>
       </a:lnSpc>
@@ -101,7 +100,7 @@
         <a:srgbClr val="000000"/>
       </a:buClr>
       <a:buFont typeface="Arial"/>
-      <a:defRPr b="0" i="0" sz="1400" u="none" cap="none" strike="noStrike">
+      <a:defRPr sz="1400" b="0" i="0" u="none" strike="noStrike" cap="none">
         <a:solidFill>
           <a:srgbClr val="000000"/>
         </a:solidFill>
@@ -111,7 +110,7 @@
         <a:sym typeface="Arial"/>
       </a:defRPr>
     </a:lvl3pPr>
-    <a:lvl4pPr lvl="3" marR="0" rtl="0" algn="l">
+    <a:lvl4pPr marR="0" lvl="3" algn="l" rtl="0">
       <a:lnSpc>
         <a:spcPct val="100000"/>
       </a:lnSpc>
@@ -125,7 +124,7 @@
         <a:srgbClr val="000000"/>
       </a:buClr>
       <a:buFont typeface="Arial"/>
-      <a:defRPr b="0" i="0" sz="1400" u="none" cap="none" strike="noStrike">
+      <a:defRPr sz="1400" b="0" i="0" u="none" strike="noStrike" cap="none">
         <a:solidFill>
           <a:srgbClr val="000000"/>
         </a:solidFill>
@@ -135,7 +134,7 @@
         <a:sym typeface="Arial"/>
       </a:defRPr>
     </a:lvl4pPr>
-    <a:lvl5pPr lvl="4" marR="0" rtl="0" algn="l">
+    <a:lvl5pPr marR="0" lvl="4" algn="l" rtl="0">
       <a:lnSpc>
         <a:spcPct val="100000"/>
       </a:lnSpc>
@@ -149,7 +148,7 @@
         <a:srgbClr val="000000"/>
       </a:buClr>
       <a:buFont typeface="Arial"/>
-      <a:defRPr b="0" i="0" sz="1400" u="none" cap="none" strike="noStrike">
+      <a:defRPr sz="1400" b="0" i="0" u="none" strike="noStrike" cap="none">
         <a:solidFill>
           <a:srgbClr val="000000"/>
         </a:solidFill>
@@ -159,7 +158,7 @@
         <a:sym typeface="Arial"/>
       </a:defRPr>
     </a:lvl5pPr>
-    <a:lvl6pPr lvl="5" marR="0" rtl="0" algn="l">
+    <a:lvl6pPr marR="0" lvl="5" algn="l" rtl="0">
       <a:lnSpc>
         <a:spcPct val="100000"/>
       </a:lnSpc>
@@ -173,7 +172,7 @@
         <a:srgbClr val="000000"/>
       </a:buClr>
       <a:buFont typeface="Arial"/>
-      <a:defRPr b="0" i="0" sz="1400" u="none" cap="none" strike="noStrike">
+      <a:defRPr sz="1400" b="0" i="0" u="none" strike="noStrike" cap="none">
         <a:solidFill>
           <a:srgbClr val="000000"/>
         </a:solidFill>
@@ -183,7 +182,7 @@
         <a:sym typeface="Arial"/>
       </a:defRPr>
     </a:lvl6pPr>
-    <a:lvl7pPr lvl="6" marR="0" rtl="0" algn="l">
+    <a:lvl7pPr marR="0" lvl="6" algn="l" rtl="0">
       <a:lnSpc>
         <a:spcPct val="100000"/>
       </a:lnSpc>
@@ -197,7 +196,7 @@
         <a:srgbClr val="000000"/>
       </a:buClr>
       <a:buFont typeface="Arial"/>
-      <a:defRPr b="0" i="0" sz="1400" u="none" cap="none" strike="noStrike">
+      <a:defRPr sz="1400" b="0" i="0" u="none" strike="noStrike" cap="none">
         <a:solidFill>
           <a:srgbClr val="000000"/>
         </a:solidFill>
@@ -207,7 +206,7 @@
         <a:sym typeface="Arial"/>
       </a:defRPr>
     </a:lvl7pPr>
-    <a:lvl8pPr lvl="7" marR="0" rtl="0" algn="l">
+    <a:lvl8pPr marR="0" lvl="7" algn="l" rtl="0">
       <a:lnSpc>
         <a:spcPct val="100000"/>
       </a:lnSpc>
@@ -221,7 +220,7 @@
         <a:srgbClr val="000000"/>
       </a:buClr>
       <a:buFont typeface="Arial"/>
-      <a:defRPr b="0" i="0" sz="1400" u="none" cap="none" strike="noStrike">
+      <a:defRPr sz="1400" b="0" i="0" u="none" strike="noStrike" cap="none">
         <a:solidFill>
           <a:srgbClr val="000000"/>
         </a:solidFill>
@@ -231,7 +230,7 @@
         <a:sym typeface="Arial"/>
       </a:defRPr>
     </a:lvl8pPr>
-    <a:lvl9pPr lvl="8" marR="0" rtl="0" algn="l">
+    <a:lvl9pPr marR="0" lvl="8" algn="l" rtl="0">
       <a:lnSpc>
         <a:spcPct val="100000"/>
       </a:lnSpc>
@@ -245,7 +244,7 @@
         <a:srgbClr val="000000"/>
       </a:buClr>
       <a:buFont typeface="Arial"/>
-      <a:defRPr b="0" i="0" sz="1400" u="none" cap="none" strike="noStrike">
+      <a:defRPr sz="1400" b="0" i="0" u="none" strike="noStrike" cap="none">
         <a:solidFill>
           <a:srgbClr val="000000"/>
         </a:solidFill>
@@ -258,7 +257,7 @@
   </p:defaultTextStyle>
   <p:extLst>
     <p:ext uri="{EFAFB233-063F-42B5-8137-9DF3F51BA10A}">
-      <p15:sldGuideLst>
+      <p15:sldGuideLst xmlns:p15="http://schemas.microsoft.com/office/powerpoint/2012/main">
         <p15:guide id="1" orient="horz" pos="1620">
           <p15:clr>
             <a:srgbClr val="A4A3A4"/>
@@ -276,11 +275,16 @@
 </file>
 
 <file path=ppt/notesMasters/notesMaster1.xml><?xml version="1.0" encoding="utf-8"?>
-<p:notesMaster xmlns:a="http://schemas.openxmlformats.org/drawingml/2006/main" xmlns:r="http://schemas.openxmlformats.org/officeDocument/2006/relationships" xmlns:mc="http://schemas.openxmlformats.org/markup-compatibility/2006" xmlns:mv="urn:schemas-microsoft-com:mac:vml" xmlns:p="http://schemas.openxmlformats.org/presentationml/2006/main" xmlns:c="http://schemas.openxmlformats.org/drawingml/2006/chart" xmlns:dgm="http://schemas.openxmlformats.org/drawingml/2006/diagram" xmlns:o="urn:schemas-microsoft-com:office:office" xmlns:v="urn:schemas-microsoft-com:vml" xmlns:pvml="urn:schemas-microsoft-com:office:powerpoint" xmlns:com="http://schemas.openxmlformats.org/drawingml/2006/compatibility" xmlns:p14="http://schemas.microsoft.com/office/powerpoint/2010/main" xmlns:p15="http://schemas.microsoft.com/office/powerpoint/2012/main" xmlns:ahyp="http://schemas.microsoft.com/office/drawing/2018/hyperlinkcolor">
+<p:notesMaster xmlns:a="http://schemas.openxmlformats.org/drawingml/2006/main" xmlns:r="http://schemas.openxmlformats.org/officeDocument/2006/relationships" xmlns:p="http://schemas.openxmlformats.org/presentationml/2006/main">
   <p:cSld>
+    <p:bg>
+      <p:bgRef idx="1001">
+        <a:schemeClr val="bg1"/>
+      </p:bgRef>
+    </p:bg>
     <p:spTree>
       <p:nvGrpSpPr>
-        <p:cNvPr id="2" name="Shape 2"/>
+        <p:cNvPr id="1" name="Shape 2"/>
         <p:cNvGrpSpPr/>
         <p:nvPr/>
       </p:nvGrpSpPr>
@@ -295,9 +299,11 @@
       <p:sp>
         <p:nvSpPr>
           <p:cNvPr id="3" name="Google Shape;3;n"/>
-          <p:cNvSpPr/>
+          <p:cNvSpPr>
+            <a:spLocks noGrp="1" noRot="1" noChangeAspect="1"/>
+          </p:cNvSpPr>
           <p:nvPr>
-            <p:ph idx="2" type="sldImg"/>
+            <p:ph type="sldImg" idx="2"/>
           </p:nvPr>
         </p:nvSpPr>
         <p:spPr>
@@ -306,9 +312,13 @@
             <a:ext cx="6096075" cy="3429000"/>
           </a:xfrm>
           <a:custGeom>
-            <a:rect b="b" l="l" r="r" t="t"/>
+            <a:avLst/>
+            <a:gdLst/>
+            <a:ahLst/>
+            <a:cxnLst/>
+            <a:rect l="l" t="t" r="r" b="b"/>
             <a:pathLst>
-              <a:path extrusionOk="0" h="120000" w="120000">
+              <a:path w="120000" h="120000" extrusionOk="0">
                 <a:moveTo>
                   <a:pt x="0" y="0"/>
                 </a:moveTo>
@@ -326,23 +336,25 @@
             </a:pathLst>
           </a:custGeom>
           <a:noFill/>
-          <a:ln cap="flat" cmpd="sng" w="9525">
+          <a:ln w="9525" cap="flat" cmpd="sng">
             <a:solidFill>
               <a:srgbClr val="000000"/>
             </a:solidFill>
             <a:prstDash val="solid"/>
             <a:round/>
-            <a:headEnd len="sm" w="sm" type="none"/>
-            <a:tailEnd len="sm" w="sm" type="none"/>
+            <a:headEnd type="none" w="sm" len="sm"/>
+            <a:tailEnd type="none" w="sm" len="sm"/>
           </a:ln>
         </p:spPr>
       </p:sp>
       <p:sp>
         <p:nvSpPr>
           <p:cNvPr id="4" name="Google Shape;4;n"/>
-          <p:cNvSpPr txBox="1"/>
+          <p:cNvSpPr txBox="1">
+            <a:spLocks noGrp="1"/>
+          </p:cNvSpPr>
           <p:nvPr>
-            <p:ph idx="1" type="body"/>
+            <p:ph type="body" idx="1"/>
           </p:nvPr>
         </p:nvSpPr>
         <p:spPr>
@@ -359,11 +371,11 @@
           </a:ln>
         </p:spPr>
         <p:txBody>
-          <a:bodyPr anchorCtr="0" anchor="t" bIns="91425" lIns="91425" spcFirstLastPara="1" rIns="91425" wrap="square" tIns="91425">
+          <a:bodyPr spcFirstLastPara="1" wrap="square" lIns="91425" tIns="91425" rIns="91425" bIns="91425" anchor="t" anchorCtr="0">
             <a:noAutofit/>
           </a:bodyPr>
           <a:lstStyle>
-            <a:lvl1pPr indent="-298450" lvl="0" marL="457200">
+            <a:lvl1pPr marL="457200" lvl="0" indent="-298450">
               <a:spcBef>
                 <a:spcPts val="0"/>
               </a:spcBef>
@@ -374,7 +386,7 @@
               <a:buChar char="●"/>
               <a:defRPr sz="1100"/>
             </a:lvl1pPr>
-            <a:lvl2pPr indent="-298450" lvl="1" marL="914400">
+            <a:lvl2pPr marL="914400" lvl="1" indent="-298450">
               <a:spcBef>
                 <a:spcPts val="0"/>
               </a:spcBef>
@@ -385,7 +397,7 @@
               <a:buChar char="○"/>
               <a:defRPr sz="1100"/>
             </a:lvl2pPr>
-            <a:lvl3pPr indent="-298450" lvl="2" marL="1371600">
+            <a:lvl3pPr marL="1371600" lvl="2" indent="-298450">
               <a:spcBef>
                 <a:spcPts val="0"/>
               </a:spcBef>
@@ -396,7 +408,7 @@
               <a:buChar char="■"/>
               <a:defRPr sz="1100"/>
             </a:lvl3pPr>
-            <a:lvl4pPr indent="-298450" lvl="3" marL="1828800">
+            <a:lvl4pPr marL="1828800" lvl="3" indent="-298450">
               <a:spcBef>
                 <a:spcPts val="0"/>
               </a:spcBef>
@@ -407,7 +419,7 @@
               <a:buChar char="●"/>
               <a:defRPr sz="1100"/>
             </a:lvl4pPr>
-            <a:lvl5pPr indent="-298450" lvl="4" marL="2286000">
+            <a:lvl5pPr marL="2286000" lvl="4" indent="-298450">
               <a:spcBef>
                 <a:spcPts val="0"/>
               </a:spcBef>
@@ -418,7 +430,7 @@
               <a:buChar char="○"/>
               <a:defRPr sz="1100"/>
             </a:lvl5pPr>
-            <a:lvl6pPr indent="-298450" lvl="5" marL="2743200">
+            <a:lvl6pPr marL="2743200" lvl="5" indent="-298450">
               <a:spcBef>
                 <a:spcPts val="0"/>
               </a:spcBef>
@@ -429,7 +441,7 @@
               <a:buChar char="■"/>
               <a:defRPr sz="1100"/>
             </a:lvl6pPr>
-            <a:lvl7pPr indent="-298450" lvl="6" marL="3200400">
+            <a:lvl7pPr marL="3200400" lvl="6" indent="-298450">
               <a:spcBef>
                 <a:spcPts val="0"/>
               </a:spcBef>
@@ -440,7 +452,7 @@
               <a:buChar char="●"/>
               <a:defRPr sz="1100"/>
             </a:lvl7pPr>
-            <a:lvl8pPr indent="-298450" lvl="7" marL="3657600">
+            <a:lvl8pPr marL="3657600" lvl="7" indent="-298450">
               <a:spcBef>
                 <a:spcPts val="0"/>
               </a:spcBef>
@@ -451,7 +463,7 @@
               <a:buChar char="○"/>
               <a:defRPr sz="1100"/>
             </a:lvl8pPr>
-            <a:lvl9pPr indent="-298450" lvl="8" marL="4114800">
+            <a:lvl9pPr marL="4114800" lvl="8" indent="-298450">
               <a:spcBef>
                 <a:spcPts val="0"/>
               </a:spcBef>
@@ -463,14 +475,16 @@
               <a:defRPr sz="1100"/>
             </a:lvl9pPr>
           </a:lstStyle>
-          <a:p/>
+          <a:p>
+            <a:endParaRPr/>
+          </a:p>
         </p:txBody>
       </p:sp>
     </p:spTree>
   </p:cSld>
-  <p:clrMap accent1="accent1" accent2="accent2" accent3="accent3" accent4="accent4" accent5="accent5" accent6="accent6" bg1="lt1" bg2="dk2" tx1="dk1" tx2="lt2" folHlink="folHlink" hlink="hlink"/>
+  <p:clrMap bg1="lt1" tx1="dk1" bg2="dk2" tx2="lt2" accent1="accent1" accent2="accent2" accent3="accent3" accent4="accent4" accent5="accent5" accent6="accent6" hlink="hlink" folHlink="folHlink"/>
   <p:notesStyle>
-    <a:defPPr lvl="0" marR="0" rtl="0" algn="l">
+    <a:defPPr marR="0" lvl="0" algn="l" rtl="0">
       <a:lnSpc>
         <a:spcPct val="100000"/>
       </a:lnSpc>
@@ -481,7 +495,7 @@
         <a:spcPts val="0"/>
       </a:spcAft>
     </a:defPPr>
-    <a:lvl1pPr lvl="0" marR="0" rtl="0" algn="l">
+    <a:lvl1pPr marR="0" lvl="0" algn="l" rtl="0">
       <a:lnSpc>
         <a:spcPct val="100000"/>
       </a:lnSpc>
@@ -495,7 +509,7 @@
         <a:srgbClr val="000000"/>
       </a:buClr>
       <a:buFont typeface="Arial"/>
-      <a:defRPr b="0" i="0" sz="1400" u="none" cap="none" strike="noStrike">
+      <a:defRPr sz="1400" b="0" i="0" u="none" strike="noStrike" cap="none">
         <a:solidFill>
           <a:srgbClr val="000000"/>
         </a:solidFill>
@@ -505,7 +519,7 @@
         <a:sym typeface="Arial"/>
       </a:defRPr>
     </a:lvl1pPr>
-    <a:lvl2pPr lvl="1" marR="0" rtl="0" algn="l">
+    <a:lvl2pPr marR="0" lvl="1" algn="l" rtl="0">
       <a:lnSpc>
         <a:spcPct val="100000"/>
       </a:lnSpc>
@@ -519,7 +533,7 @@
         <a:srgbClr val="000000"/>
       </a:buClr>
       <a:buFont typeface="Arial"/>
-      <a:defRPr b="0" i="0" sz="1400" u="none" cap="none" strike="noStrike">
+      <a:defRPr sz="1400" b="0" i="0" u="none" strike="noStrike" cap="none">
         <a:solidFill>
           <a:srgbClr val="000000"/>
         </a:solidFill>
@@ -529,7 +543,7 @@
         <a:sym typeface="Arial"/>
       </a:defRPr>
     </a:lvl2pPr>
-    <a:lvl3pPr lvl="2" marR="0" rtl="0" algn="l">
+    <a:lvl3pPr marR="0" lvl="2" algn="l" rtl="0">
       <a:lnSpc>
         <a:spcPct val="100000"/>
       </a:lnSpc>
@@ -543,7 +557,7 @@
         <a:srgbClr val="000000"/>
       </a:buClr>
       <a:buFont typeface="Arial"/>
-      <a:defRPr b="0" i="0" sz="1400" u="none" cap="none" strike="noStrike">
+      <a:defRPr sz="1400" b="0" i="0" u="none" strike="noStrike" cap="none">
         <a:solidFill>
           <a:srgbClr val="000000"/>
         </a:solidFill>
@@ -553,7 +567,7 @@
         <a:sym typeface="Arial"/>
       </a:defRPr>
     </a:lvl3pPr>
-    <a:lvl4pPr lvl="3" marR="0" rtl="0" algn="l">
+    <a:lvl4pPr marR="0" lvl="3" algn="l" rtl="0">
       <a:lnSpc>
         <a:spcPct val="100000"/>
       </a:lnSpc>
@@ -567,7 +581,7 @@
         <a:srgbClr val="000000"/>
       </a:buClr>
       <a:buFont typeface="Arial"/>
-      <a:defRPr b="0" i="0" sz="1400" u="none" cap="none" strike="noStrike">
+      <a:defRPr sz="1400" b="0" i="0" u="none" strike="noStrike" cap="none">
         <a:solidFill>
           <a:srgbClr val="000000"/>
         </a:solidFill>
@@ -577,7 +591,7 @@
         <a:sym typeface="Arial"/>
       </a:defRPr>
     </a:lvl4pPr>
-    <a:lvl5pPr lvl="4" marR="0" rtl="0" algn="l">
+    <a:lvl5pPr marR="0" lvl="4" algn="l" rtl="0">
       <a:lnSpc>
         <a:spcPct val="100000"/>
       </a:lnSpc>
@@ -591,7 +605,7 @@
         <a:srgbClr val="000000"/>
       </a:buClr>
       <a:buFont typeface="Arial"/>
-      <a:defRPr b="0" i="0" sz="1400" u="none" cap="none" strike="noStrike">
+      <a:defRPr sz="1400" b="0" i="0" u="none" strike="noStrike" cap="none">
         <a:solidFill>
           <a:srgbClr val="000000"/>
         </a:solidFill>
@@ -601,7 +615,7 @@
         <a:sym typeface="Arial"/>
       </a:defRPr>
     </a:lvl5pPr>
-    <a:lvl6pPr lvl="5" marR="0" rtl="0" algn="l">
+    <a:lvl6pPr marR="0" lvl="5" algn="l" rtl="0">
       <a:lnSpc>
         <a:spcPct val="100000"/>
       </a:lnSpc>
@@ -615,7 +629,7 @@
         <a:srgbClr val="000000"/>
       </a:buClr>
       <a:buFont typeface="Arial"/>
-      <a:defRPr b="0" i="0" sz="1400" u="none" cap="none" strike="noStrike">
+      <a:defRPr sz="1400" b="0" i="0" u="none" strike="noStrike" cap="none">
         <a:solidFill>
           <a:srgbClr val="000000"/>
         </a:solidFill>
@@ -625,7 +639,7 @@
         <a:sym typeface="Arial"/>
       </a:defRPr>
     </a:lvl6pPr>
-    <a:lvl7pPr lvl="6" marR="0" rtl="0" algn="l">
+    <a:lvl7pPr marR="0" lvl="6" algn="l" rtl="0">
       <a:lnSpc>
         <a:spcPct val="100000"/>
       </a:lnSpc>
@@ -639,7 +653,7 @@
         <a:srgbClr val="000000"/>
       </a:buClr>
       <a:buFont typeface="Arial"/>
-      <a:defRPr b="0" i="0" sz="1400" u="none" cap="none" strike="noStrike">
+      <a:defRPr sz="1400" b="0" i="0" u="none" strike="noStrike" cap="none">
         <a:solidFill>
           <a:srgbClr val="000000"/>
         </a:solidFill>
@@ -649,7 +663,7 @@
         <a:sym typeface="Arial"/>
       </a:defRPr>
     </a:lvl7pPr>
-    <a:lvl8pPr lvl="7" marR="0" rtl="0" algn="l">
+    <a:lvl8pPr marR="0" lvl="7" algn="l" rtl="0">
       <a:lnSpc>
         <a:spcPct val="100000"/>
       </a:lnSpc>
@@ -663,7 +677,7 @@
         <a:srgbClr val="000000"/>
       </a:buClr>
       <a:buFont typeface="Arial"/>
-      <a:defRPr b="0" i="0" sz="1400" u="none" cap="none" strike="noStrike">
+      <a:defRPr sz="1400" b="0" i="0" u="none" strike="noStrike" cap="none">
         <a:solidFill>
           <a:srgbClr val="000000"/>
         </a:solidFill>
@@ -673,7 +687,7 @@
         <a:sym typeface="Arial"/>
       </a:defRPr>
     </a:lvl8pPr>
-    <a:lvl9pPr lvl="8" marR="0" rtl="0" algn="l">
+    <a:lvl9pPr marR="0" lvl="8" algn="l" rtl="0">
       <a:lnSpc>
         <a:spcPct val="100000"/>
       </a:lnSpc>
@@ -687,7 +701,7 @@
         <a:srgbClr val="000000"/>
       </a:buClr>
       <a:buFont typeface="Arial"/>
-      <a:defRPr b="0" i="0" sz="1400" u="none" cap="none" strike="noStrike">
+      <a:defRPr sz="1400" b="0" i="0" u="none" strike="noStrike" cap="none">
         <a:solidFill>
           <a:srgbClr val="000000"/>
         </a:solidFill>
@@ -702,11 +716,11 @@
 </file>
 
 <file path=ppt/notesSlides/notesSlide1.xml><?xml version="1.0" encoding="utf-8"?>
-<p:notes xmlns:a="http://schemas.openxmlformats.org/drawingml/2006/main" xmlns:r="http://schemas.openxmlformats.org/officeDocument/2006/relationships" xmlns:mc="http://schemas.openxmlformats.org/markup-compatibility/2006" xmlns:mv="urn:schemas-microsoft-com:mac:vml" xmlns:p="http://schemas.openxmlformats.org/presentationml/2006/main" xmlns:c="http://schemas.openxmlformats.org/drawingml/2006/chart" xmlns:dgm="http://schemas.openxmlformats.org/drawingml/2006/diagram" xmlns:o="urn:schemas-microsoft-com:office:office" xmlns:v="urn:schemas-microsoft-com:vml" xmlns:pvml="urn:schemas-microsoft-com:office:powerpoint" xmlns:com="http://schemas.openxmlformats.org/drawingml/2006/compatibility" xmlns:p14="http://schemas.microsoft.com/office/powerpoint/2010/main" xmlns:p15="http://schemas.microsoft.com/office/powerpoint/2012/main" xmlns:ahyp="http://schemas.microsoft.com/office/drawing/2018/hyperlinkcolor" showMasterPhAnim="0" showMasterSp="0">
+<p:notes xmlns:a="http://schemas.openxmlformats.org/drawingml/2006/main" xmlns:r="http://schemas.openxmlformats.org/officeDocument/2006/relationships" xmlns:p="http://schemas.openxmlformats.org/presentationml/2006/main" showMasterSp="0" showMasterPhAnim="0">
   <p:cSld>
     <p:spTree>
       <p:nvGrpSpPr>
-        <p:cNvPr id="59" name="Shape 59"/>
+        <p:cNvPr id="1" name="Shape 59"/>
         <p:cNvGrpSpPr/>
         <p:nvPr/>
       </p:nvGrpSpPr>
@@ -721,20 +735,26 @@
       <p:sp>
         <p:nvSpPr>
           <p:cNvPr id="60" name="Google Shape;60;g26accca8d11_0_0:notes"/>
-          <p:cNvSpPr/>
+          <p:cNvSpPr>
+            <a:spLocks noGrp="1" noRot="1" noChangeAspect="1"/>
+          </p:cNvSpPr>
           <p:nvPr>
-            <p:ph idx="2" type="sldImg"/>
+            <p:ph type="sldImg" idx="2"/>
           </p:nvPr>
         </p:nvSpPr>
         <p:spPr>
           <a:xfrm>
-            <a:off x="381300" y="685800"/>
+            <a:off x="381000" y="685800"/>
             <a:ext cx="6096000" cy="3429000"/>
           </a:xfrm>
           <a:custGeom>
-            <a:rect b="b" l="l" r="r" t="t"/>
+            <a:avLst/>
+            <a:gdLst/>
+            <a:ahLst/>
+            <a:cxnLst/>
+            <a:rect l="l" t="t" r="r" b="b"/>
             <a:pathLst>
-              <a:path extrusionOk="0" h="120000" w="120000">
+              <a:path w="120000" h="120000" extrusionOk="0">
                 <a:moveTo>
                   <a:pt x="0" y="0"/>
                 </a:moveTo>
@@ -756,9 +776,11 @@
       <p:sp>
         <p:nvSpPr>
           <p:cNvPr id="61" name="Google Shape;61;g26accca8d11_0_0:notes"/>
-          <p:cNvSpPr txBox="1"/>
+          <p:cNvSpPr txBox="1">
+            <a:spLocks noGrp="1"/>
+          </p:cNvSpPr>
           <p:nvPr>
-            <p:ph idx="1" type="body"/>
+            <p:ph type="body" idx="1"/>
           </p:nvPr>
         </p:nvSpPr>
         <p:spPr>
@@ -771,12 +793,12 @@
           </a:prstGeom>
         </p:spPr>
         <p:txBody>
-          <a:bodyPr anchorCtr="0" anchor="t" bIns="91425" lIns="91425" spcFirstLastPara="1" rIns="91425" wrap="square" tIns="91425">
+          <a:bodyPr spcFirstLastPara="1" wrap="square" lIns="91425" tIns="91425" rIns="91425" bIns="91425" anchor="t" anchorCtr="0">
             <a:noAutofit/>
           </a:bodyPr>
           <a:lstStyle/>
           <a:p>
-            <a:pPr indent="0" lvl="0" marL="0" rtl="0" algn="l">
+            <a:pPr marL="0" lvl="0" indent="0" algn="l" rtl="0">
               <a:spcBef>
                 <a:spcPts val="0"/>
               </a:spcBef>
@@ -802,143 +824,11 @@
 </file>
 
 <file path=ppt/notesSlides/notesSlide2.xml><?xml version="1.0" encoding="utf-8"?>
-<p:notes xmlns:a="http://schemas.openxmlformats.org/drawingml/2006/main" xmlns:r="http://schemas.openxmlformats.org/officeDocument/2006/relationships" xmlns:mc="http://schemas.openxmlformats.org/markup-compatibility/2006" xmlns:mv="urn:schemas-microsoft-com:mac:vml" xmlns:p="http://schemas.openxmlformats.org/presentationml/2006/main" xmlns:c="http://schemas.openxmlformats.org/drawingml/2006/chart" xmlns:dgm="http://schemas.openxmlformats.org/drawingml/2006/diagram" xmlns:o="urn:schemas-microsoft-com:office:office" xmlns:v="urn:schemas-microsoft-com:vml" xmlns:pvml="urn:schemas-microsoft-com:office:powerpoint" xmlns:com="http://schemas.openxmlformats.org/drawingml/2006/compatibility" xmlns:p14="http://schemas.microsoft.com/office/powerpoint/2010/main" xmlns:p15="http://schemas.microsoft.com/office/powerpoint/2012/main" xmlns:ahyp="http://schemas.microsoft.com/office/drawing/2018/hyperlinkcolor" showMasterPhAnim="0" showMasterSp="0">
+<p:notes xmlns:a="http://schemas.openxmlformats.org/drawingml/2006/main" xmlns:r="http://schemas.openxmlformats.org/officeDocument/2006/relationships" xmlns:p="http://schemas.openxmlformats.org/presentationml/2006/main" showMasterSp="0" showMasterPhAnim="0">
   <p:cSld>
     <p:spTree>
       <p:nvGrpSpPr>
-        <p:cNvPr id="67" name="Shape 67"/>
-        <p:cNvGrpSpPr/>
-        <p:nvPr/>
-      </p:nvGrpSpPr>
-      <p:grpSpPr>
-        <a:xfrm>
-          <a:off x="0" y="0"/>
-          <a:ext cx="0" cy="0"/>
-          <a:chOff x="0" y="0"/>
-          <a:chExt cx="0" cy="0"/>
-        </a:xfrm>
-      </p:grpSpPr>
-      <p:sp>
-        <p:nvSpPr>
-          <p:cNvPr id="68" name="Google Shape;68;g26accca8d11_0_7:notes"/>
-          <p:cNvSpPr/>
-          <p:nvPr>
-            <p:ph idx="2" type="sldImg"/>
-          </p:nvPr>
-        </p:nvSpPr>
-        <p:spPr>
-          <a:xfrm>
-            <a:off x="381300" y="685800"/>
-            <a:ext cx="6096000" cy="3429000"/>
-          </a:xfrm>
-          <a:custGeom>
-            <a:rect b="b" l="l" r="r" t="t"/>
-            <a:pathLst>
-              <a:path extrusionOk="0" h="120000" w="120000">
-                <a:moveTo>
-                  <a:pt x="0" y="0"/>
-                </a:moveTo>
-                <a:lnTo>
-                  <a:pt x="120000" y="0"/>
-                </a:lnTo>
-                <a:lnTo>
-                  <a:pt x="120000" y="120000"/>
-                </a:lnTo>
-                <a:lnTo>
-                  <a:pt x="0" y="120000"/>
-                </a:lnTo>
-                <a:close/>
-              </a:path>
-            </a:pathLst>
-          </a:custGeom>
-        </p:spPr>
-      </p:sp>
-      <p:sp>
-        <p:nvSpPr>
-          <p:cNvPr id="69" name="Google Shape;69;g26accca8d11_0_7:notes"/>
-          <p:cNvSpPr txBox="1"/>
-          <p:nvPr>
-            <p:ph idx="1" type="body"/>
-          </p:nvPr>
-        </p:nvSpPr>
-        <p:spPr>
-          <a:xfrm>
-            <a:off x="685800" y="4343400"/>
-            <a:ext cx="5486400" cy="4114800"/>
-          </a:xfrm>
-          <a:prstGeom prst="rect">
-            <a:avLst/>
-          </a:prstGeom>
-        </p:spPr>
-        <p:txBody>
-          <a:bodyPr anchorCtr="0" anchor="t" bIns="91425" lIns="91425" spcFirstLastPara="1" rIns="91425" wrap="square" tIns="91425">
-            <a:noAutofit/>
-          </a:bodyPr>
-          <a:lstStyle/>
-          <a:p>
-            <a:pPr indent="0" lvl="0" marL="0" rtl="0" algn="l">
-              <a:spcBef>
-                <a:spcPts val="0"/>
-              </a:spcBef>
-              <a:spcAft>
-                <a:spcPts val="0"/>
-              </a:spcAft>
-              <a:buNone/>
-            </a:pPr>
-            <a:r>
-              <a:rPr lang="ko"/>
-              <a:t>이렇게 스터디원들을 만나 공부하신 사진을 넣어주시고 만남 인증을 해주세요!</a:t>
-            </a:r>
-            <a:endParaRPr/>
-          </a:p>
-          <a:p>
-            <a:pPr indent="0" lvl="0" marL="0" rtl="0" algn="l">
-              <a:spcBef>
-                <a:spcPts val="0"/>
-              </a:spcBef>
-              <a:spcAft>
-                <a:spcPts val="0"/>
-              </a:spcAft>
-              <a:buNone/>
-            </a:pPr>
-            <a:r>
-              <a:rPr lang="ko"/>
-              <a:t>비대면일 경우 화면 캡처를 이용해주시면 됩니다</a:t>
-            </a:r>
-            <a:endParaRPr/>
-          </a:p>
-          <a:p>
-            <a:pPr indent="0" lvl="0" marL="0" rtl="0" algn="l">
-              <a:spcBef>
-                <a:spcPts val="0"/>
-              </a:spcBef>
-              <a:spcAft>
-                <a:spcPts val="0"/>
-              </a:spcAft>
-              <a:buNone/>
-            </a:pPr>
-            <a:r>
-              <a:rPr lang="ko"/>
-              <a:t>지난 기수에서는 이걸 많이 까먹고 안올리셔서 전반적으로 스터디 참여가 저조했던 면이 있었는데, 스터디의 원활한 유지를 위해 꼭 잊지말고 첨부해주시면 감사하겠습니다!</a:t>
-            </a:r>
-            <a:endParaRPr/>
-          </a:p>
-        </p:txBody>
-      </p:sp>
-    </p:spTree>
-  </p:cSld>
-  <p:clrMapOvr>
-    <a:masterClrMapping/>
-  </p:clrMapOvr>
-</p:notes>
-</file>
-
-<file path=ppt/notesSlides/notesSlide3.xml><?xml version="1.0" encoding="utf-8"?>
-<p:notes xmlns:a="http://schemas.openxmlformats.org/drawingml/2006/main" xmlns:r="http://schemas.openxmlformats.org/officeDocument/2006/relationships" xmlns:mc="http://schemas.openxmlformats.org/markup-compatibility/2006" xmlns:mv="urn:schemas-microsoft-com:mac:vml" xmlns:p="http://schemas.openxmlformats.org/presentationml/2006/main" xmlns:c="http://schemas.openxmlformats.org/drawingml/2006/chart" xmlns:dgm="http://schemas.openxmlformats.org/drawingml/2006/diagram" xmlns:o="urn:schemas-microsoft-com:office:office" xmlns:v="urn:schemas-microsoft-com:vml" xmlns:pvml="urn:schemas-microsoft-com:office:powerpoint" xmlns:com="http://schemas.openxmlformats.org/drawingml/2006/compatibility" xmlns:p14="http://schemas.microsoft.com/office/powerpoint/2010/main" xmlns:p15="http://schemas.microsoft.com/office/powerpoint/2012/main" xmlns:ahyp="http://schemas.microsoft.com/office/drawing/2018/hyperlinkcolor" showMasterPhAnim="0" showMasterSp="0">
-  <p:cSld>
-    <p:spTree>
-      <p:nvGrpSpPr>
-        <p:cNvPr id="77" name="Shape 77"/>
+        <p:cNvPr id="1" name="Shape 77"/>
         <p:cNvGrpSpPr/>
         <p:nvPr/>
       </p:nvGrpSpPr>
@@ -953,9 +843,11 @@
       <p:sp>
         <p:nvSpPr>
           <p:cNvPr id="78" name="Google Shape;78;g26accca8d11_0_16:notes"/>
-          <p:cNvSpPr/>
+          <p:cNvSpPr>
+            <a:spLocks noGrp="1" noRot="1" noChangeAspect="1"/>
+          </p:cNvSpPr>
           <p:nvPr>
-            <p:ph idx="2" type="sldImg"/>
+            <p:ph type="sldImg" idx="2"/>
           </p:nvPr>
         </p:nvSpPr>
         <p:spPr>
@@ -964,9 +856,13 @@
             <a:ext cx="6096000" cy="3429000"/>
           </a:xfrm>
           <a:custGeom>
-            <a:rect b="b" l="l" r="r" t="t"/>
+            <a:avLst/>
+            <a:gdLst/>
+            <a:ahLst/>
+            <a:cxnLst/>
+            <a:rect l="l" t="t" r="r" b="b"/>
             <a:pathLst>
-              <a:path extrusionOk="0" h="120000" w="120000">
+              <a:path w="120000" h="120000" extrusionOk="0">
                 <a:moveTo>
                   <a:pt x="0" y="0"/>
                 </a:moveTo>
@@ -988,9 +884,11 @@
       <p:sp>
         <p:nvSpPr>
           <p:cNvPr id="79" name="Google Shape;79;g26accca8d11_0_16:notes"/>
-          <p:cNvSpPr txBox="1"/>
+          <p:cNvSpPr txBox="1">
+            <a:spLocks noGrp="1"/>
+          </p:cNvSpPr>
           <p:nvPr>
-            <p:ph idx="1" type="body"/>
+            <p:ph type="body" idx="1"/>
           </p:nvPr>
         </p:nvSpPr>
         <p:spPr>
@@ -1003,12 +901,12 @@
           </a:prstGeom>
         </p:spPr>
         <p:txBody>
-          <a:bodyPr anchorCtr="0" anchor="t" bIns="91425" lIns="91425" spcFirstLastPara="1" rIns="91425" wrap="square" tIns="91425">
+          <a:bodyPr spcFirstLastPara="1" wrap="square" lIns="91425" tIns="91425" rIns="91425" bIns="91425" anchor="t" anchorCtr="0">
             <a:noAutofit/>
           </a:bodyPr>
           <a:lstStyle/>
           <a:p>
-            <a:pPr indent="0" lvl="0" marL="0" rtl="0" algn="l">
+            <a:pPr marL="0" lvl="0" indent="0" algn="l" rtl="0">
               <a:spcBef>
                 <a:spcPts val="0"/>
               </a:spcBef>
@@ -1017,9 +915,6 @@
               </a:spcAft>
               <a:buNone/>
             </a:pPr>
-            <a:r>
-              <a:t/>
-            </a:r>
             <a:endParaRPr/>
           </a:p>
         </p:txBody>
@@ -1032,12 +927,12 @@
 </p:notes>
 </file>
 
-<file path=ppt/notesSlides/notesSlide4.xml><?xml version="1.0" encoding="utf-8"?>
-<p:notes xmlns:a="http://schemas.openxmlformats.org/drawingml/2006/main" xmlns:r="http://schemas.openxmlformats.org/officeDocument/2006/relationships" xmlns:mc="http://schemas.openxmlformats.org/markup-compatibility/2006" xmlns:mv="urn:schemas-microsoft-com:mac:vml" xmlns:p="http://schemas.openxmlformats.org/presentationml/2006/main" xmlns:c="http://schemas.openxmlformats.org/drawingml/2006/chart" xmlns:dgm="http://schemas.openxmlformats.org/drawingml/2006/diagram" xmlns:o="urn:schemas-microsoft-com:office:office" xmlns:v="urn:schemas-microsoft-com:vml" xmlns:pvml="urn:schemas-microsoft-com:office:powerpoint" xmlns:com="http://schemas.openxmlformats.org/drawingml/2006/compatibility" xmlns:p14="http://schemas.microsoft.com/office/powerpoint/2010/main" xmlns:p15="http://schemas.microsoft.com/office/powerpoint/2012/main" xmlns:ahyp="http://schemas.microsoft.com/office/drawing/2018/hyperlinkcolor" showMasterPhAnim="0" showMasterSp="0">
+<file path=ppt/notesSlides/notesSlide3.xml><?xml version="1.0" encoding="utf-8"?>
+<p:notes xmlns:a="http://schemas.openxmlformats.org/drawingml/2006/main" xmlns:r="http://schemas.openxmlformats.org/officeDocument/2006/relationships" xmlns:p="http://schemas.openxmlformats.org/presentationml/2006/main" showMasterSp="0" showMasterPhAnim="0">
   <p:cSld>
     <p:spTree>
       <p:nvGrpSpPr>
-        <p:cNvPr id="85" name="Shape 85"/>
+        <p:cNvPr id="1" name="Shape 85"/>
         <p:cNvGrpSpPr/>
         <p:nvPr/>
       </p:nvGrpSpPr>
@@ -1052,9 +947,11 @@
       <p:sp>
         <p:nvSpPr>
           <p:cNvPr id="86" name="Google Shape;86;g26accca8d11_0_23:notes"/>
-          <p:cNvSpPr/>
+          <p:cNvSpPr>
+            <a:spLocks noGrp="1" noRot="1" noChangeAspect="1"/>
+          </p:cNvSpPr>
           <p:nvPr>
-            <p:ph idx="2" type="sldImg"/>
+            <p:ph type="sldImg" idx="2"/>
           </p:nvPr>
         </p:nvSpPr>
         <p:spPr>
@@ -1063,9 +960,13 @@
             <a:ext cx="6096000" cy="3429000"/>
           </a:xfrm>
           <a:custGeom>
-            <a:rect b="b" l="l" r="r" t="t"/>
+            <a:avLst/>
+            <a:gdLst/>
+            <a:ahLst/>
+            <a:cxnLst/>
+            <a:rect l="l" t="t" r="r" b="b"/>
             <a:pathLst>
-              <a:path extrusionOk="0" h="120000" w="120000">
+              <a:path w="120000" h="120000" extrusionOk="0">
                 <a:moveTo>
                   <a:pt x="0" y="0"/>
                 </a:moveTo>
@@ -1087,9 +988,11 @@
       <p:sp>
         <p:nvSpPr>
           <p:cNvPr id="87" name="Google Shape;87;g26accca8d11_0_23:notes"/>
-          <p:cNvSpPr txBox="1"/>
+          <p:cNvSpPr txBox="1">
+            <a:spLocks noGrp="1"/>
+          </p:cNvSpPr>
           <p:nvPr>
-            <p:ph idx="1" type="body"/>
+            <p:ph type="body" idx="1"/>
           </p:nvPr>
         </p:nvSpPr>
         <p:spPr>
@@ -1102,12 +1005,12 @@
           </a:prstGeom>
         </p:spPr>
         <p:txBody>
-          <a:bodyPr anchorCtr="0" anchor="t" bIns="91425" lIns="91425" spcFirstLastPara="1" rIns="91425" wrap="square" tIns="91425">
+          <a:bodyPr spcFirstLastPara="1" wrap="square" lIns="91425" tIns="91425" rIns="91425" bIns="91425" anchor="t" anchorCtr="0">
             <a:noAutofit/>
           </a:bodyPr>
           <a:lstStyle/>
           <a:p>
-            <a:pPr indent="0" lvl="0" marL="0" rtl="0" algn="l">
+            <a:pPr marL="0" lvl="0" indent="0" algn="l" rtl="0">
               <a:spcBef>
                 <a:spcPts val="0"/>
               </a:spcBef>
@@ -1116,9 +1019,6 @@
               </a:spcAft>
               <a:buNone/>
             </a:pPr>
-            <a:r>
-              <a:t/>
-            </a:r>
             <a:endParaRPr/>
           </a:p>
         </p:txBody>
@@ -1131,12 +1031,12 @@
 </p:notes>
 </file>
 
-<file path=ppt/notesSlides/notesSlide5.xml><?xml version="1.0" encoding="utf-8"?>
-<p:notes xmlns:a="http://schemas.openxmlformats.org/drawingml/2006/main" xmlns:r="http://schemas.openxmlformats.org/officeDocument/2006/relationships" xmlns:mc="http://schemas.openxmlformats.org/markup-compatibility/2006" xmlns:mv="urn:schemas-microsoft-com:mac:vml" xmlns:p="http://schemas.openxmlformats.org/presentationml/2006/main" xmlns:c="http://schemas.openxmlformats.org/drawingml/2006/chart" xmlns:dgm="http://schemas.openxmlformats.org/drawingml/2006/diagram" xmlns:o="urn:schemas-microsoft-com:office:office" xmlns:v="urn:schemas-microsoft-com:vml" xmlns:pvml="urn:schemas-microsoft-com:office:powerpoint" xmlns:com="http://schemas.openxmlformats.org/drawingml/2006/compatibility" xmlns:p14="http://schemas.microsoft.com/office/powerpoint/2010/main" xmlns:p15="http://schemas.microsoft.com/office/powerpoint/2012/main" xmlns:ahyp="http://schemas.microsoft.com/office/drawing/2018/hyperlinkcolor" showMasterPhAnim="0" showMasterSp="0">
+<file path=ppt/notesSlides/notesSlide4.xml><?xml version="1.0" encoding="utf-8"?>
+<p:notes xmlns:a="http://schemas.openxmlformats.org/drawingml/2006/main" xmlns:r="http://schemas.openxmlformats.org/officeDocument/2006/relationships" xmlns:p="http://schemas.openxmlformats.org/presentationml/2006/main" showMasterSp="0" showMasterPhAnim="0">
   <p:cSld>
     <p:spTree>
       <p:nvGrpSpPr>
-        <p:cNvPr id="93" name="Shape 93"/>
+        <p:cNvPr id="1" name="Shape 93"/>
         <p:cNvGrpSpPr/>
         <p:nvPr/>
       </p:nvGrpSpPr>
@@ -1151,9 +1051,11 @@
       <p:sp>
         <p:nvSpPr>
           <p:cNvPr id="94" name="Google Shape;94;g1176d744966_0_71:notes"/>
-          <p:cNvSpPr/>
+          <p:cNvSpPr>
+            <a:spLocks noGrp="1" noRot="1" noChangeAspect="1"/>
+          </p:cNvSpPr>
           <p:nvPr>
-            <p:ph idx="2" type="sldImg"/>
+            <p:ph type="sldImg" idx="2"/>
           </p:nvPr>
         </p:nvSpPr>
         <p:spPr>
@@ -1162,9 +1064,13 @@
             <a:ext cx="6096000" cy="3429000"/>
           </a:xfrm>
           <a:custGeom>
-            <a:rect b="b" l="l" r="r" t="t"/>
+            <a:avLst/>
+            <a:gdLst/>
+            <a:ahLst/>
+            <a:cxnLst/>
+            <a:rect l="l" t="t" r="r" b="b"/>
             <a:pathLst>
-              <a:path extrusionOk="0" h="120000" w="120000">
+              <a:path w="120000" h="120000" extrusionOk="0">
                 <a:moveTo>
                   <a:pt x="0" y="0"/>
                 </a:moveTo>
@@ -1186,9 +1092,11 @@
       <p:sp>
         <p:nvSpPr>
           <p:cNvPr id="95" name="Google Shape;95;g1176d744966_0_71:notes"/>
-          <p:cNvSpPr txBox="1"/>
+          <p:cNvSpPr txBox="1">
+            <a:spLocks noGrp="1"/>
+          </p:cNvSpPr>
           <p:nvPr>
-            <p:ph idx="1" type="body"/>
+            <p:ph type="body" idx="1"/>
           </p:nvPr>
         </p:nvSpPr>
         <p:spPr>
@@ -1201,12 +1109,12 @@
           </a:prstGeom>
         </p:spPr>
         <p:txBody>
-          <a:bodyPr anchorCtr="0" anchor="t" bIns="91425" lIns="91425" spcFirstLastPara="1" rIns="91425" wrap="square" tIns="91425">
+          <a:bodyPr spcFirstLastPara="1" wrap="square" lIns="91425" tIns="91425" rIns="91425" bIns="91425" anchor="t" anchorCtr="0">
             <a:noAutofit/>
           </a:bodyPr>
           <a:lstStyle/>
           <a:p>
-            <a:pPr indent="0" lvl="0" marL="0" rtl="0" algn="l">
+            <a:pPr marL="0" lvl="0" indent="0" algn="l" rtl="0">
               <a:spcBef>
                 <a:spcPts val="0"/>
               </a:spcBef>
@@ -1215,9 +1123,6 @@
               </a:spcAft>
               <a:buNone/>
             </a:pPr>
-            <a:r>
-              <a:t/>
-            </a:r>
             <a:endParaRPr/>
           </a:p>
         </p:txBody>
@@ -1231,11 +1136,11 @@
 </file>
 
 <file path=ppt/slideLayouts/slideLayout1.xml><?xml version="1.0" encoding="utf-8"?>
-<p:sldLayout xmlns:a="http://schemas.openxmlformats.org/drawingml/2006/main" xmlns:r="http://schemas.openxmlformats.org/officeDocument/2006/relationships" xmlns:mc="http://schemas.openxmlformats.org/markup-compatibility/2006" xmlns:mv="urn:schemas-microsoft-com:mac:vml" xmlns:p="http://schemas.openxmlformats.org/presentationml/2006/main" xmlns:c="http://schemas.openxmlformats.org/drawingml/2006/chart" xmlns:dgm="http://schemas.openxmlformats.org/drawingml/2006/diagram" xmlns:o="urn:schemas-microsoft-com:office:office" xmlns:v="urn:schemas-microsoft-com:vml" xmlns:pvml="urn:schemas-microsoft-com:office:powerpoint" xmlns:com="http://schemas.openxmlformats.org/drawingml/2006/compatibility" xmlns:p14="http://schemas.microsoft.com/office/powerpoint/2010/main" xmlns:p15="http://schemas.microsoft.com/office/powerpoint/2012/main" xmlns:ahyp="http://schemas.microsoft.com/office/drawing/2018/hyperlinkcolor" matchingName="Title slide" type="title">
+<p:sldLayout xmlns:a="http://schemas.openxmlformats.org/drawingml/2006/main" xmlns:r="http://schemas.openxmlformats.org/officeDocument/2006/relationships" xmlns:p="http://schemas.openxmlformats.org/presentationml/2006/main" matchingName="Title slide" type="title">
   <p:cSld name="TITLE">
     <p:spTree>
       <p:nvGrpSpPr>
-        <p:cNvPr id="9" name="Shape 9"/>
+        <p:cNvPr id="1" name="Shape 9"/>
         <p:cNvGrpSpPr/>
         <p:nvPr/>
       </p:nvGrpSpPr>
@@ -1250,7 +1155,9 @@
       <p:sp>
         <p:nvSpPr>
           <p:cNvPr id="10" name="Google Shape;10;p2"/>
-          <p:cNvSpPr txBox="1"/>
+          <p:cNvSpPr txBox="1">
+            <a:spLocks noGrp="1"/>
+          </p:cNvSpPr>
           <p:nvPr>
             <p:ph type="ctrTitle"/>
           </p:nvPr>
@@ -1265,7 +1172,7 @@
           </a:prstGeom>
         </p:spPr>
         <p:txBody>
-          <a:bodyPr anchorCtr="0" anchor="b" bIns="91425" lIns="91425" spcFirstLastPara="1" rIns="91425" wrap="square" tIns="91425">
+          <a:bodyPr spcFirstLastPara="1" wrap="square" lIns="91425" tIns="91425" rIns="91425" bIns="91425" anchor="b" anchorCtr="0">
             <a:normAutofit/>
           </a:bodyPr>
           <a:lstStyle>
@@ -1369,15 +1276,19 @@
               <a:defRPr sz="5200"/>
             </a:lvl9pPr>
           </a:lstStyle>
-          <a:p/>
+          <a:p>
+            <a:endParaRPr/>
+          </a:p>
         </p:txBody>
       </p:sp>
       <p:sp>
         <p:nvSpPr>
           <p:cNvPr id="11" name="Google Shape;11;p2"/>
-          <p:cNvSpPr txBox="1"/>
+          <p:cNvSpPr txBox="1">
+            <a:spLocks noGrp="1"/>
+          </p:cNvSpPr>
           <p:nvPr>
-            <p:ph idx="1" type="subTitle"/>
+            <p:ph type="subTitle" idx="1"/>
           </p:nvPr>
         </p:nvSpPr>
         <p:spPr>
@@ -1390,7 +1301,7 @@
           </a:prstGeom>
         </p:spPr>
         <p:txBody>
-          <a:bodyPr anchorCtr="0" anchor="t" bIns="91425" lIns="91425" spcFirstLastPara="1" rIns="91425" wrap="square" tIns="91425">
+          <a:bodyPr spcFirstLastPara="1" wrap="square" lIns="91425" tIns="91425" rIns="91425" bIns="91425" anchor="t" anchorCtr="0">
             <a:normAutofit/>
           </a:bodyPr>
           <a:lstStyle>
@@ -1521,15 +1432,19 @@
               <a:defRPr sz="2800"/>
             </a:lvl9pPr>
           </a:lstStyle>
-          <a:p/>
+          <a:p>
+            <a:endParaRPr/>
+          </a:p>
         </p:txBody>
       </p:sp>
       <p:sp>
         <p:nvSpPr>
           <p:cNvPr id="12" name="Google Shape;12;p2"/>
-          <p:cNvSpPr txBox="1"/>
+          <p:cNvSpPr txBox="1">
+            <a:spLocks noGrp="1"/>
+          </p:cNvSpPr>
           <p:nvPr>
-            <p:ph idx="12" type="sldNum"/>
+            <p:ph type="sldNum" idx="12"/>
           </p:nvPr>
         </p:nvSpPr>
         <p:spPr>
@@ -1542,7 +1457,7 @@
           </a:prstGeom>
         </p:spPr>
         <p:txBody>
-          <a:bodyPr anchorCtr="0" anchor="ctr" bIns="91425" lIns="91425" spcFirstLastPara="1" rIns="91425" wrap="square" tIns="91425">
+          <a:bodyPr spcFirstLastPara="1" wrap="square" lIns="91425" tIns="91425" rIns="91425" bIns="91425" anchor="ctr" anchorCtr="0">
             <a:normAutofit/>
           </a:bodyPr>
           <a:lstStyle>
@@ -1584,7 +1499,7 @@
             </a:lvl9pPr>
           </a:lstStyle>
           <a:p>
-            <a:pPr indent="0" lvl="0" marL="0" rtl="0" algn="r">
+            <a:pPr marL="0" lvl="0" indent="0" algn="r" rtl="0">
               <a:spcBef>
                 <a:spcPts val="0"/>
               </a:spcBef>
@@ -1610,11 +1525,11 @@
 </file>
 
 <file path=ppt/slideLayouts/slideLayout10.xml><?xml version="1.0" encoding="utf-8"?>
-<p:sldLayout xmlns:a="http://schemas.openxmlformats.org/drawingml/2006/main" xmlns:r="http://schemas.openxmlformats.org/officeDocument/2006/relationships" xmlns:mc="http://schemas.openxmlformats.org/markup-compatibility/2006" xmlns:mv="urn:schemas-microsoft-com:mac:vml" xmlns:p="http://schemas.openxmlformats.org/presentationml/2006/main" xmlns:c="http://schemas.openxmlformats.org/drawingml/2006/chart" xmlns:dgm="http://schemas.openxmlformats.org/drawingml/2006/diagram" xmlns:o="urn:schemas-microsoft-com:office:office" xmlns:v="urn:schemas-microsoft-com:vml" xmlns:pvml="urn:schemas-microsoft-com:office:powerpoint" xmlns:com="http://schemas.openxmlformats.org/drawingml/2006/compatibility" xmlns:p14="http://schemas.microsoft.com/office/powerpoint/2010/main" xmlns:p15="http://schemas.microsoft.com/office/powerpoint/2012/main" xmlns:ahyp="http://schemas.microsoft.com/office/drawing/2018/hyperlinkcolor" matchingName="Big number">
+<p:sldLayout xmlns:a="http://schemas.openxmlformats.org/drawingml/2006/main" xmlns:r="http://schemas.openxmlformats.org/officeDocument/2006/relationships" xmlns:p="http://schemas.openxmlformats.org/presentationml/2006/main" matchingName="Big number">
   <p:cSld name="BIG_NUMBER">
     <p:spTree>
       <p:nvGrpSpPr>
-        <p:cNvPr id="53" name="Shape 53"/>
+        <p:cNvPr id="1" name="Shape 53"/>
         <p:cNvGrpSpPr/>
         <p:nvPr/>
       </p:nvGrpSpPr>
@@ -1629,9 +1544,11 @@
       <p:sp>
         <p:nvSpPr>
           <p:cNvPr id="54" name="Google Shape;54;p11"/>
-          <p:cNvSpPr txBox="1"/>
+          <p:cNvSpPr txBox="1">
+            <a:spLocks noGrp="1"/>
+          </p:cNvSpPr>
           <p:nvPr>
-            <p:ph hasCustomPrompt="1" type="title"/>
+            <p:ph type="title" hasCustomPrompt="1"/>
           </p:nvPr>
         </p:nvSpPr>
         <p:spPr>
@@ -1644,7 +1561,7 @@
           </a:prstGeom>
         </p:spPr>
         <p:txBody>
-          <a:bodyPr anchorCtr="0" anchor="b" bIns="91425" lIns="91425" spcFirstLastPara="1" rIns="91425" wrap="square" tIns="91425">
+          <a:bodyPr spcFirstLastPara="1" wrap="square" lIns="91425" tIns="91425" rIns="91425" bIns="91425" anchor="b" anchorCtr="0">
             <a:normAutofit/>
           </a:bodyPr>
           <a:lstStyle>
@@ -1758,9 +1675,11 @@
       <p:sp>
         <p:nvSpPr>
           <p:cNvPr id="55" name="Google Shape;55;p11"/>
-          <p:cNvSpPr txBox="1"/>
+          <p:cNvSpPr txBox="1">
+            <a:spLocks noGrp="1"/>
+          </p:cNvSpPr>
           <p:nvPr>
-            <p:ph idx="1" type="body"/>
+            <p:ph type="body" idx="1"/>
           </p:nvPr>
         </p:nvSpPr>
         <p:spPr>
@@ -1773,11 +1692,11 @@
           </a:prstGeom>
         </p:spPr>
         <p:txBody>
-          <a:bodyPr anchorCtr="0" anchor="t" bIns="91425" lIns="91425" spcFirstLastPara="1" rIns="91425" wrap="square" tIns="91425">
+          <a:bodyPr spcFirstLastPara="1" wrap="square" lIns="91425" tIns="91425" rIns="91425" bIns="91425" anchor="t" anchorCtr="0">
             <a:normAutofit/>
           </a:bodyPr>
           <a:lstStyle>
-            <a:lvl1pPr indent="-342900" lvl="0" marL="457200" algn="ctr">
+            <a:lvl1pPr marL="457200" lvl="0" indent="-342900" algn="ctr">
               <a:spcBef>
                 <a:spcPts val="0"/>
               </a:spcBef>
@@ -1788,7 +1707,7 @@
               <a:buChar char="●"/>
               <a:defRPr/>
             </a:lvl1pPr>
-            <a:lvl2pPr indent="-317500" lvl="1" marL="914400" algn="ctr">
+            <a:lvl2pPr marL="914400" lvl="1" indent="-317500" algn="ctr">
               <a:spcBef>
                 <a:spcPts val="0"/>
               </a:spcBef>
@@ -1799,7 +1718,7 @@
               <a:buChar char="○"/>
               <a:defRPr/>
             </a:lvl2pPr>
-            <a:lvl3pPr indent="-317500" lvl="2" marL="1371600" algn="ctr">
+            <a:lvl3pPr marL="1371600" lvl="2" indent="-317500" algn="ctr">
               <a:spcBef>
                 <a:spcPts val="0"/>
               </a:spcBef>
@@ -1810,7 +1729,7 @@
               <a:buChar char="■"/>
               <a:defRPr/>
             </a:lvl3pPr>
-            <a:lvl4pPr indent="-317500" lvl="3" marL="1828800" algn="ctr">
+            <a:lvl4pPr marL="1828800" lvl="3" indent="-317500" algn="ctr">
               <a:spcBef>
                 <a:spcPts val="0"/>
               </a:spcBef>
@@ -1821,7 +1740,7 @@
               <a:buChar char="●"/>
               <a:defRPr/>
             </a:lvl4pPr>
-            <a:lvl5pPr indent="-317500" lvl="4" marL="2286000" algn="ctr">
+            <a:lvl5pPr marL="2286000" lvl="4" indent="-317500" algn="ctr">
               <a:spcBef>
                 <a:spcPts val="0"/>
               </a:spcBef>
@@ -1832,7 +1751,7 @@
               <a:buChar char="○"/>
               <a:defRPr/>
             </a:lvl5pPr>
-            <a:lvl6pPr indent="-317500" lvl="5" marL="2743200" algn="ctr">
+            <a:lvl6pPr marL="2743200" lvl="5" indent="-317500" algn="ctr">
               <a:spcBef>
                 <a:spcPts val="0"/>
               </a:spcBef>
@@ -1843,7 +1762,7 @@
               <a:buChar char="■"/>
               <a:defRPr/>
             </a:lvl6pPr>
-            <a:lvl7pPr indent="-317500" lvl="6" marL="3200400" algn="ctr">
+            <a:lvl7pPr marL="3200400" lvl="6" indent="-317500" algn="ctr">
               <a:spcBef>
                 <a:spcPts val="0"/>
               </a:spcBef>
@@ -1854,7 +1773,7 @@
               <a:buChar char="●"/>
               <a:defRPr/>
             </a:lvl7pPr>
-            <a:lvl8pPr indent="-317500" lvl="7" marL="3657600" algn="ctr">
+            <a:lvl8pPr marL="3657600" lvl="7" indent="-317500" algn="ctr">
               <a:spcBef>
                 <a:spcPts val="0"/>
               </a:spcBef>
@@ -1865,7 +1784,7 @@
               <a:buChar char="○"/>
               <a:defRPr/>
             </a:lvl8pPr>
-            <a:lvl9pPr indent="-317500" lvl="8" marL="4114800" algn="ctr">
+            <a:lvl9pPr marL="4114800" lvl="8" indent="-317500" algn="ctr">
               <a:spcBef>
                 <a:spcPts val="0"/>
               </a:spcBef>
@@ -1877,15 +1796,19 @@
               <a:defRPr/>
             </a:lvl9pPr>
           </a:lstStyle>
-          <a:p/>
+          <a:p>
+            <a:endParaRPr/>
+          </a:p>
         </p:txBody>
       </p:sp>
       <p:sp>
         <p:nvSpPr>
           <p:cNvPr id="56" name="Google Shape;56;p11"/>
-          <p:cNvSpPr txBox="1"/>
+          <p:cNvSpPr txBox="1">
+            <a:spLocks noGrp="1"/>
+          </p:cNvSpPr>
           <p:nvPr>
-            <p:ph idx="12" type="sldNum"/>
+            <p:ph type="sldNum" idx="12"/>
           </p:nvPr>
         </p:nvSpPr>
         <p:spPr>
@@ -1898,7 +1821,7 @@
           </a:prstGeom>
         </p:spPr>
         <p:txBody>
-          <a:bodyPr anchorCtr="0" anchor="ctr" bIns="91425" lIns="91425" spcFirstLastPara="1" rIns="91425" wrap="square" tIns="91425">
+          <a:bodyPr spcFirstLastPara="1" wrap="square" lIns="91425" tIns="91425" rIns="91425" bIns="91425" anchor="ctr" anchorCtr="0">
             <a:normAutofit/>
           </a:bodyPr>
           <a:lstStyle>
@@ -1940,7 +1863,7 @@
             </a:lvl9pPr>
           </a:lstStyle>
           <a:p>
-            <a:pPr indent="0" lvl="0" marL="0" rtl="0" algn="r">
+            <a:pPr marL="0" lvl="0" indent="0" algn="r" rtl="0">
               <a:spcBef>
                 <a:spcPts val="0"/>
               </a:spcBef>
@@ -1966,11 +1889,11 @@
 </file>
 
 <file path=ppt/slideLayouts/slideLayout11.xml><?xml version="1.0" encoding="utf-8"?>
-<p:sldLayout xmlns:a="http://schemas.openxmlformats.org/drawingml/2006/main" xmlns:r="http://schemas.openxmlformats.org/officeDocument/2006/relationships" xmlns:mc="http://schemas.openxmlformats.org/markup-compatibility/2006" xmlns:mv="urn:schemas-microsoft-com:mac:vml" xmlns:p="http://schemas.openxmlformats.org/presentationml/2006/main" xmlns:c="http://schemas.openxmlformats.org/drawingml/2006/chart" xmlns:dgm="http://schemas.openxmlformats.org/drawingml/2006/diagram" xmlns:o="urn:schemas-microsoft-com:office:office" xmlns:v="urn:schemas-microsoft-com:vml" xmlns:pvml="urn:schemas-microsoft-com:office:powerpoint" xmlns:com="http://schemas.openxmlformats.org/drawingml/2006/compatibility" xmlns:p14="http://schemas.microsoft.com/office/powerpoint/2010/main" xmlns:p15="http://schemas.microsoft.com/office/powerpoint/2012/main" xmlns:ahyp="http://schemas.microsoft.com/office/drawing/2018/hyperlinkcolor" matchingName="Blank" type="blank">
+<p:sldLayout xmlns:a="http://schemas.openxmlformats.org/drawingml/2006/main" xmlns:r="http://schemas.openxmlformats.org/officeDocument/2006/relationships" xmlns:p="http://schemas.openxmlformats.org/presentationml/2006/main" matchingName="Blank" type="blank">
   <p:cSld name="BLANK">
     <p:spTree>
       <p:nvGrpSpPr>
-        <p:cNvPr id="57" name="Shape 57"/>
+        <p:cNvPr id="1" name="Shape 57"/>
         <p:cNvGrpSpPr/>
         <p:nvPr/>
       </p:nvGrpSpPr>
@@ -1985,9 +1908,11 @@
       <p:sp>
         <p:nvSpPr>
           <p:cNvPr id="58" name="Google Shape;58;p12"/>
-          <p:cNvSpPr txBox="1"/>
+          <p:cNvSpPr txBox="1">
+            <a:spLocks noGrp="1"/>
+          </p:cNvSpPr>
           <p:nvPr>
-            <p:ph idx="12" type="sldNum"/>
+            <p:ph type="sldNum" idx="12"/>
           </p:nvPr>
         </p:nvSpPr>
         <p:spPr>
@@ -2000,7 +1925,7 @@
           </a:prstGeom>
         </p:spPr>
         <p:txBody>
-          <a:bodyPr anchorCtr="0" anchor="ctr" bIns="91425" lIns="91425" spcFirstLastPara="1" rIns="91425" wrap="square" tIns="91425">
+          <a:bodyPr spcFirstLastPara="1" wrap="square" lIns="91425" tIns="91425" rIns="91425" bIns="91425" anchor="ctr" anchorCtr="0">
             <a:normAutofit/>
           </a:bodyPr>
           <a:lstStyle>
@@ -2042,7 +1967,7 @@
             </a:lvl9pPr>
           </a:lstStyle>
           <a:p>
-            <a:pPr indent="0" lvl="0" marL="0" rtl="0" algn="r">
+            <a:pPr marL="0" lvl="0" indent="0" algn="r" rtl="0">
               <a:spcBef>
                 <a:spcPts val="0"/>
               </a:spcBef>
@@ -2068,11 +1993,11 @@
 </file>
 
 <file path=ppt/slideLayouts/slideLayout2.xml><?xml version="1.0" encoding="utf-8"?>
-<p:sldLayout xmlns:a="http://schemas.openxmlformats.org/drawingml/2006/main" xmlns:r="http://schemas.openxmlformats.org/officeDocument/2006/relationships" xmlns:mc="http://schemas.openxmlformats.org/markup-compatibility/2006" xmlns:mv="urn:schemas-microsoft-com:mac:vml" xmlns:p="http://schemas.openxmlformats.org/presentationml/2006/main" xmlns:c="http://schemas.openxmlformats.org/drawingml/2006/chart" xmlns:dgm="http://schemas.openxmlformats.org/drawingml/2006/diagram" xmlns:o="urn:schemas-microsoft-com:office:office" xmlns:v="urn:schemas-microsoft-com:vml" xmlns:pvml="urn:schemas-microsoft-com:office:powerpoint" xmlns:com="http://schemas.openxmlformats.org/drawingml/2006/compatibility" xmlns:p14="http://schemas.microsoft.com/office/powerpoint/2010/main" xmlns:p15="http://schemas.microsoft.com/office/powerpoint/2012/main" xmlns:ahyp="http://schemas.microsoft.com/office/drawing/2018/hyperlinkcolor" matchingName="Section header" type="secHead">
+<p:sldLayout xmlns:a="http://schemas.openxmlformats.org/drawingml/2006/main" xmlns:r="http://schemas.openxmlformats.org/officeDocument/2006/relationships" xmlns:p="http://schemas.openxmlformats.org/presentationml/2006/main" matchingName="Section header" type="secHead">
   <p:cSld name="SECTION_HEADER">
     <p:spTree>
       <p:nvGrpSpPr>
-        <p:cNvPr id="13" name="Shape 13"/>
+        <p:cNvPr id="1" name="Shape 13"/>
         <p:cNvGrpSpPr/>
         <p:nvPr/>
       </p:nvGrpSpPr>
@@ -2087,7 +2012,9 @@
       <p:sp>
         <p:nvSpPr>
           <p:cNvPr id="14" name="Google Shape;14;p3"/>
-          <p:cNvSpPr txBox="1"/>
+          <p:cNvSpPr txBox="1">
+            <a:spLocks noGrp="1"/>
+          </p:cNvSpPr>
           <p:nvPr>
             <p:ph type="title"/>
           </p:nvPr>
@@ -2102,7 +2029,7 @@
           </a:prstGeom>
         </p:spPr>
         <p:txBody>
-          <a:bodyPr anchorCtr="0" anchor="ctr" bIns="91425" lIns="91425" spcFirstLastPara="1" rIns="91425" wrap="square" tIns="91425">
+          <a:bodyPr spcFirstLastPara="1" wrap="square" lIns="91425" tIns="91425" rIns="91425" bIns="91425" anchor="ctr" anchorCtr="0">
             <a:normAutofit/>
           </a:bodyPr>
           <a:lstStyle>
@@ -2206,15 +2133,19 @@
               <a:defRPr sz="3600"/>
             </a:lvl9pPr>
           </a:lstStyle>
-          <a:p/>
+          <a:p>
+            <a:endParaRPr/>
+          </a:p>
         </p:txBody>
       </p:sp>
       <p:sp>
         <p:nvSpPr>
           <p:cNvPr id="15" name="Google Shape;15;p3"/>
-          <p:cNvSpPr txBox="1"/>
+          <p:cNvSpPr txBox="1">
+            <a:spLocks noGrp="1"/>
+          </p:cNvSpPr>
           <p:nvPr>
-            <p:ph idx="12" type="sldNum"/>
+            <p:ph type="sldNum" idx="12"/>
           </p:nvPr>
         </p:nvSpPr>
         <p:spPr>
@@ -2227,7 +2158,7 @@
           </a:prstGeom>
         </p:spPr>
         <p:txBody>
-          <a:bodyPr anchorCtr="0" anchor="ctr" bIns="91425" lIns="91425" spcFirstLastPara="1" rIns="91425" wrap="square" tIns="91425">
+          <a:bodyPr spcFirstLastPara="1" wrap="square" lIns="91425" tIns="91425" rIns="91425" bIns="91425" anchor="ctr" anchorCtr="0">
             <a:normAutofit/>
           </a:bodyPr>
           <a:lstStyle>
@@ -2269,7 +2200,7 @@
             </a:lvl9pPr>
           </a:lstStyle>
           <a:p>
-            <a:pPr indent="0" lvl="0" marL="0" rtl="0" algn="r">
+            <a:pPr marL="0" lvl="0" indent="0" algn="r" rtl="0">
               <a:spcBef>
                 <a:spcPts val="0"/>
               </a:spcBef>
@@ -2295,11 +2226,11 @@
 </file>
 
 <file path=ppt/slideLayouts/slideLayout3.xml><?xml version="1.0" encoding="utf-8"?>
-<p:sldLayout xmlns:a="http://schemas.openxmlformats.org/drawingml/2006/main" xmlns:r="http://schemas.openxmlformats.org/officeDocument/2006/relationships" xmlns:mc="http://schemas.openxmlformats.org/markup-compatibility/2006" xmlns:mv="urn:schemas-microsoft-com:mac:vml" xmlns:p="http://schemas.openxmlformats.org/presentationml/2006/main" xmlns:c="http://schemas.openxmlformats.org/drawingml/2006/chart" xmlns:dgm="http://schemas.openxmlformats.org/drawingml/2006/diagram" xmlns:o="urn:schemas-microsoft-com:office:office" xmlns:v="urn:schemas-microsoft-com:vml" xmlns:pvml="urn:schemas-microsoft-com:office:powerpoint" xmlns:com="http://schemas.openxmlformats.org/drawingml/2006/compatibility" xmlns:p14="http://schemas.microsoft.com/office/powerpoint/2010/main" xmlns:p15="http://schemas.microsoft.com/office/powerpoint/2012/main" xmlns:ahyp="http://schemas.microsoft.com/office/drawing/2018/hyperlinkcolor" matchingName="Title and body" type="tx">
+<p:sldLayout xmlns:a="http://schemas.openxmlformats.org/drawingml/2006/main" xmlns:r="http://schemas.openxmlformats.org/officeDocument/2006/relationships" xmlns:p="http://schemas.openxmlformats.org/presentationml/2006/main" matchingName="Title and body" type="tx">
   <p:cSld name="TITLE_AND_BODY">
     <p:spTree>
       <p:nvGrpSpPr>
-        <p:cNvPr id="16" name="Shape 16"/>
+        <p:cNvPr id="1" name="Shape 16"/>
         <p:cNvGrpSpPr/>
         <p:nvPr/>
       </p:nvGrpSpPr>
@@ -2314,7 +2245,9 @@
       <p:sp>
         <p:nvSpPr>
           <p:cNvPr id="17" name="Google Shape;17;p4"/>
-          <p:cNvSpPr txBox="1"/>
+          <p:cNvSpPr txBox="1">
+            <a:spLocks noGrp="1"/>
+          </p:cNvSpPr>
           <p:nvPr>
             <p:ph type="title"/>
           </p:nvPr>
@@ -2329,7 +2262,7 @@
           </a:prstGeom>
         </p:spPr>
         <p:txBody>
-          <a:bodyPr anchorCtr="0" anchor="t" bIns="91425" lIns="91425" spcFirstLastPara="1" rIns="91425" wrap="square" tIns="91425">
+          <a:bodyPr spcFirstLastPara="1" wrap="square" lIns="91425" tIns="91425" rIns="91425" bIns="91425" anchor="t" anchorCtr="0">
             <a:normAutofit/>
           </a:bodyPr>
           <a:lstStyle>
@@ -2433,15 +2366,19 @@
               <a:defRPr/>
             </a:lvl9pPr>
           </a:lstStyle>
-          <a:p/>
+          <a:p>
+            <a:endParaRPr/>
+          </a:p>
         </p:txBody>
       </p:sp>
       <p:sp>
         <p:nvSpPr>
           <p:cNvPr id="18" name="Google Shape;18;p4"/>
-          <p:cNvSpPr txBox="1"/>
+          <p:cNvSpPr txBox="1">
+            <a:spLocks noGrp="1"/>
+          </p:cNvSpPr>
           <p:nvPr>
-            <p:ph idx="1" type="body"/>
+            <p:ph type="body" idx="1"/>
           </p:nvPr>
         </p:nvSpPr>
         <p:spPr>
@@ -2454,11 +2391,11 @@
           </a:prstGeom>
         </p:spPr>
         <p:txBody>
-          <a:bodyPr anchorCtr="0" anchor="t" bIns="91425" lIns="91425" spcFirstLastPara="1" rIns="91425" wrap="square" tIns="91425">
+          <a:bodyPr spcFirstLastPara="1" wrap="square" lIns="91425" tIns="91425" rIns="91425" bIns="91425" anchor="t" anchorCtr="0">
             <a:normAutofit/>
           </a:bodyPr>
           <a:lstStyle>
-            <a:lvl1pPr indent="-342900" lvl="0" marL="457200">
+            <a:lvl1pPr marL="457200" lvl="0" indent="-342900">
               <a:spcBef>
                 <a:spcPts val="0"/>
               </a:spcBef>
@@ -2469,7 +2406,7 @@
               <a:buChar char="●"/>
               <a:defRPr/>
             </a:lvl1pPr>
-            <a:lvl2pPr indent="-317500" lvl="1" marL="914400">
+            <a:lvl2pPr marL="914400" lvl="1" indent="-317500">
               <a:spcBef>
                 <a:spcPts val="0"/>
               </a:spcBef>
@@ -2480,7 +2417,7 @@
               <a:buChar char="○"/>
               <a:defRPr/>
             </a:lvl2pPr>
-            <a:lvl3pPr indent="-317500" lvl="2" marL="1371600">
+            <a:lvl3pPr marL="1371600" lvl="2" indent="-317500">
               <a:spcBef>
                 <a:spcPts val="0"/>
               </a:spcBef>
@@ -2491,7 +2428,7 @@
               <a:buChar char="■"/>
               <a:defRPr/>
             </a:lvl3pPr>
-            <a:lvl4pPr indent="-317500" lvl="3" marL="1828800">
+            <a:lvl4pPr marL="1828800" lvl="3" indent="-317500">
               <a:spcBef>
                 <a:spcPts val="0"/>
               </a:spcBef>
@@ -2502,7 +2439,7 @@
               <a:buChar char="●"/>
               <a:defRPr/>
             </a:lvl4pPr>
-            <a:lvl5pPr indent="-317500" lvl="4" marL="2286000">
+            <a:lvl5pPr marL="2286000" lvl="4" indent="-317500">
               <a:spcBef>
                 <a:spcPts val="0"/>
               </a:spcBef>
@@ -2513,7 +2450,7 @@
               <a:buChar char="○"/>
               <a:defRPr/>
             </a:lvl5pPr>
-            <a:lvl6pPr indent="-317500" lvl="5" marL="2743200">
+            <a:lvl6pPr marL="2743200" lvl="5" indent="-317500">
               <a:spcBef>
                 <a:spcPts val="0"/>
               </a:spcBef>
@@ -2524,7 +2461,7 @@
               <a:buChar char="■"/>
               <a:defRPr/>
             </a:lvl6pPr>
-            <a:lvl7pPr indent="-317500" lvl="6" marL="3200400">
+            <a:lvl7pPr marL="3200400" lvl="6" indent="-317500">
               <a:spcBef>
                 <a:spcPts val="0"/>
               </a:spcBef>
@@ -2535,7 +2472,7 @@
               <a:buChar char="●"/>
               <a:defRPr/>
             </a:lvl7pPr>
-            <a:lvl8pPr indent="-317500" lvl="7" marL="3657600">
+            <a:lvl8pPr marL="3657600" lvl="7" indent="-317500">
               <a:spcBef>
                 <a:spcPts val="0"/>
               </a:spcBef>
@@ -2546,7 +2483,7 @@
               <a:buChar char="○"/>
               <a:defRPr/>
             </a:lvl8pPr>
-            <a:lvl9pPr indent="-317500" lvl="8" marL="4114800">
+            <a:lvl9pPr marL="4114800" lvl="8" indent="-317500">
               <a:spcBef>
                 <a:spcPts val="0"/>
               </a:spcBef>
@@ -2558,15 +2495,19 @@
               <a:defRPr/>
             </a:lvl9pPr>
           </a:lstStyle>
-          <a:p/>
+          <a:p>
+            <a:endParaRPr/>
+          </a:p>
         </p:txBody>
       </p:sp>
       <p:sp>
         <p:nvSpPr>
           <p:cNvPr id="19" name="Google Shape;19;p4"/>
-          <p:cNvSpPr txBox="1"/>
+          <p:cNvSpPr txBox="1">
+            <a:spLocks noGrp="1"/>
+          </p:cNvSpPr>
           <p:nvPr>
-            <p:ph idx="12" type="sldNum"/>
+            <p:ph type="sldNum" idx="12"/>
           </p:nvPr>
         </p:nvSpPr>
         <p:spPr>
@@ -2579,7 +2520,7 @@
           </a:prstGeom>
         </p:spPr>
         <p:txBody>
-          <a:bodyPr anchorCtr="0" anchor="ctr" bIns="91425" lIns="91425" spcFirstLastPara="1" rIns="91425" wrap="square" tIns="91425">
+          <a:bodyPr spcFirstLastPara="1" wrap="square" lIns="91425" tIns="91425" rIns="91425" bIns="91425" anchor="ctr" anchorCtr="0">
             <a:normAutofit/>
           </a:bodyPr>
           <a:lstStyle>
@@ -2621,7 +2562,7 @@
             </a:lvl9pPr>
           </a:lstStyle>
           <a:p>
-            <a:pPr indent="0" lvl="0" marL="0" rtl="0" algn="r">
+            <a:pPr marL="0" lvl="0" indent="0" algn="r" rtl="0">
               <a:spcBef>
                 <a:spcPts val="0"/>
               </a:spcBef>
@@ -2647,11 +2588,11 @@
 </file>
 
 <file path=ppt/slideLayouts/slideLayout4.xml><?xml version="1.0" encoding="utf-8"?>
-<p:sldLayout xmlns:a="http://schemas.openxmlformats.org/drawingml/2006/main" xmlns:r="http://schemas.openxmlformats.org/officeDocument/2006/relationships" xmlns:mc="http://schemas.openxmlformats.org/markup-compatibility/2006" xmlns:mv="urn:schemas-microsoft-com:mac:vml" xmlns:p="http://schemas.openxmlformats.org/presentationml/2006/main" xmlns:c="http://schemas.openxmlformats.org/drawingml/2006/chart" xmlns:dgm="http://schemas.openxmlformats.org/drawingml/2006/diagram" xmlns:o="urn:schemas-microsoft-com:office:office" xmlns:v="urn:schemas-microsoft-com:vml" xmlns:pvml="urn:schemas-microsoft-com:office:powerpoint" xmlns:com="http://schemas.openxmlformats.org/drawingml/2006/compatibility" xmlns:p14="http://schemas.microsoft.com/office/powerpoint/2010/main" xmlns:p15="http://schemas.microsoft.com/office/powerpoint/2012/main" xmlns:ahyp="http://schemas.microsoft.com/office/drawing/2018/hyperlinkcolor" matchingName="Title and two columns" type="twoColTx">
+<p:sldLayout xmlns:a="http://schemas.openxmlformats.org/drawingml/2006/main" xmlns:r="http://schemas.openxmlformats.org/officeDocument/2006/relationships" xmlns:p="http://schemas.openxmlformats.org/presentationml/2006/main" matchingName="Title and two columns" type="twoColTx">
   <p:cSld name="TITLE_AND_TWO_COLUMNS">
     <p:spTree>
       <p:nvGrpSpPr>
-        <p:cNvPr id="20" name="Shape 20"/>
+        <p:cNvPr id="1" name="Shape 20"/>
         <p:cNvGrpSpPr/>
         <p:nvPr/>
       </p:nvGrpSpPr>
@@ -2666,7 +2607,9 @@
       <p:sp>
         <p:nvSpPr>
           <p:cNvPr id="21" name="Google Shape;21;p5"/>
-          <p:cNvSpPr txBox="1"/>
+          <p:cNvSpPr txBox="1">
+            <a:spLocks noGrp="1"/>
+          </p:cNvSpPr>
           <p:nvPr>
             <p:ph type="title"/>
           </p:nvPr>
@@ -2681,7 +2624,7 @@
           </a:prstGeom>
         </p:spPr>
         <p:txBody>
-          <a:bodyPr anchorCtr="0" anchor="t" bIns="91425" lIns="91425" spcFirstLastPara="1" rIns="91425" wrap="square" tIns="91425">
+          <a:bodyPr spcFirstLastPara="1" wrap="square" lIns="91425" tIns="91425" rIns="91425" bIns="91425" anchor="t" anchorCtr="0">
             <a:normAutofit/>
           </a:bodyPr>
           <a:lstStyle>
@@ -2785,15 +2728,19 @@
               <a:defRPr/>
             </a:lvl9pPr>
           </a:lstStyle>
-          <a:p/>
+          <a:p>
+            <a:endParaRPr/>
+          </a:p>
         </p:txBody>
       </p:sp>
       <p:sp>
         <p:nvSpPr>
           <p:cNvPr id="22" name="Google Shape;22;p5"/>
-          <p:cNvSpPr txBox="1"/>
+          <p:cNvSpPr txBox="1">
+            <a:spLocks noGrp="1"/>
+          </p:cNvSpPr>
           <p:nvPr>
-            <p:ph idx="1" type="body"/>
+            <p:ph type="body" idx="1"/>
           </p:nvPr>
         </p:nvSpPr>
         <p:spPr>
@@ -2806,11 +2753,11 @@
           </a:prstGeom>
         </p:spPr>
         <p:txBody>
-          <a:bodyPr anchorCtr="0" anchor="t" bIns="91425" lIns="91425" spcFirstLastPara="1" rIns="91425" wrap="square" tIns="91425">
+          <a:bodyPr spcFirstLastPara="1" wrap="square" lIns="91425" tIns="91425" rIns="91425" bIns="91425" anchor="t" anchorCtr="0">
             <a:normAutofit/>
           </a:bodyPr>
           <a:lstStyle>
-            <a:lvl1pPr indent="-317500" lvl="0" marL="457200">
+            <a:lvl1pPr marL="457200" lvl="0" indent="-317500">
               <a:spcBef>
                 <a:spcPts val="0"/>
               </a:spcBef>
@@ -2821,7 +2768,7 @@
               <a:buChar char="●"/>
               <a:defRPr sz="1400"/>
             </a:lvl1pPr>
-            <a:lvl2pPr indent="-304800" lvl="1" marL="914400">
+            <a:lvl2pPr marL="914400" lvl="1" indent="-304800">
               <a:spcBef>
                 <a:spcPts val="0"/>
               </a:spcBef>
@@ -2832,7 +2779,7 @@
               <a:buChar char="○"/>
               <a:defRPr sz="1200"/>
             </a:lvl2pPr>
-            <a:lvl3pPr indent="-304800" lvl="2" marL="1371600">
+            <a:lvl3pPr marL="1371600" lvl="2" indent="-304800">
               <a:spcBef>
                 <a:spcPts val="0"/>
               </a:spcBef>
@@ -2843,7 +2790,7 @@
               <a:buChar char="■"/>
               <a:defRPr sz="1200"/>
             </a:lvl3pPr>
-            <a:lvl4pPr indent="-304800" lvl="3" marL="1828800">
+            <a:lvl4pPr marL="1828800" lvl="3" indent="-304800">
               <a:spcBef>
                 <a:spcPts val="0"/>
               </a:spcBef>
@@ -2854,7 +2801,7 @@
               <a:buChar char="●"/>
               <a:defRPr sz="1200"/>
             </a:lvl4pPr>
-            <a:lvl5pPr indent="-304800" lvl="4" marL="2286000">
+            <a:lvl5pPr marL="2286000" lvl="4" indent="-304800">
               <a:spcBef>
                 <a:spcPts val="0"/>
               </a:spcBef>
@@ -2865,7 +2812,7 @@
               <a:buChar char="○"/>
               <a:defRPr sz="1200"/>
             </a:lvl5pPr>
-            <a:lvl6pPr indent="-304800" lvl="5" marL="2743200">
+            <a:lvl6pPr marL="2743200" lvl="5" indent="-304800">
               <a:spcBef>
                 <a:spcPts val="0"/>
               </a:spcBef>
@@ -2876,7 +2823,7 @@
               <a:buChar char="■"/>
               <a:defRPr sz="1200"/>
             </a:lvl6pPr>
-            <a:lvl7pPr indent="-304800" lvl="6" marL="3200400">
+            <a:lvl7pPr marL="3200400" lvl="6" indent="-304800">
               <a:spcBef>
                 <a:spcPts val="0"/>
               </a:spcBef>
@@ -2887,7 +2834,7 @@
               <a:buChar char="●"/>
               <a:defRPr sz="1200"/>
             </a:lvl7pPr>
-            <a:lvl8pPr indent="-304800" lvl="7" marL="3657600">
+            <a:lvl8pPr marL="3657600" lvl="7" indent="-304800">
               <a:spcBef>
                 <a:spcPts val="0"/>
               </a:spcBef>
@@ -2898,7 +2845,7 @@
               <a:buChar char="○"/>
               <a:defRPr sz="1200"/>
             </a:lvl8pPr>
-            <a:lvl9pPr indent="-304800" lvl="8" marL="4114800">
+            <a:lvl9pPr marL="4114800" lvl="8" indent="-304800">
               <a:spcBef>
                 <a:spcPts val="0"/>
               </a:spcBef>
@@ -2910,15 +2857,19 @@
               <a:defRPr sz="1200"/>
             </a:lvl9pPr>
           </a:lstStyle>
-          <a:p/>
+          <a:p>
+            <a:endParaRPr/>
+          </a:p>
         </p:txBody>
       </p:sp>
       <p:sp>
         <p:nvSpPr>
           <p:cNvPr id="23" name="Google Shape;23;p5"/>
-          <p:cNvSpPr txBox="1"/>
+          <p:cNvSpPr txBox="1">
+            <a:spLocks noGrp="1"/>
+          </p:cNvSpPr>
           <p:nvPr>
-            <p:ph idx="2" type="body"/>
+            <p:ph type="body" idx="2"/>
           </p:nvPr>
         </p:nvSpPr>
         <p:spPr>
@@ -2931,11 +2882,11 @@
           </a:prstGeom>
         </p:spPr>
         <p:txBody>
-          <a:bodyPr anchorCtr="0" anchor="t" bIns="91425" lIns="91425" spcFirstLastPara="1" rIns="91425" wrap="square" tIns="91425">
+          <a:bodyPr spcFirstLastPara="1" wrap="square" lIns="91425" tIns="91425" rIns="91425" bIns="91425" anchor="t" anchorCtr="0">
             <a:normAutofit/>
           </a:bodyPr>
           <a:lstStyle>
-            <a:lvl1pPr indent="-317500" lvl="0" marL="457200">
+            <a:lvl1pPr marL="457200" lvl="0" indent="-317500">
               <a:spcBef>
                 <a:spcPts val="0"/>
               </a:spcBef>
@@ -2946,7 +2897,7 @@
               <a:buChar char="●"/>
               <a:defRPr sz="1400"/>
             </a:lvl1pPr>
-            <a:lvl2pPr indent="-304800" lvl="1" marL="914400">
+            <a:lvl2pPr marL="914400" lvl="1" indent="-304800">
               <a:spcBef>
                 <a:spcPts val="0"/>
               </a:spcBef>
@@ -2957,7 +2908,7 @@
               <a:buChar char="○"/>
               <a:defRPr sz="1200"/>
             </a:lvl2pPr>
-            <a:lvl3pPr indent="-304800" lvl="2" marL="1371600">
+            <a:lvl3pPr marL="1371600" lvl="2" indent="-304800">
               <a:spcBef>
                 <a:spcPts val="0"/>
               </a:spcBef>
@@ -2968,7 +2919,7 @@
               <a:buChar char="■"/>
               <a:defRPr sz="1200"/>
             </a:lvl3pPr>
-            <a:lvl4pPr indent="-304800" lvl="3" marL="1828800">
+            <a:lvl4pPr marL="1828800" lvl="3" indent="-304800">
               <a:spcBef>
                 <a:spcPts val="0"/>
               </a:spcBef>
@@ -2979,7 +2930,7 @@
               <a:buChar char="●"/>
               <a:defRPr sz="1200"/>
             </a:lvl4pPr>
-            <a:lvl5pPr indent="-304800" lvl="4" marL="2286000">
+            <a:lvl5pPr marL="2286000" lvl="4" indent="-304800">
               <a:spcBef>
                 <a:spcPts val="0"/>
               </a:spcBef>
@@ -2990,7 +2941,7 @@
               <a:buChar char="○"/>
               <a:defRPr sz="1200"/>
             </a:lvl5pPr>
-            <a:lvl6pPr indent="-304800" lvl="5" marL="2743200">
+            <a:lvl6pPr marL="2743200" lvl="5" indent="-304800">
               <a:spcBef>
                 <a:spcPts val="0"/>
               </a:spcBef>
@@ -3001,7 +2952,7 @@
               <a:buChar char="■"/>
               <a:defRPr sz="1200"/>
             </a:lvl6pPr>
-            <a:lvl7pPr indent="-304800" lvl="6" marL="3200400">
+            <a:lvl7pPr marL="3200400" lvl="6" indent="-304800">
               <a:spcBef>
                 <a:spcPts val="0"/>
               </a:spcBef>
@@ -3012,7 +2963,7 @@
               <a:buChar char="●"/>
               <a:defRPr sz="1200"/>
             </a:lvl7pPr>
-            <a:lvl8pPr indent="-304800" lvl="7" marL="3657600">
+            <a:lvl8pPr marL="3657600" lvl="7" indent="-304800">
               <a:spcBef>
                 <a:spcPts val="0"/>
               </a:spcBef>
@@ -3023,7 +2974,7 @@
               <a:buChar char="○"/>
               <a:defRPr sz="1200"/>
             </a:lvl8pPr>
-            <a:lvl9pPr indent="-304800" lvl="8" marL="4114800">
+            <a:lvl9pPr marL="4114800" lvl="8" indent="-304800">
               <a:spcBef>
                 <a:spcPts val="0"/>
               </a:spcBef>
@@ -3035,15 +2986,19 @@
               <a:defRPr sz="1200"/>
             </a:lvl9pPr>
           </a:lstStyle>
-          <a:p/>
+          <a:p>
+            <a:endParaRPr/>
+          </a:p>
         </p:txBody>
       </p:sp>
       <p:sp>
         <p:nvSpPr>
           <p:cNvPr id="24" name="Google Shape;24;p5"/>
-          <p:cNvSpPr txBox="1"/>
+          <p:cNvSpPr txBox="1">
+            <a:spLocks noGrp="1"/>
+          </p:cNvSpPr>
           <p:nvPr>
-            <p:ph idx="12" type="sldNum"/>
+            <p:ph type="sldNum" idx="12"/>
           </p:nvPr>
         </p:nvSpPr>
         <p:spPr>
@@ -3056,7 +3011,7 @@
           </a:prstGeom>
         </p:spPr>
         <p:txBody>
-          <a:bodyPr anchorCtr="0" anchor="ctr" bIns="91425" lIns="91425" spcFirstLastPara="1" rIns="91425" wrap="square" tIns="91425">
+          <a:bodyPr spcFirstLastPara="1" wrap="square" lIns="91425" tIns="91425" rIns="91425" bIns="91425" anchor="ctr" anchorCtr="0">
             <a:normAutofit/>
           </a:bodyPr>
           <a:lstStyle>
@@ -3098,7 +3053,7 @@
             </a:lvl9pPr>
           </a:lstStyle>
           <a:p>
-            <a:pPr indent="0" lvl="0" marL="0" rtl="0" algn="r">
+            <a:pPr marL="0" lvl="0" indent="0" algn="r" rtl="0">
               <a:spcBef>
                 <a:spcPts val="0"/>
               </a:spcBef>
@@ -3124,11 +3079,11 @@
 </file>
 
 <file path=ppt/slideLayouts/slideLayout5.xml><?xml version="1.0" encoding="utf-8"?>
-<p:sldLayout xmlns:a="http://schemas.openxmlformats.org/drawingml/2006/main" xmlns:r="http://schemas.openxmlformats.org/officeDocument/2006/relationships" xmlns:mc="http://schemas.openxmlformats.org/markup-compatibility/2006" xmlns:mv="urn:schemas-microsoft-com:mac:vml" xmlns:p="http://schemas.openxmlformats.org/presentationml/2006/main" xmlns:c="http://schemas.openxmlformats.org/drawingml/2006/chart" xmlns:dgm="http://schemas.openxmlformats.org/drawingml/2006/diagram" xmlns:o="urn:schemas-microsoft-com:office:office" xmlns:v="urn:schemas-microsoft-com:vml" xmlns:pvml="urn:schemas-microsoft-com:office:powerpoint" xmlns:com="http://schemas.openxmlformats.org/drawingml/2006/compatibility" xmlns:p14="http://schemas.microsoft.com/office/powerpoint/2010/main" xmlns:p15="http://schemas.microsoft.com/office/powerpoint/2012/main" xmlns:ahyp="http://schemas.microsoft.com/office/drawing/2018/hyperlinkcolor" matchingName="Title only" type="titleOnly">
+<p:sldLayout xmlns:a="http://schemas.openxmlformats.org/drawingml/2006/main" xmlns:r="http://schemas.openxmlformats.org/officeDocument/2006/relationships" xmlns:p="http://schemas.openxmlformats.org/presentationml/2006/main" matchingName="Title only" type="titleOnly">
   <p:cSld name="TITLE_ONLY">
     <p:spTree>
       <p:nvGrpSpPr>
-        <p:cNvPr id="25" name="Shape 25"/>
+        <p:cNvPr id="1" name="Shape 25"/>
         <p:cNvGrpSpPr/>
         <p:nvPr/>
       </p:nvGrpSpPr>
@@ -3143,7 +3098,9 @@
       <p:sp>
         <p:nvSpPr>
           <p:cNvPr id="26" name="Google Shape;26;p6"/>
-          <p:cNvSpPr txBox="1"/>
+          <p:cNvSpPr txBox="1">
+            <a:spLocks noGrp="1"/>
+          </p:cNvSpPr>
           <p:nvPr>
             <p:ph type="title"/>
           </p:nvPr>
@@ -3158,7 +3115,7 @@
           </a:prstGeom>
         </p:spPr>
         <p:txBody>
-          <a:bodyPr anchorCtr="0" anchor="t" bIns="91425" lIns="91425" spcFirstLastPara="1" rIns="91425" wrap="square" tIns="91425">
+          <a:bodyPr spcFirstLastPara="1" wrap="square" lIns="91425" tIns="91425" rIns="91425" bIns="91425" anchor="t" anchorCtr="0">
             <a:normAutofit/>
           </a:bodyPr>
           <a:lstStyle>
@@ -3262,15 +3219,19 @@
               <a:defRPr/>
             </a:lvl9pPr>
           </a:lstStyle>
-          <a:p/>
+          <a:p>
+            <a:endParaRPr/>
+          </a:p>
         </p:txBody>
       </p:sp>
       <p:sp>
         <p:nvSpPr>
           <p:cNvPr id="27" name="Google Shape;27;p6"/>
-          <p:cNvSpPr txBox="1"/>
+          <p:cNvSpPr txBox="1">
+            <a:spLocks noGrp="1"/>
+          </p:cNvSpPr>
           <p:nvPr>
-            <p:ph idx="12" type="sldNum"/>
+            <p:ph type="sldNum" idx="12"/>
           </p:nvPr>
         </p:nvSpPr>
         <p:spPr>
@@ -3283,7 +3244,7 @@
           </a:prstGeom>
         </p:spPr>
         <p:txBody>
-          <a:bodyPr anchorCtr="0" anchor="ctr" bIns="91425" lIns="91425" spcFirstLastPara="1" rIns="91425" wrap="square" tIns="91425">
+          <a:bodyPr spcFirstLastPara="1" wrap="square" lIns="91425" tIns="91425" rIns="91425" bIns="91425" anchor="ctr" anchorCtr="0">
             <a:normAutofit/>
           </a:bodyPr>
           <a:lstStyle>
@@ -3325,7 +3286,7 @@
             </a:lvl9pPr>
           </a:lstStyle>
           <a:p>
-            <a:pPr indent="0" lvl="0" marL="0" rtl="0" algn="r">
+            <a:pPr marL="0" lvl="0" indent="0" algn="r" rtl="0">
               <a:spcBef>
                 <a:spcPts val="0"/>
               </a:spcBef>
@@ -3351,11 +3312,11 @@
 </file>
 
 <file path=ppt/slideLayouts/slideLayout6.xml><?xml version="1.0" encoding="utf-8"?>
-<p:sldLayout xmlns:a="http://schemas.openxmlformats.org/drawingml/2006/main" xmlns:r="http://schemas.openxmlformats.org/officeDocument/2006/relationships" xmlns:mc="http://schemas.openxmlformats.org/markup-compatibility/2006" xmlns:mv="urn:schemas-microsoft-com:mac:vml" xmlns:p="http://schemas.openxmlformats.org/presentationml/2006/main" xmlns:c="http://schemas.openxmlformats.org/drawingml/2006/chart" xmlns:dgm="http://schemas.openxmlformats.org/drawingml/2006/diagram" xmlns:o="urn:schemas-microsoft-com:office:office" xmlns:v="urn:schemas-microsoft-com:vml" xmlns:pvml="urn:schemas-microsoft-com:office:powerpoint" xmlns:com="http://schemas.openxmlformats.org/drawingml/2006/compatibility" xmlns:p14="http://schemas.microsoft.com/office/powerpoint/2010/main" xmlns:p15="http://schemas.microsoft.com/office/powerpoint/2012/main" xmlns:ahyp="http://schemas.microsoft.com/office/drawing/2018/hyperlinkcolor" matchingName="One column text">
+<p:sldLayout xmlns:a="http://schemas.openxmlformats.org/drawingml/2006/main" xmlns:r="http://schemas.openxmlformats.org/officeDocument/2006/relationships" xmlns:p="http://schemas.openxmlformats.org/presentationml/2006/main" matchingName="One column text">
   <p:cSld name="ONE_COLUMN_TEXT">
     <p:spTree>
       <p:nvGrpSpPr>
-        <p:cNvPr id="28" name="Shape 28"/>
+        <p:cNvPr id="1" name="Shape 28"/>
         <p:cNvGrpSpPr/>
         <p:nvPr/>
       </p:nvGrpSpPr>
@@ -3370,7 +3331,9 @@
       <p:sp>
         <p:nvSpPr>
           <p:cNvPr id="29" name="Google Shape;29;p7"/>
-          <p:cNvSpPr txBox="1"/>
+          <p:cNvSpPr txBox="1">
+            <a:spLocks noGrp="1"/>
+          </p:cNvSpPr>
           <p:nvPr>
             <p:ph type="title"/>
           </p:nvPr>
@@ -3385,7 +3348,7 @@
           </a:prstGeom>
         </p:spPr>
         <p:txBody>
-          <a:bodyPr anchorCtr="0" anchor="b" bIns="91425" lIns="91425" spcFirstLastPara="1" rIns="91425" wrap="square" tIns="91425">
+          <a:bodyPr spcFirstLastPara="1" wrap="square" lIns="91425" tIns="91425" rIns="91425" bIns="91425" anchor="b" anchorCtr="0">
             <a:normAutofit/>
           </a:bodyPr>
           <a:lstStyle>
@@ -3489,15 +3452,19 @@
               <a:defRPr sz="2400"/>
             </a:lvl9pPr>
           </a:lstStyle>
-          <a:p/>
+          <a:p>
+            <a:endParaRPr/>
+          </a:p>
         </p:txBody>
       </p:sp>
       <p:sp>
         <p:nvSpPr>
           <p:cNvPr id="30" name="Google Shape;30;p7"/>
-          <p:cNvSpPr txBox="1"/>
+          <p:cNvSpPr txBox="1">
+            <a:spLocks noGrp="1"/>
+          </p:cNvSpPr>
           <p:nvPr>
-            <p:ph idx="1" type="body"/>
+            <p:ph type="body" idx="1"/>
           </p:nvPr>
         </p:nvSpPr>
         <p:spPr>
@@ -3510,11 +3477,11 @@
           </a:prstGeom>
         </p:spPr>
         <p:txBody>
-          <a:bodyPr anchorCtr="0" anchor="t" bIns="91425" lIns="91425" spcFirstLastPara="1" rIns="91425" wrap="square" tIns="91425">
+          <a:bodyPr spcFirstLastPara="1" wrap="square" lIns="91425" tIns="91425" rIns="91425" bIns="91425" anchor="t" anchorCtr="0">
             <a:normAutofit/>
           </a:bodyPr>
           <a:lstStyle>
-            <a:lvl1pPr indent="-304800" lvl="0" marL="457200">
+            <a:lvl1pPr marL="457200" lvl="0" indent="-304800">
               <a:spcBef>
                 <a:spcPts val="0"/>
               </a:spcBef>
@@ -3525,7 +3492,7 @@
               <a:buChar char="●"/>
               <a:defRPr sz="1200"/>
             </a:lvl1pPr>
-            <a:lvl2pPr indent="-304800" lvl="1" marL="914400">
+            <a:lvl2pPr marL="914400" lvl="1" indent="-304800">
               <a:spcBef>
                 <a:spcPts val="0"/>
               </a:spcBef>
@@ -3536,7 +3503,7 @@
               <a:buChar char="○"/>
               <a:defRPr sz="1200"/>
             </a:lvl2pPr>
-            <a:lvl3pPr indent="-304800" lvl="2" marL="1371600">
+            <a:lvl3pPr marL="1371600" lvl="2" indent="-304800">
               <a:spcBef>
                 <a:spcPts val="0"/>
               </a:spcBef>
@@ -3547,7 +3514,7 @@
               <a:buChar char="■"/>
               <a:defRPr sz="1200"/>
             </a:lvl3pPr>
-            <a:lvl4pPr indent="-304800" lvl="3" marL="1828800">
+            <a:lvl4pPr marL="1828800" lvl="3" indent="-304800">
               <a:spcBef>
                 <a:spcPts val="0"/>
               </a:spcBef>
@@ -3558,7 +3525,7 @@
               <a:buChar char="●"/>
               <a:defRPr sz="1200"/>
             </a:lvl4pPr>
-            <a:lvl5pPr indent="-304800" lvl="4" marL="2286000">
+            <a:lvl5pPr marL="2286000" lvl="4" indent="-304800">
               <a:spcBef>
                 <a:spcPts val="0"/>
               </a:spcBef>
@@ -3569,7 +3536,7 @@
               <a:buChar char="○"/>
               <a:defRPr sz="1200"/>
             </a:lvl5pPr>
-            <a:lvl6pPr indent="-304800" lvl="5" marL="2743200">
+            <a:lvl6pPr marL="2743200" lvl="5" indent="-304800">
               <a:spcBef>
                 <a:spcPts val="0"/>
               </a:spcBef>
@@ -3580,7 +3547,7 @@
               <a:buChar char="■"/>
               <a:defRPr sz="1200"/>
             </a:lvl6pPr>
-            <a:lvl7pPr indent="-304800" lvl="6" marL="3200400">
+            <a:lvl7pPr marL="3200400" lvl="6" indent="-304800">
               <a:spcBef>
                 <a:spcPts val="0"/>
               </a:spcBef>
@@ -3591,7 +3558,7 @@
               <a:buChar char="●"/>
               <a:defRPr sz="1200"/>
             </a:lvl7pPr>
-            <a:lvl8pPr indent="-304800" lvl="7" marL="3657600">
+            <a:lvl8pPr marL="3657600" lvl="7" indent="-304800">
               <a:spcBef>
                 <a:spcPts val="0"/>
               </a:spcBef>
@@ -3602,7 +3569,7 @@
               <a:buChar char="○"/>
               <a:defRPr sz="1200"/>
             </a:lvl8pPr>
-            <a:lvl9pPr indent="-304800" lvl="8" marL="4114800">
+            <a:lvl9pPr marL="4114800" lvl="8" indent="-304800">
               <a:spcBef>
                 <a:spcPts val="0"/>
               </a:spcBef>
@@ -3614,15 +3581,19 @@
               <a:defRPr sz="1200"/>
             </a:lvl9pPr>
           </a:lstStyle>
-          <a:p/>
+          <a:p>
+            <a:endParaRPr/>
+          </a:p>
         </p:txBody>
       </p:sp>
       <p:sp>
         <p:nvSpPr>
           <p:cNvPr id="31" name="Google Shape;31;p7"/>
-          <p:cNvSpPr txBox="1"/>
+          <p:cNvSpPr txBox="1">
+            <a:spLocks noGrp="1"/>
+          </p:cNvSpPr>
           <p:nvPr>
-            <p:ph idx="12" type="sldNum"/>
+            <p:ph type="sldNum" idx="12"/>
           </p:nvPr>
         </p:nvSpPr>
         <p:spPr>
@@ -3635,7 +3606,7 @@
           </a:prstGeom>
         </p:spPr>
         <p:txBody>
-          <a:bodyPr anchorCtr="0" anchor="ctr" bIns="91425" lIns="91425" spcFirstLastPara="1" rIns="91425" wrap="square" tIns="91425">
+          <a:bodyPr spcFirstLastPara="1" wrap="square" lIns="91425" tIns="91425" rIns="91425" bIns="91425" anchor="ctr" anchorCtr="0">
             <a:normAutofit/>
           </a:bodyPr>
           <a:lstStyle>
@@ -3677,7 +3648,7 @@
             </a:lvl9pPr>
           </a:lstStyle>
           <a:p>
-            <a:pPr indent="0" lvl="0" marL="0" rtl="0" algn="r">
+            <a:pPr marL="0" lvl="0" indent="0" algn="r" rtl="0">
               <a:spcBef>
                 <a:spcPts val="0"/>
               </a:spcBef>
@@ -3703,11 +3674,11 @@
 </file>
 
 <file path=ppt/slideLayouts/slideLayout7.xml><?xml version="1.0" encoding="utf-8"?>
-<p:sldLayout xmlns:a="http://schemas.openxmlformats.org/drawingml/2006/main" xmlns:r="http://schemas.openxmlformats.org/officeDocument/2006/relationships" xmlns:mc="http://schemas.openxmlformats.org/markup-compatibility/2006" xmlns:mv="urn:schemas-microsoft-com:mac:vml" xmlns:p="http://schemas.openxmlformats.org/presentationml/2006/main" xmlns:c="http://schemas.openxmlformats.org/drawingml/2006/chart" xmlns:dgm="http://schemas.openxmlformats.org/drawingml/2006/diagram" xmlns:o="urn:schemas-microsoft-com:office:office" xmlns:v="urn:schemas-microsoft-com:vml" xmlns:pvml="urn:schemas-microsoft-com:office:powerpoint" xmlns:com="http://schemas.openxmlformats.org/drawingml/2006/compatibility" xmlns:p14="http://schemas.microsoft.com/office/powerpoint/2010/main" xmlns:p15="http://schemas.microsoft.com/office/powerpoint/2012/main" xmlns:ahyp="http://schemas.microsoft.com/office/drawing/2018/hyperlinkcolor" matchingName="Main point">
+<p:sldLayout xmlns:a="http://schemas.openxmlformats.org/drawingml/2006/main" xmlns:r="http://schemas.openxmlformats.org/officeDocument/2006/relationships" xmlns:p="http://schemas.openxmlformats.org/presentationml/2006/main" matchingName="Main point">
   <p:cSld name="MAIN_POINT">
     <p:spTree>
       <p:nvGrpSpPr>
-        <p:cNvPr id="32" name="Shape 32"/>
+        <p:cNvPr id="1" name="Shape 32"/>
         <p:cNvGrpSpPr/>
         <p:nvPr/>
       </p:nvGrpSpPr>
@@ -3722,7 +3693,9 @@
       <p:sp>
         <p:nvSpPr>
           <p:cNvPr id="33" name="Google Shape;33;p8"/>
-          <p:cNvSpPr txBox="1"/>
+          <p:cNvSpPr txBox="1">
+            <a:spLocks noGrp="1"/>
+          </p:cNvSpPr>
           <p:nvPr>
             <p:ph type="title"/>
           </p:nvPr>
@@ -3737,7 +3710,7 @@
           </a:prstGeom>
         </p:spPr>
         <p:txBody>
-          <a:bodyPr anchorCtr="0" anchor="ctr" bIns="91425" lIns="91425" spcFirstLastPara="1" rIns="91425" wrap="square" tIns="91425">
+          <a:bodyPr spcFirstLastPara="1" wrap="square" lIns="91425" tIns="91425" rIns="91425" bIns="91425" anchor="ctr" anchorCtr="0">
             <a:normAutofit/>
           </a:bodyPr>
           <a:lstStyle>
@@ -3841,15 +3814,19 @@
               <a:defRPr sz="4800"/>
             </a:lvl9pPr>
           </a:lstStyle>
-          <a:p/>
+          <a:p>
+            <a:endParaRPr/>
+          </a:p>
         </p:txBody>
       </p:sp>
       <p:sp>
         <p:nvSpPr>
           <p:cNvPr id="34" name="Google Shape;34;p8"/>
-          <p:cNvSpPr txBox="1"/>
+          <p:cNvSpPr txBox="1">
+            <a:spLocks noGrp="1"/>
+          </p:cNvSpPr>
           <p:nvPr>
-            <p:ph idx="12" type="sldNum"/>
+            <p:ph type="sldNum" idx="12"/>
           </p:nvPr>
         </p:nvSpPr>
         <p:spPr>
@@ -3862,7 +3839,7 @@
           </a:prstGeom>
         </p:spPr>
         <p:txBody>
-          <a:bodyPr anchorCtr="0" anchor="ctr" bIns="91425" lIns="91425" spcFirstLastPara="1" rIns="91425" wrap="square" tIns="91425">
+          <a:bodyPr spcFirstLastPara="1" wrap="square" lIns="91425" tIns="91425" rIns="91425" bIns="91425" anchor="ctr" anchorCtr="0">
             <a:normAutofit/>
           </a:bodyPr>
           <a:lstStyle>
@@ -3904,7 +3881,7 @@
             </a:lvl9pPr>
           </a:lstStyle>
           <a:p>
-            <a:pPr indent="0" lvl="0" marL="0" rtl="0" algn="r">
+            <a:pPr marL="0" lvl="0" indent="0" algn="r" rtl="0">
               <a:spcBef>
                 <a:spcPts val="0"/>
               </a:spcBef>
@@ -3930,11 +3907,11 @@
 </file>
 
 <file path=ppt/slideLayouts/slideLayout8.xml><?xml version="1.0" encoding="utf-8"?>
-<p:sldLayout xmlns:a="http://schemas.openxmlformats.org/drawingml/2006/main" xmlns:r="http://schemas.openxmlformats.org/officeDocument/2006/relationships" xmlns:mc="http://schemas.openxmlformats.org/markup-compatibility/2006" xmlns:mv="urn:schemas-microsoft-com:mac:vml" xmlns:p="http://schemas.openxmlformats.org/presentationml/2006/main" xmlns:c="http://schemas.openxmlformats.org/drawingml/2006/chart" xmlns:dgm="http://schemas.openxmlformats.org/drawingml/2006/diagram" xmlns:o="urn:schemas-microsoft-com:office:office" xmlns:v="urn:schemas-microsoft-com:vml" xmlns:pvml="urn:schemas-microsoft-com:office:powerpoint" xmlns:com="http://schemas.openxmlformats.org/drawingml/2006/compatibility" xmlns:p14="http://schemas.microsoft.com/office/powerpoint/2010/main" xmlns:p15="http://schemas.microsoft.com/office/powerpoint/2012/main" xmlns:ahyp="http://schemas.microsoft.com/office/drawing/2018/hyperlinkcolor" matchingName="Section title and description">
+<p:sldLayout xmlns:a="http://schemas.openxmlformats.org/drawingml/2006/main" xmlns:r="http://schemas.openxmlformats.org/officeDocument/2006/relationships" xmlns:p="http://schemas.openxmlformats.org/presentationml/2006/main" matchingName="Section title and description">
   <p:cSld name="SECTION_TITLE_AND_DESCRIPTION">
     <p:spTree>
       <p:nvGrpSpPr>
-        <p:cNvPr id="35" name="Shape 35"/>
+        <p:cNvPr id="1" name="Shape 35"/>
         <p:cNvGrpSpPr/>
         <p:nvPr/>
       </p:nvGrpSpPr>
@@ -3968,12 +3945,12 @@
           </a:ln>
         </p:spPr>
         <p:txBody>
-          <a:bodyPr anchorCtr="0" anchor="ctr" bIns="91425" lIns="91425" spcFirstLastPara="1" rIns="91425" wrap="square" tIns="91425">
+          <a:bodyPr spcFirstLastPara="1" wrap="square" lIns="91425" tIns="91425" rIns="91425" bIns="91425" anchor="ctr" anchorCtr="0">
             <a:noAutofit/>
           </a:bodyPr>
           <a:lstStyle/>
           <a:p>
-            <a:pPr indent="0" lvl="0" marL="0" rtl="0" algn="l">
+            <a:pPr marL="0" lvl="0" indent="0" algn="l" rtl="0">
               <a:spcBef>
                 <a:spcPts val="0"/>
               </a:spcBef>
@@ -3982,9 +3959,6 @@
               </a:spcAft>
               <a:buNone/>
             </a:pPr>
-            <a:r>
-              <a:t/>
-            </a:r>
             <a:endParaRPr/>
           </a:p>
         </p:txBody>
@@ -3992,7 +3966,9 @@
       <p:sp>
         <p:nvSpPr>
           <p:cNvPr id="37" name="Google Shape;37;p9"/>
-          <p:cNvSpPr txBox="1"/>
+          <p:cNvSpPr txBox="1">
+            <a:spLocks noGrp="1"/>
+          </p:cNvSpPr>
           <p:nvPr>
             <p:ph type="title"/>
           </p:nvPr>
@@ -4007,7 +3983,7 @@
           </a:prstGeom>
         </p:spPr>
         <p:txBody>
-          <a:bodyPr anchorCtr="0" anchor="b" bIns="91425" lIns="91425" spcFirstLastPara="1" rIns="91425" wrap="square" tIns="91425">
+          <a:bodyPr spcFirstLastPara="1" wrap="square" lIns="91425" tIns="91425" rIns="91425" bIns="91425" anchor="b" anchorCtr="0">
             <a:normAutofit/>
           </a:bodyPr>
           <a:lstStyle>
@@ -4111,15 +4087,19 @@
               <a:defRPr sz="4200"/>
             </a:lvl9pPr>
           </a:lstStyle>
-          <a:p/>
+          <a:p>
+            <a:endParaRPr/>
+          </a:p>
         </p:txBody>
       </p:sp>
       <p:sp>
         <p:nvSpPr>
           <p:cNvPr id="38" name="Google Shape;38;p9"/>
-          <p:cNvSpPr txBox="1"/>
+          <p:cNvSpPr txBox="1">
+            <a:spLocks noGrp="1"/>
+          </p:cNvSpPr>
           <p:nvPr>
-            <p:ph idx="1" type="subTitle"/>
+            <p:ph type="subTitle" idx="1"/>
           </p:nvPr>
         </p:nvSpPr>
         <p:spPr>
@@ -4132,7 +4112,7 @@
           </a:prstGeom>
         </p:spPr>
         <p:txBody>
-          <a:bodyPr anchorCtr="0" anchor="t" bIns="91425" lIns="91425" spcFirstLastPara="1" rIns="91425" wrap="square" tIns="91425">
+          <a:bodyPr spcFirstLastPara="1" wrap="square" lIns="91425" tIns="91425" rIns="91425" bIns="91425" anchor="t" anchorCtr="0">
             <a:normAutofit/>
           </a:bodyPr>
           <a:lstStyle>
@@ -4263,15 +4243,19 @@
               <a:defRPr sz="2100"/>
             </a:lvl9pPr>
           </a:lstStyle>
-          <a:p/>
+          <a:p>
+            <a:endParaRPr/>
+          </a:p>
         </p:txBody>
       </p:sp>
       <p:sp>
         <p:nvSpPr>
           <p:cNvPr id="39" name="Google Shape;39;p9"/>
-          <p:cNvSpPr txBox="1"/>
+          <p:cNvSpPr txBox="1">
+            <a:spLocks noGrp="1"/>
+          </p:cNvSpPr>
           <p:nvPr>
-            <p:ph idx="2" type="body"/>
+            <p:ph type="body" idx="2"/>
           </p:nvPr>
         </p:nvSpPr>
         <p:spPr>
@@ -4284,11 +4268,11 @@
           </a:prstGeom>
         </p:spPr>
         <p:txBody>
-          <a:bodyPr anchorCtr="0" anchor="ctr" bIns="91425" lIns="91425" spcFirstLastPara="1" rIns="91425" wrap="square" tIns="91425">
+          <a:bodyPr spcFirstLastPara="1" wrap="square" lIns="91425" tIns="91425" rIns="91425" bIns="91425" anchor="ctr" anchorCtr="0">
             <a:normAutofit/>
           </a:bodyPr>
           <a:lstStyle>
-            <a:lvl1pPr indent="-342900" lvl="0" marL="457200">
+            <a:lvl1pPr marL="457200" lvl="0" indent="-342900">
               <a:spcBef>
                 <a:spcPts val="0"/>
               </a:spcBef>
@@ -4299,7 +4283,7 @@
               <a:buChar char="●"/>
               <a:defRPr/>
             </a:lvl1pPr>
-            <a:lvl2pPr indent="-317500" lvl="1" marL="914400">
+            <a:lvl2pPr marL="914400" lvl="1" indent="-317500">
               <a:spcBef>
                 <a:spcPts val="0"/>
               </a:spcBef>
@@ -4310,7 +4294,7 @@
               <a:buChar char="○"/>
               <a:defRPr/>
             </a:lvl2pPr>
-            <a:lvl3pPr indent="-317500" lvl="2" marL="1371600">
+            <a:lvl3pPr marL="1371600" lvl="2" indent="-317500">
               <a:spcBef>
                 <a:spcPts val="0"/>
               </a:spcBef>
@@ -4321,7 +4305,7 @@
               <a:buChar char="■"/>
               <a:defRPr/>
             </a:lvl3pPr>
-            <a:lvl4pPr indent="-317500" lvl="3" marL="1828800">
+            <a:lvl4pPr marL="1828800" lvl="3" indent="-317500">
               <a:spcBef>
                 <a:spcPts val="0"/>
               </a:spcBef>
@@ -4332,7 +4316,7 @@
               <a:buChar char="●"/>
               <a:defRPr/>
             </a:lvl4pPr>
-            <a:lvl5pPr indent="-317500" lvl="4" marL="2286000">
+            <a:lvl5pPr marL="2286000" lvl="4" indent="-317500">
               <a:spcBef>
                 <a:spcPts val="0"/>
               </a:spcBef>
@@ -4343,7 +4327,7 @@
               <a:buChar char="○"/>
               <a:defRPr/>
             </a:lvl5pPr>
-            <a:lvl6pPr indent="-317500" lvl="5" marL="2743200">
+            <a:lvl6pPr marL="2743200" lvl="5" indent="-317500">
               <a:spcBef>
                 <a:spcPts val="0"/>
               </a:spcBef>
@@ -4354,7 +4338,7 @@
               <a:buChar char="■"/>
               <a:defRPr/>
             </a:lvl6pPr>
-            <a:lvl7pPr indent="-317500" lvl="6" marL="3200400">
+            <a:lvl7pPr marL="3200400" lvl="6" indent="-317500">
               <a:spcBef>
                 <a:spcPts val="0"/>
               </a:spcBef>
@@ -4365,7 +4349,7 @@
               <a:buChar char="●"/>
               <a:defRPr/>
             </a:lvl7pPr>
-            <a:lvl8pPr indent="-317500" lvl="7" marL="3657600">
+            <a:lvl8pPr marL="3657600" lvl="7" indent="-317500">
               <a:spcBef>
                 <a:spcPts val="0"/>
               </a:spcBef>
@@ -4376,7 +4360,7 @@
               <a:buChar char="○"/>
               <a:defRPr/>
             </a:lvl8pPr>
-            <a:lvl9pPr indent="-317500" lvl="8" marL="4114800">
+            <a:lvl9pPr marL="4114800" lvl="8" indent="-317500">
               <a:spcBef>
                 <a:spcPts val="0"/>
               </a:spcBef>
@@ -4388,15 +4372,19 @@
               <a:defRPr/>
             </a:lvl9pPr>
           </a:lstStyle>
-          <a:p/>
+          <a:p>
+            <a:endParaRPr/>
+          </a:p>
         </p:txBody>
       </p:sp>
       <p:sp>
         <p:nvSpPr>
           <p:cNvPr id="40" name="Google Shape;40;p9"/>
-          <p:cNvSpPr txBox="1"/>
+          <p:cNvSpPr txBox="1">
+            <a:spLocks noGrp="1"/>
+          </p:cNvSpPr>
           <p:nvPr>
-            <p:ph idx="12" type="sldNum"/>
+            <p:ph type="sldNum" idx="12"/>
           </p:nvPr>
         </p:nvSpPr>
         <p:spPr>
@@ -4409,7 +4397,7 @@
           </a:prstGeom>
         </p:spPr>
         <p:txBody>
-          <a:bodyPr anchorCtr="0" anchor="ctr" bIns="91425" lIns="91425" spcFirstLastPara="1" rIns="91425" wrap="square" tIns="91425">
+          <a:bodyPr spcFirstLastPara="1" wrap="square" lIns="91425" tIns="91425" rIns="91425" bIns="91425" anchor="ctr" anchorCtr="0">
             <a:normAutofit/>
           </a:bodyPr>
           <a:lstStyle>
@@ -4451,7 +4439,7 @@
             </a:lvl9pPr>
           </a:lstStyle>
           <a:p>
-            <a:pPr indent="0" lvl="0" marL="0" rtl="0" algn="r">
+            <a:pPr marL="0" lvl="0" indent="0" algn="r" rtl="0">
               <a:spcBef>
                 <a:spcPts val="0"/>
               </a:spcBef>
@@ -4477,11 +4465,11 @@
 </file>
 
 <file path=ppt/slideLayouts/slideLayout9.xml><?xml version="1.0" encoding="utf-8"?>
-<p:sldLayout xmlns:a="http://schemas.openxmlformats.org/drawingml/2006/main" xmlns:r="http://schemas.openxmlformats.org/officeDocument/2006/relationships" xmlns:mc="http://schemas.openxmlformats.org/markup-compatibility/2006" xmlns:mv="urn:schemas-microsoft-com:mac:vml" xmlns:p="http://schemas.openxmlformats.org/presentationml/2006/main" xmlns:c="http://schemas.openxmlformats.org/drawingml/2006/chart" xmlns:dgm="http://schemas.openxmlformats.org/drawingml/2006/diagram" xmlns:o="urn:schemas-microsoft-com:office:office" xmlns:v="urn:schemas-microsoft-com:vml" xmlns:pvml="urn:schemas-microsoft-com:office:powerpoint" xmlns:com="http://schemas.openxmlformats.org/drawingml/2006/compatibility" xmlns:p14="http://schemas.microsoft.com/office/powerpoint/2010/main" xmlns:p15="http://schemas.microsoft.com/office/powerpoint/2012/main" xmlns:ahyp="http://schemas.microsoft.com/office/drawing/2018/hyperlinkcolor" matchingName="Caption">
+<p:sldLayout xmlns:a="http://schemas.openxmlformats.org/drawingml/2006/main" xmlns:r="http://schemas.openxmlformats.org/officeDocument/2006/relationships" xmlns:p="http://schemas.openxmlformats.org/presentationml/2006/main" matchingName="Caption">
   <p:cSld name="CAPTION_ONLY">
     <p:spTree>
       <p:nvGrpSpPr>
-        <p:cNvPr id="41" name="Shape 41"/>
+        <p:cNvPr id="1" name="Shape 41"/>
         <p:cNvGrpSpPr/>
         <p:nvPr/>
       </p:nvGrpSpPr>
@@ -4496,9 +4484,11 @@
       <p:sp>
         <p:nvSpPr>
           <p:cNvPr id="42" name="Google Shape;42;p10"/>
-          <p:cNvSpPr txBox="1"/>
+          <p:cNvSpPr txBox="1">
+            <a:spLocks noGrp="1"/>
+          </p:cNvSpPr>
           <p:nvPr>
-            <p:ph idx="1" type="body"/>
+            <p:ph type="body" idx="1"/>
           </p:nvPr>
         </p:nvSpPr>
         <p:spPr>
@@ -4511,11 +4501,11 @@
           </a:prstGeom>
         </p:spPr>
         <p:txBody>
-          <a:bodyPr anchorCtr="0" anchor="ctr" bIns="91425" lIns="91425" spcFirstLastPara="1" rIns="91425" wrap="square" tIns="91425">
+          <a:bodyPr spcFirstLastPara="1" wrap="square" lIns="91425" tIns="91425" rIns="91425" bIns="91425" anchor="ctr" anchorCtr="0">
             <a:normAutofit/>
           </a:bodyPr>
           <a:lstStyle>
-            <a:lvl1pPr indent="-228600" lvl="0" marL="457200">
+            <a:lvl1pPr marL="457200" lvl="0" indent="-228600">
               <a:lnSpc>
                 <a:spcPct val="100000"/>
               </a:lnSpc>
@@ -4530,15 +4520,19 @@
               <a:defRPr/>
             </a:lvl1pPr>
           </a:lstStyle>
-          <a:p/>
+          <a:p>
+            <a:endParaRPr/>
+          </a:p>
         </p:txBody>
       </p:sp>
       <p:sp>
         <p:nvSpPr>
           <p:cNvPr id="43" name="Google Shape;43;p10"/>
-          <p:cNvSpPr txBox="1"/>
+          <p:cNvSpPr txBox="1">
+            <a:spLocks noGrp="1"/>
+          </p:cNvSpPr>
           <p:nvPr>
-            <p:ph idx="12" type="sldNum"/>
+            <p:ph type="sldNum" idx="12"/>
           </p:nvPr>
         </p:nvSpPr>
         <p:spPr>
@@ -4551,7 +4545,7 @@
           </a:prstGeom>
         </p:spPr>
         <p:txBody>
-          <a:bodyPr anchorCtr="0" anchor="ctr" bIns="91425" lIns="91425" spcFirstLastPara="1" rIns="91425" wrap="square" tIns="91425">
+          <a:bodyPr spcFirstLastPara="1" wrap="square" lIns="91425" tIns="91425" rIns="91425" bIns="91425" anchor="ctr" anchorCtr="0">
             <a:normAutofit/>
           </a:bodyPr>
           <a:lstStyle>
@@ -4593,7 +4587,7 @@
             </a:lvl9pPr>
           </a:lstStyle>
           <a:p>
-            <a:pPr indent="0" lvl="0" marL="0" rtl="0" algn="r">
+            <a:pPr marL="0" lvl="0" indent="0" algn="r" rtl="0">
               <a:spcBef>
                 <a:spcPts val="0"/>
               </a:spcBef>
@@ -4627,23 +4621,23 @@
           <a:solidFill>
             <a:srgbClr val="19264B"/>
           </a:solidFill>
-          <a:ln cap="flat" cmpd="sng" w="9525">
+          <a:ln w="9525" cap="flat" cmpd="sng">
             <a:solidFill>
               <a:schemeClr val="dk2"/>
             </a:solidFill>
             <a:prstDash val="solid"/>
             <a:round/>
-            <a:headEnd len="sm" w="sm" type="none"/>
-            <a:tailEnd len="sm" w="sm" type="none"/>
+            <a:headEnd type="none" w="sm" len="sm"/>
+            <a:tailEnd type="none" w="sm" len="sm"/>
           </a:ln>
         </p:spPr>
         <p:txBody>
-          <a:bodyPr anchorCtr="0" anchor="ctr" bIns="91425" lIns="91425" spcFirstLastPara="1" rIns="91425" wrap="square" tIns="91425">
+          <a:bodyPr spcFirstLastPara="1" wrap="square" lIns="91425" tIns="91425" rIns="91425" bIns="91425" anchor="ctr" anchorCtr="0">
             <a:noAutofit/>
           </a:bodyPr>
           <a:lstStyle/>
           <a:p>
-            <a:pPr indent="0" lvl="0" marL="0" rtl="0" algn="ctr">
+            <a:pPr marL="0" lvl="0" indent="0" algn="ctr" rtl="0">
               <a:spcBef>
                 <a:spcPts val="0"/>
               </a:spcBef>
@@ -4652,9 +4646,6 @@
               </a:spcAft>
               <a:buNone/>
             </a:pPr>
-            <a:r>
-              <a:t/>
-            </a:r>
             <a:endParaRPr/>
           </a:p>
         </p:txBody>
@@ -4702,23 +4693,23 @@
             <a:avLst/>
           </a:prstGeom>
           <a:noFill/>
-          <a:ln cap="flat" cmpd="sng" w="38100">
+          <a:ln w="38100" cap="flat" cmpd="sng">
             <a:solidFill>
               <a:schemeClr val="lt1"/>
             </a:solidFill>
             <a:prstDash val="solid"/>
             <a:round/>
-            <a:headEnd len="sm" w="sm" type="none"/>
-            <a:tailEnd len="sm" w="sm" type="none"/>
+            <a:headEnd type="none" w="sm" len="sm"/>
+            <a:tailEnd type="none" w="sm" len="sm"/>
           </a:ln>
         </p:spPr>
         <p:txBody>
-          <a:bodyPr anchorCtr="0" anchor="ctr" bIns="91425" lIns="91425" spcFirstLastPara="1" rIns="91425" wrap="square" tIns="91425">
+          <a:bodyPr spcFirstLastPara="1" wrap="square" lIns="91425" tIns="91425" rIns="91425" bIns="91425" anchor="ctr" anchorCtr="0">
             <a:noAutofit/>
           </a:bodyPr>
           <a:lstStyle/>
           <a:p>
-            <a:pPr indent="0" lvl="0" marL="0" rtl="0" algn="l">
+            <a:pPr marL="0" lvl="0" indent="0" algn="l" rtl="0">
               <a:spcBef>
                 <a:spcPts val="0"/>
               </a:spcBef>
@@ -4727,9 +4718,6 @@
               </a:spcAft>
               <a:buNone/>
             </a:pPr>
-            <a:r>
-              <a:t/>
-            </a:r>
             <a:endParaRPr/>
           </a:p>
         </p:txBody>
@@ -4751,23 +4739,23 @@
           <a:solidFill>
             <a:schemeClr val="lt1"/>
           </a:solidFill>
-          <a:ln cap="flat" cmpd="sng" w="38100">
+          <a:ln w="38100" cap="flat" cmpd="sng">
             <a:solidFill>
               <a:schemeClr val="lt1"/>
             </a:solidFill>
             <a:prstDash val="solid"/>
             <a:round/>
-            <a:headEnd len="sm" w="sm" type="none"/>
-            <a:tailEnd len="sm" w="sm" type="none"/>
+            <a:headEnd type="none" w="sm" len="sm"/>
+            <a:tailEnd type="none" w="sm" len="sm"/>
           </a:ln>
         </p:spPr>
         <p:txBody>
-          <a:bodyPr anchorCtr="0" anchor="ctr" bIns="91425" lIns="91425" spcFirstLastPara="1" rIns="91425" wrap="square" tIns="91425">
+          <a:bodyPr spcFirstLastPara="1" wrap="square" lIns="91425" tIns="91425" rIns="91425" bIns="91425" anchor="ctr" anchorCtr="0">
             <a:noAutofit/>
           </a:bodyPr>
           <a:lstStyle/>
           <a:p>
-            <a:pPr indent="0" lvl="0" marL="0" rtl="0" algn="l">
+            <a:pPr marL="0" lvl="0" indent="0" algn="l" rtl="0">
               <a:spcBef>
                 <a:spcPts val="0"/>
               </a:spcBef>
@@ -4776,9 +4764,6 @@
               </a:spcAft>
               <a:buNone/>
             </a:pPr>
-            <a:r>
-              <a:t/>
-            </a:r>
             <a:endParaRPr/>
           </a:p>
         </p:txBody>
@@ -4798,23 +4783,23 @@
             <a:avLst/>
           </a:prstGeom>
           <a:noFill/>
-          <a:ln cap="flat" cmpd="sng" w="38100">
+          <a:ln w="38100" cap="flat" cmpd="sng">
             <a:solidFill>
               <a:schemeClr val="lt1"/>
             </a:solidFill>
             <a:prstDash val="solid"/>
             <a:round/>
-            <a:headEnd len="sm" w="sm" type="none"/>
-            <a:tailEnd len="sm" w="sm" type="none"/>
+            <a:headEnd type="none" w="sm" len="sm"/>
+            <a:tailEnd type="none" w="sm" len="sm"/>
           </a:ln>
         </p:spPr>
         <p:txBody>
-          <a:bodyPr anchorCtr="0" anchor="ctr" bIns="91425" lIns="91425" spcFirstLastPara="1" rIns="91425" wrap="square" tIns="91425">
+          <a:bodyPr spcFirstLastPara="1" wrap="square" lIns="91425" tIns="91425" rIns="91425" bIns="91425" anchor="ctr" anchorCtr="0">
             <a:noAutofit/>
           </a:bodyPr>
           <a:lstStyle/>
           <a:p>
-            <a:pPr indent="0" lvl="0" marL="0" rtl="0" algn="l">
+            <a:pPr marL="0" lvl="0" indent="0" algn="l" rtl="0">
               <a:spcBef>
                 <a:spcPts val="0"/>
               </a:spcBef>
@@ -4823,9 +4808,6 @@
               </a:spcAft>
               <a:buNone/>
             </a:pPr>
-            <a:r>
-              <a:t/>
-            </a:r>
             <a:endParaRPr/>
           </a:p>
         </p:txBody>
@@ -4845,14 +4827,14 @@
             <a:avLst/>
           </a:prstGeom>
           <a:noFill/>
-          <a:ln cap="flat" cmpd="sng" w="28575">
+          <a:ln w="28575" cap="flat" cmpd="sng">
             <a:solidFill>
               <a:schemeClr val="lt1"/>
             </a:solidFill>
             <a:prstDash val="solid"/>
             <a:round/>
-            <a:headEnd len="med" w="med" type="none"/>
-            <a:tailEnd len="med" w="med" type="none"/>
+            <a:headEnd type="none" w="med" len="med"/>
+            <a:tailEnd type="none" w="med" len="med"/>
           </a:ln>
         </p:spPr>
       </p:cxnSp>
@@ -4878,12 +4860,12 @@
           </a:ln>
         </p:spPr>
         <p:txBody>
-          <a:bodyPr anchorCtr="0" anchor="ctr" bIns="91425" lIns="91425" spcFirstLastPara="1" rIns="91425" wrap="square" tIns="91425">
+          <a:bodyPr spcFirstLastPara="1" wrap="square" lIns="91425" tIns="91425" rIns="91425" bIns="91425" anchor="ctr" anchorCtr="0">
             <a:noAutofit/>
           </a:bodyPr>
           <a:lstStyle/>
           <a:p>
-            <a:pPr indent="0" lvl="0" marL="0" rtl="0" algn="l">
+            <a:pPr marL="0" lvl="0" indent="0" algn="l" rtl="0">
               <a:spcBef>
                 <a:spcPts val="0"/>
               </a:spcBef>
@@ -4892,9 +4874,6 @@
               </a:spcAft>
               <a:buNone/>
             </a:pPr>
-            <a:r>
-              <a:t/>
-            </a:r>
             <a:endParaRPr/>
           </a:p>
         </p:txBody>
@@ -4919,12 +4898,12 @@
           </a:ln>
         </p:spPr>
         <p:txBody>
-          <a:bodyPr anchorCtr="0" anchor="t" bIns="91425" lIns="91425" spcFirstLastPara="1" rIns="91425" wrap="square" tIns="91425">
+          <a:bodyPr spcFirstLastPara="1" wrap="square" lIns="91425" tIns="91425" rIns="91425" bIns="91425" anchor="t" anchorCtr="0">
             <a:spAutoFit/>
           </a:bodyPr>
           <a:lstStyle/>
           <a:p>
-            <a:pPr indent="0" lvl="0" marL="0" rtl="0" algn="l">
+            <a:pPr marL="0" lvl="0" indent="0" algn="l" rtl="0">
               <a:spcBef>
                 <a:spcPts val="0"/>
               </a:spcBef>
@@ -4933,9 +4912,6 @@
               </a:spcAft>
               <a:buNone/>
             </a:pPr>
-            <a:r>
-              <a:t/>
-            </a:r>
             <a:endParaRPr/>
           </a:p>
         </p:txBody>
@@ -4960,12 +4936,12 @@
           </a:ln>
         </p:spPr>
         <p:txBody>
-          <a:bodyPr anchorCtr="0" anchor="t" bIns="91425" lIns="91425" spcFirstLastPara="1" rIns="91425" wrap="square" tIns="91425">
+          <a:bodyPr spcFirstLastPara="1" wrap="square" lIns="91425" tIns="91425" rIns="91425" bIns="91425" anchor="t" anchorCtr="0">
             <a:spAutoFit/>
           </a:bodyPr>
           <a:lstStyle/>
           <a:p>
-            <a:pPr indent="0" lvl="0" marL="0" rtl="0" algn="l">
+            <a:pPr marL="0" lvl="0" indent="0" algn="l" rtl="0">
               <a:lnSpc>
                 <a:spcPct val="150000"/>
               </a:lnSpc>
@@ -4992,19 +4968,7 @@
                 <a:cs typeface="Nanum Gothic"/>
                 <a:sym typeface="Nanum Gothic"/>
               </a:rPr>
-              <a:t>8</a:t>
-            </a:r>
-            <a:r>
-              <a:rPr lang="ko" sz="800">
-                <a:solidFill>
-                  <a:srgbClr val="9E9E9E"/>
-                </a:solidFill>
-                <a:latin typeface="Nanum Gothic"/>
-                <a:ea typeface="Nanum Gothic"/>
-                <a:cs typeface="Nanum Gothic"/>
-                <a:sym typeface="Nanum Gothic"/>
-              </a:rPr>
-              <a:t>기 활동 소개</a:t>
+              <a:t>8기 활동 소개</a:t>
             </a:r>
             <a:endParaRPr sz="800">
               <a:solidFill>
@@ -5017,7 +4981,7 @@
             </a:endParaRPr>
           </a:p>
           <a:p>
-            <a:pPr indent="0" lvl="0" marL="0" rtl="0" algn="l">
+            <a:pPr marL="0" lvl="0" indent="0" algn="l" rtl="0">
               <a:lnSpc>
                 <a:spcPct val="150000"/>
               </a:lnSpc>
@@ -5035,7 +4999,7 @@
               <a:buNone/>
             </a:pPr>
             <a:r>
-              <a:rPr b="1" lang="ko" sz="800">
+              <a:rPr lang="ko" sz="800" b="1">
                 <a:solidFill>
                   <a:srgbClr val="777777"/>
                 </a:solidFill>
@@ -5044,19 +5008,7 @@
                 <a:cs typeface="Nanum Gothic"/>
                 <a:sym typeface="Nanum Gothic"/>
               </a:rPr>
-              <a:t>9</a:t>
-            </a:r>
-            <a:r>
-              <a:rPr b="1" lang="ko" sz="800">
-                <a:solidFill>
-                  <a:srgbClr val="777777"/>
-                </a:solidFill>
-                <a:latin typeface="Nanum Gothic"/>
-                <a:ea typeface="Nanum Gothic"/>
-                <a:cs typeface="Nanum Gothic"/>
-                <a:sym typeface="Nanum Gothic"/>
-              </a:rPr>
-              <a:t>기 활동 안내</a:t>
+              <a:t>9기 활동 안내</a:t>
             </a:r>
             <a:endParaRPr sz="800">
               <a:solidFill>
@@ -5069,7 +5021,7 @@
             </a:endParaRPr>
           </a:p>
           <a:p>
-            <a:pPr indent="0" lvl="0" marL="0" rtl="0" algn="l">
+            <a:pPr marL="0" lvl="0" indent="0" algn="l" rtl="0">
               <a:lnSpc>
                 <a:spcPct val="150000"/>
               </a:lnSpc>
@@ -5109,7 +5061,7 @@
             </a:endParaRPr>
           </a:p>
           <a:p>
-            <a:pPr indent="0" lvl="0" marL="0" rtl="0" algn="l">
+            <a:pPr marL="0" lvl="0" indent="0" algn="l" rtl="0">
               <a:lnSpc>
                 <a:spcPct val="150000"/>
               </a:lnSpc>
@@ -5144,7 +5096,7 @@
             </a:endParaRPr>
           </a:p>
           <a:p>
-            <a:pPr indent="0" lvl="0" marL="0" rtl="0" algn="l">
+            <a:pPr marL="0" lvl="0" indent="0" algn="l" rtl="0">
               <a:lnSpc>
                 <a:spcPct val="150000"/>
               </a:lnSpc>
@@ -5179,7 +5131,7 @@
             </a:endParaRPr>
           </a:p>
           <a:p>
-            <a:pPr indent="0" lvl="0" marL="0" rtl="0" algn="l">
+            <a:pPr marL="0" lvl="0" indent="0" algn="l" rtl="0">
               <a:lnSpc>
                 <a:spcPct val="150000"/>
               </a:lnSpc>
@@ -5214,7 +5166,7 @@
             </a:endParaRPr>
           </a:p>
           <a:p>
-            <a:pPr indent="0" lvl="0" marL="0" rtl="0" algn="l">
+            <a:pPr marL="0" lvl="0" indent="0" algn="l" rtl="0">
               <a:lnSpc>
                 <a:spcPct val="150000"/>
               </a:lnSpc>
@@ -5227,7 +5179,7 @@
               <a:buNone/>
             </a:pPr>
             <a:r>
-              <a:rPr b="1" lang="ko" sz="800">
+              <a:rPr lang="ko" sz="800" b="1">
                 <a:solidFill>
                   <a:srgbClr val="9E9E9E"/>
                 </a:solidFill>
@@ -5238,7 +5190,7 @@
               </a:rPr>
               <a:t>스터디 소개</a:t>
             </a:r>
-            <a:endParaRPr b="1" sz="800">
+            <a:endParaRPr sz="800" b="1">
               <a:solidFill>
                 <a:srgbClr val="9E9E9E"/>
               </a:solidFill>
@@ -5249,7 +5201,7 @@
             </a:endParaRPr>
           </a:p>
           <a:p>
-            <a:pPr indent="0" lvl="0" marL="0" rtl="0" algn="l">
+            <a:pPr marL="0" lvl="0" indent="0" algn="l" rtl="0">
               <a:lnSpc>
                 <a:spcPct val="150000"/>
               </a:lnSpc>
@@ -5262,7 +5214,7 @@
               <a:buNone/>
             </a:pPr>
             <a:r>
-              <a:rPr b="1" lang="ko" sz="800">
+              <a:rPr lang="ko" sz="800" b="1">
                 <a:solidFill>
                   <a:srgbClr val="9E9E9E"/>
                 </a:solidFill>
@@ -5271,19 +5223,7 @@
                 <a:cs typeface="Nanum Gothic"/>
                 <a:sym typeface="Nanum Gothic"/>
               </a:rPr>
-              <a:t>AI </a:t>
-            </a:r>
-            <a:r>
-              <a:rPr b="1" lang="ko" sz="800">
-                <a:solidFill>
-                  <a:srgbClr val="9E9E9E"/>
-                </a:solidFill>
-                <a:latin typeface="Nanum Gothic"/>
-                <a:ea typeface="Nanum Gothic"/>
-                <a:cs typeface="Nanum Gothic"/>
-                <a:sym typeface="Nanum Gothic"/>
-              </a:rPr>
-              <a:t>세미나 소개</a:t>
+              <a:t>AI 세미나 소개</a:t>
             </a:r>
             <a:endParaRPr sz="800">
               <a:solidFill>
@@ -5296,7 +5236,7 @@
             </a:endParaRPr>
           </a:p>
           <a:p>
-            <a:pPr indent="0" lvl="0" marL="0" rtl="0" algn="l">
+            <a:pPr marL="0" lvl="0" indent="0" algn="l" rtl="0">
               <a:lnSpc>
                 <a:spcPct val="150000"/>
               </a:lnSpc>
@@ -5318,19 +5258,7 @@
                 <a:cs typeface="Nanum Gothic"/>
                 <a:sym typeface="Nanum Gothic"/>
               </a:rPr>
-              <a:t>CUAI 장학</a:t>
-            </a:r>
-            <a:r>
-              <a:rPr lang="ko" sz="800">
-                <a:solidFill>
-                  <a:srgbClr val="999999"/>
-                </a:solidFill>
-                <a:latin typeface="Nanum Gothic"/>
-                <a:ea typeface="Nanum Gothic"/>
-                <a:cs typeface="Nanum Gothic"/>
-                <a:sym typeface="Nanum Gothic"/>
-              </a:rPr>
-              <a:t>금</a:t>
+              <a:t>CUAI 장학금</a:t>
             </a:r>
             <a:endParaRPr sz="800">
               <a:solidFill>
@@ -5353,18 +5281,19 @@
 </file>
 
 <file path=ppt/slideMasters/slideMaster1.xml><?xml version="1.0" encoding="utf-8"?>
-<p:sldMaster xmlns:a="http://schemas.openxmlformats.org/drawingml/2006/main" xmlns:r="http://schemas.openxmlformats.org/officeDocument/2006/relationships" xmlns:mc="http://schemas.openxmlformats.org/markup-compatibility/2006" xmlns:mv="urn:schemas-microsoft-com:mac:vml" xmlns:p="http://schemas.openxmlformats.org/presentationml/2006/main" xmlns:c="http://schemas.openxmlformats.org/drawingml/2006/chart" xmlns:dgm="http://schemas.openxmlformats.org/drawingml/2006/diagram" xmlns:o="urn:schemas-microsoft-com:office:office" xmlns:v="urn:schemas-microsoft-com:vml" xmlns:pvml="urn:schemas-microsoft-com:office:powerpoint" xmlns:com="http://schemas.openxmlformats.org/drawingml/2006/compatibility" xmlns:p14="http://schemas.microsoft.com/office/powerpoint/2010/main" xmlns:p15="http://schemas.microsoft.com/office/powerpoint/2012/main" xmlns:ahyp="http://schemas.microsoft.com/office/drawing/2018/hyperlinkcolor">
+<p:sldMaster xmlns:a="http://schemas.openxmlformats.org/drawingml/2006/main" xmlns:r="http://schemas.openxmlformats.org/officeDocument/2006/relationships" xmlns:p="http://schemas.openxmlformats.org/presentationml/2006/main">
   <p:cSld name="simple-light-2">
     <p:bg>
       <p:bgPr>
         <a:solidFill>
           <a:schemeClr val="lt1"/>
         </a:solidFill>
+        <a:effectLst/>
       </p:bgPr>
     </p:bg>
     <p:spTree>
       <p:nvGrpSpPr>
-        <p:cNvPr id="5" name="Shape 5"/>
+        <p:cNvPr id="1" name="Shape 5"/>
         <p:cNvGrpSpPr/>
         <p:nvPr/>
       </p:nvGrpSpPr>
@@ -5379,7 +5308,9 @@
       <p:sp>
         <p:nvSpPr>
           <p:cNvPr id="6" name="Google Shape;6;p1"/>
-          <p:cNvSpPr txBox="1"/>
+          <p:cNvSpPr txBox="1">
+            <a:spLocks noGrp="1"/>
+          </p:cNvSpPr>
           <p:nvPr>
             <p:ph type="title"/>
           </p:nvPr>
@@ -5398,7 +5329,7 @@
           </a:ln>
         </p:spPr>
         <p:txBody>
-          <a:bodyPr anchorCtr="0" anchor="t" bIns="91425" lIns="91425" spcFirstLastPara="1" rIns="91425" wrap="square" tIns="91425">
+          <a:bodyPr spcFirstLastPara="1" wrap="square" lIns="91425" tIns="91425" rIns="91425" bIns="91425" anchor="t" anchorCtr="0">
             <a:normAutofit/>
           </a:bodyPr>
           <a:lstStyle>
@@ -5565,15 +5496,19 @@
               </a:defRPr>
             </a:lvl9pPr>
           </a:lstStyle>
-          <a:p/>
+          <a:p>
+            <a:endParaRPr/>
+          </a:p>
         </p:txBody>
       </p:sp>
       <p:sp>
         <p:nvSpPr>
           <p:cNvPr id="7" name="Google Shape;7;p1"/>
-          <p:cNvSpPr txBox="1"/>
+          <p:cNvSpPr txBox="1">
+            <a:spLocks noGrp="1"/>
+          </p:cNvSpPr>
           <p:nvPr>
-            <p:ph idx="1" type="body"/>
+            <p:ph type="body" idx="1"/>
           </p:nvPr>
         </p:nvSpPr>
         <p:spPr>
@@ -5590,11 +5525,11 @@
           </a:ln>
         </p:spPr>
         <p:txBody>
-          <a:bodyPr anchorCtr="0" anchor="t" bIns="91425" lIns="91425" spcFirstLastPara="1" rIns="91425" wrap="square" tIns="91425">
+          <a:bodyPr spcFirstLastPara="1" wrap="square" lIns="91425" tIns="91425" rIns="91425" bIns="91425" anchor="t" anchorCtr="0">
             <a:normAutofit/>
           </a:bodyPr>
           <a:lstStyle>
-            <a:lvl1pPr indent="-342900" lvl="0" marL="457200">
+            <a:lvl1pPr marL="457200" lvl="0" indent="-342900">
               <a:lnSpc>
                 <a:spcPct val="115000"/>
               </a:lnSpc>
@@ -5615,7 +5550,7 @@
                 </a:solidFill>
               </a:defRPr>
             </a:lvl1pPr>
-            <a:lvl2pPr indent="-317500" lvl="1" marL="914400">
+            <a:lvl2pPr marL="914400" lvl="1" indent="-317500">
               <a:lnSpc>
                 <a:spcPct val="115000"/>
               </a:lnSpc>
@@ -5636,7 +5571,7 @@
                 </a:solidFill>
               </a:defRPr>
             </a:lvl2pPr>
-            <a:lvl3pPr indent="-317500" lvl="2" marL="1371600">
+            <a:lvl3pPr marL="1371600" lvl="2" indent="-317500">
               <a:lnSpc>
                 <a:spcPct val="115000"/>
               </a:lnSpc>
@@ -5657,7 +5592,7 @@
                 </a:solidFill>
               </a:defRPr>
             </a:lvl3pPr>
-            <a:lvl4pPr indent="-317500" lvl="3" marL="1828800">
+            <a:lvl4pPr marL="1828800" lvl="3" indent="-317500">
               <a:lnSpc>
                 <a:spcPct val="115000"/>
               </a:lnSpc>
@@ -5678,7 +5613,7 @@
                 </a:solidFill>
               </a:defRPr>
             </a:lvl4pPr>
-            <a:lvl5pPr indent="-317500" lvl="4" marL="2286000">
+            <a:lvl5pPr marL="2286000" lvl="4" indent="-317500">
               <a:lnSpc>
                 <a:spcPct val="115000"/>
               </a:lnSpc>
@@ -5699,7 +5634,7 @@
                 </a:solidFill>
               </a:defRPr>
             </a:lvl5pPr>
-            <a:lvl6pPr indent="-317500" lvl="5" marL="2743200">
+            <a:lvl6pPr marL="2743200" lvl="5" indent="-317500">
               <a:lnSpc>
                 <a:spcPct val="115000"/>
               </a:lnSpc>
@@ -5720,7 +5655,7 @@
                 </a:solidFill>
               </a:defRPr>
             </a:lvl6pPr>
-            <a:lvl7pPr indent="-317500" lvl="6" marL="3200400">
+            <a:lvl7pPr marL="3200400" lvl="6" indent="-317500">
               <a:lnSpc>
                 <a:spcPct val="115000"/>
               </a:lnSpc>
@@ -5741,7 +5676,7 @@
                 </a:solidFill>
               </a:defRPr>
             </a:lvl7pPr>
-            <a:lvl8pPr indent="-317500" lvl="7" marL="3657600">
+            <a:lvl8pPr marL="3657600" lvl="7" indent="-317500">
               <a:lnSpc>
                 <a:spcPct val="115000"/>
               </a:lnSpc>
@@ -5762,7 +5697,7 @@
                 </a:solidFill>
               </a:defRPr>
             </a:lvl8pPr>
-            <a:lvl9pPr indent="-317500" lvl="8" marL="4114800">
+            <a:lvl9pPr marL="4114800" lvl="8" indent="-317500">
               <a:lnSpc>
                 <a:spcPct val="115000"/>
               </a:lnSpc>
@@ -5784,15 +5719,19 @@
               </a:defRPr>
             </a:lvl9pPr>
           </a:lstStyle>
-          <a:p/>
+          <a:p>
+            <a:endParaRPr/>
+          </a:p>
         </p:txBody>
       </p:sp>
       <p:sp>
         <p:nvSpPr>
           <p:cNvPr id="8" name="Google Shape;8;p1"/>
-          <p:cNvSpPr txBox="1"/>
+          <p:cNvSpPr txBox="1">
+            <a:spLocks noGrp="1"/>
+          </p:cNvSpPr>
           <p:nvPr>
-            <p:ph idx="12" type="sldNum"/>
+            <p:ph type="sldNum" idx="12"/>
           </p:nvPr>
         </p:nvSpPr>
         <p:spPr>
@@ -5809,7 +5748,7 @@
           </a:ln>
         </p:spPr>
         <p:txBody>
-          <a:bodyPr anchorCtr="0" anchor="ctr" bIns="91425" lIns="91425" spcFirstLastPara="1" rIns="91425" wrap="square" tIns="91425">
+          <a:bodyPr spcFirstLastPara="1" wrap="square" lIns="91425" tIns="91425" rIns="91425" bIns="91425" anchor="ctr" anchorCtr="0">
             <a:normAutofit/>
           </a:bodyPr>
           <a:lstStyle>
@@ -5887,7 +5826,7 @@
             </a:lvl9pPr>
           </a:lstStyle>
           <a:p>
-            <a:pPr indent="0" lvl="0" marL="0" rtl="0" algn="r">
+            <a:pPr marL="0" lvl="0" indent="0" algn="r" rtl="0">
               <a:spcBef>
                 <a:spcPts val="0"/>
               </a:spcBef>
@@ -5906,7 +5845,7 @@
       </p:sp>
     </p:spTree>
   </p:cSld>
-  <p:clrMap accent1="accent1" accent2="accent2" accent3="accent3" accent4="accent4" accent5="accent5" accent6="accent6" bg1="lt1" bg2="dk2" tx1="dk1" tx2="lt2" folHlink="folHlink" hlink="hlink"/>
+  <p:clrMap bg1="lt1" tx1="dk1" bg2="dk2" tx2="lt2" accent1="accent1" accent2="accent2" accent3="accent3" accent4="accent4" accent5="accent5" accent6="accent6" hlink="hlink" folHlink="folHlink"/>
   <p:sldLayoutIdLst>
     <p:sldLayoutId id="2147483648" r:id="rId1"/>
     <p:sldLayoutId id="2147483649" r:id="rId2"/>
@@ -5920,10 +5859,10 @@
     <p:sldLayoutId id="2147483657" r:id="rId10"/>
     <p:sldLayoutId id="2147483658" r:id="rId11"/>
   </p:sldLayoutIdLst>
-  <p:hf dt="0" ftr="0" hdr="0" sldNum="0"/>
+  <p:hf sldNum="0" hdr="0" ftr="0" dt="0"/>
   <p:txStyles>
     <p:titleStyle>
-      <a:defPPr lvl="0" marR="0" rtl="0" algn="l">
+      <a:defPPr marR="0" lvl="0" algn="l" rtl="0">
         <a:lnSpc>
           <a:spcPct val="100000"/>
         </a:lnSpc>
@@ -5934,7 +5873,7 @@
           <a:spcPts val="0"/>
         </a:spcAft>
       </a:defPPr>
-      <a:lvl1pPr lvl="0" marR="0" rtl="0" algn="l">
+      <a:lvl1pPr marR="0" lvl="0" algn="l" rtl="0">
         <a:lnSpc>
           <a:spcPct val="100000"/>
         </a:lnSpc>
@@ -5948,7 +5887,7 @@
           <a:srgbClr val="000000"/>
         </a:buClr>
         <a:buFont typeface="Arial"/>
-        <a:defRPr b="0" i="0" sz="1400" u="none" cap="none" strike="noStrike">
+        <a:defRPr sz="1400" b="0" i="0" u="none" strike="noStrike" cap="none">
           <a:solidFill>
             <a:srgbClr val="000000"/>
           </a:solidFill>
@@ -5958,7 +5897,7 @@
           <a:sym typeface="Arial"/>
         </a:defRPr>
       </a:lvl1pPr>
-      <a:lvl2pPr lvl="1" marR="0" rtl="0" algn="l">
+      <a:lvl2pPr marR="0" lvl="1" algn="l" rtl="0">
         <a:lnSpc>
           <a:spcPct val="100000"/>
         </a:lnSpc>
@@ -5972,7 +5911,7 @@
           <a:srgbClr val="000000"/>
         </a:buClr>
         <a:buFont typeface="Arial"/>
-        <a:defRPr b="0" i="0" sz="1400" u="none" cap="none" strike="noStrike">
+        <a:defRPr sz="1400" b="0" i="0" u="none" strike="noStrike" cap="none">
           <a:solidFill>
             <a:srgbClr val="000000"/>
           </a:solidFill>
@@ -5982,7 +5921,7 @@
           <a:sym typeface="Arial"/>
         </a:defRPr>
       </a:lvl2pPr>
-      <a:lvl3pPr lvl="2" marR="0" rtl="0" algn="l">
+      <a:lvl3pPr marR="0" lvl="2" algn="l" rtl="0">
         <a:lnSpc>
           <a:spcPct val="100000"/>
         </a:lnSpc>
@@ -5996,7 +5935,7 @@
           <a:srgbClr val="000000"/>
         </a:buClr>
         <a:buFont typeface="Arial"/>
-        <a:defRPr b="0" i="0" sz="1400" u="none" cap="none" strike="noStrike">
+        <a:defRPr sz="1400" b="0" i="0" u="none" strike="noStrike" cap="none">
           <a:solidFill>
             <a:srgbClr val="000000"/>
           </a:solidFill>
@@ -6006,7 +5945,7 @@
           <a:sym typeface="Arial"/>
         </a:defRPr>
       </a:lvl3pPr>
-      <a:lvl4pPr lvl="3" marR="0" rtl="0" algn="l">
+      <a:lvl4pPr marR="0" lvl="3" algn="l" rtl="0">
         <a:lnSpc>
           <a:spcPct val="100000"/>
         </a:lnSpc>
@@ -6020,7 +5959,7 @@
           <a:srgbClr val="000000"/>
         </a:buClr>
         <a:buFont typeface="Arial"/>
-        <a:defRPr b="0" i="0" sz="1400" u="none" cap="none" strike="noStrike">
+        <a:defRPr sz="1400" b="0" i="0" u="none" strike="noStrike" cap="none">
           <a:solidFill>
             <a:srgbClr val="000000"/>
           </a:solidFill>
@@ -6030,7 +5969,7 @@
           <a:sym typeface="Arial"/>
         </a:defRPr>
       </a:lvl4pPr>
-      <a:lvl5pPr lvl="4" marR="0" rtl="0" algn="l">
+      <a:lvl5pPr marR="0" lvl="4" algn="l" rtl="0">
         <a:lnSpc>
           <a:spcPct val="100000"/>
         </a:lnSpc>
@@ -6044,7 +5983,7 @@
           <a:srgbClr val="000000"/>
         </a:buClr>
         <a:buFont typeface="Arial"/>
-        <a:defRPr b="0" i="0" sz="1400" u="none" cap="none" strike="noStrike">
+        <a:defRPr sz="1400" b="0" i="0" u="none" strike="noStrike" cap="none">
           <a:solidFill>
             <a:srgbClr val="000000"/>
           </a:solidFill>
@@ -6054,7 +5993,7 @@
           <a:sym typeface="Arial"/>
         </a:defRPr>
       </a:lvl5pPr>
-      <a:lvl6pPr lvl="5" marR="0" rtl="0" algn="l">
+      <a:lvl6pPr marR="0" lvl="5" algn="l" rtl="0">
         <a:lnSpc>
           <a:spcPct val="100000"/>
         </a:lnSpc>
@@ -6068,7 +6007,7 @@
           <a:srgbClr val="000000"/>
         </a:buClr>
         <a:buFont typeface="Arial"/>
-        <a:defRPr b="0" i="0" sz="1400" u="none" cap="none" strike="noStrike">
+        <a:defRPr sz="1400" b="0" i="0" u="none" strike="noStrike" cap="none">
           <a:solidFill>
             <a:srgbClr val="000000"/>
           </a:solidFill>
@@ -6078,7 +6017,7 @@
           <a:sym typeface="Arial"/>
         </a:defRPr>
       </a:lvl6pPr>
-      <a:lvl7pPr lvl="6" marR="0" rtl="0" algn="l">
+      <a:lvl7pPr marR="0" lvl="6" algn="l" rtl="0">
         <a:lnSpc>
           <a:spcPct val="100000"/>
         </a:lnSpc>
@@ -6092,7 +6031,7 @@
           <a:srgbClr val="000000"/>
         </a:buClr>
         <a:buFont typeface="Arial"/>
-        <a:defRPr b="0" i="0" sz="1400" u="none" cap="none" strike="noStrike">
+        <a:defRPr sz="1400" b="0" i="0" u="none" strike="noStrike" cap="none">
           <a:solidFill>
             <a:srgbClr val="000000"/>
           </a:solidFill>
@@ -6102,7 +6041,7 @@
           <a:sym typeface="Arial"/>
         </a:defRPr>
       </a:lvl7pPr>
-      <a:lvl8pPr lvl="7" marR="0" rtl="0" algn="l">
+      <a:lvl8pPr marR="0" lvl="7" algn="l" rtl="0">
         <a:lnSpc>
           <a:spcPct val="100000"/>
         </a:lnSpc>
@@ -6116,7 +6055,7 @@
           <a:srgbClr val="000000"/>
         </a:buClr>
         <a:buFont typeface="Arial"/>
-        <a:defRPr b="0" i="0" sz="1400" u="none" cap="none" strike="noStrike">
+        <a:defRPr sz="1400" b="0" i="0" u="none" strike="noStrike" cap="none">
           <a:solidFill>
             <a:srgbClr val="000000"/>
           </a:solidFill>
@@ -6126,7 +6065,7 @@
           <a:sym typeface="Arial"/>
         </a:defRPr>
       </a:lvl8pPr>
-      <a:lvl9pPr lvl="8" marR="0" rtl="0" algn="l">
+      <a:lvl9pPr marR="0" lvl="8" algn="l" rtl="0">
         <a:lnSpc>
           <a:spcPct val="100000"/>
         </a:lnSpc>
@@ -6140,7 +6079,7 @@
           <a:srgbClr val="000000"/>
         </a:buClr>
         <a:buFont typeface="Arial"/>
-        <a:defRPr b="0" i="0" sz="1400" u="none" cap="none" strike="noStrike">
+        <a:defRPr sz="1400" b="0" i="0" u="none" strike="noStrike" cap="none">
           <a:solidFill>
             <a:srgbClr val="000000"/>
           </a:solidFill>
@@ -6152,7 +6091,7 @@
       </a:lvl9pPr>
     </p:titleStyle>
     <p:bodyStyle>
-      <a:defPPr lvl="0" marR="0" rtl="0" algn="l">
+      <a:defPPr marR="0" lvl="0" algn="l" rtl="0">
         <a:lnSpc>
           <a:spcPct val="100000"/>
         </a:lnSpc>
@@ -6163,7 +6102,7 @@
           <a:spcPts val="0"/>
         </a:spcAft>
       </a:defPPr>
-      <a:lvl1pPr lvl="0" marR="0" rtl="0" algn="l">
+      <a:lvl1pPr marR="0" lvl="0" algn="l" rtl="0">
         <a:lnSpc>
           <a:spcPct val="100000"/>
         </a:lnSpc>
@@ -6177,7 +6116,7 @@
           <a:srgbClr val="000000"/>
         </a:buClr>
         <a:buFont typeface="Arial"/>
-        <a:defRPr b="0" i="0" sz="1400" u="none" cap="none" strike="noStrike">
+        <a:defRPr sz="1400" b="0" i="0" u="none" strike="noStrike" cap="none">
           <a:solidFill>
             <a:srgbClr val="000000"/>
           </a:solidFill>
@@ -6187,7 +6126,7 @@
           <a:sym typeface="Arial"/>
         </a:defRPr>
       </a:lvl1pPr>
-      <a:lvl2pPr lvl="1" marR="0" rtl="0" algn="l">
+      <a:lvl2pPr marR="0" lvl="1" algn="l" rtl="0">
         <a:lnSpc>
           <a:spcPct val="100000"/>
         </a:lnSpc>
@@ -6201,7 +6140,7 @@
           <a:srgbClr val="000000"/>
         </a:buClr>
         <a:buFont typeface="Arial"/>
-        <a:defRPr b="0" i="0" sz="1400" u="none" cap="none" strike="noStrike">
+        <a:defRPr sz="1400" b="0" i="0" u="none" strike="noStrike" cap="none">
           <a:solidFill>
             <a:srgbClr val="000000"/>
           </a:solidFill>
@@ -6211,7 +6150,7 @@
           <a:sym typeface="Arial"/>
         </a:defRPr>
       </a:lvl2pPr>
-      <a:lvl3pPr lvl="2" marR="0" rtl="0" algn="l">
+      <a:lvl3pPr marR="0" lvl="2" algn="l" rtl="0">
         <a:lnSpc>
           <a:spcPct val="100000"/>
         </a:lnSpc>
@@ -6225,7 +6164,7 @@
           <a:srgbClr val="000000"/>
         </a:buClr>
         <a:buFont typeface="Arial"/>
-        <a:defRPr b="0" i="0" sz="1400" u="none" cap="none" strike="noStrike">
+        <a:defRPr sz="1400" b="0" i="0" u="none" strike="noStrike" cap="none">
           <a:solidFill>
             <a:srgbClr val="000000"/>
           </a:solidFill>
@@ -6235,7 +6174,7 @@
           <a:sym typeface="Arial"/>
         </a:defRPr>
       </a:lvl3pPr>
-      <a:lvl4pPr lvl="3" marR="0" rtl="0" algn="l">
+      <a:lvl4pPr marR="0" lvl="3" algn="l" rtl="0">
         <a:lnSpc>
           <a:spcPct val="100000"/>
         </a:lnSpc>
@@ -6249,7 +6188,7 @@
           <a:srgbClr val="000000"/>
         </a:buClr>
         <a:buFont typeface="Arial"/>
-        <a:defRPr b="0" i="0" sz="1400" u="none" cap="none" strike="noStrike">
+        <a:defRPr sz="1400" b="0" i="0" u="none" strike="noStrike" cap="none">
           <a:solidFill>
             <a:srgbClr val="000000"/>
           </a:solidFill>
@@ -6259,7 +6198,7 @@
           <a:sym typeface="Arial"/>
         </a:defRPr>
       </a:lvl4pPr>
-      <a:lvl5pPr lvl="4" marR="0" rtl="0" algn="l">
+      <a:lvl5pPr marR="0" lvl="4" algn="l" rtl="0">
         <a:lnSpc>
           <a:spcPct val="100000"/>
         </a:lnSpc>
@@ -6273,7 +6212,7 @@
           <a:srgbClr val="000000"/>
         </a:buClr>
         <a:buFont typeface="Arial"/>
-        <a:defRPr b="0" i="0" sz="1400" u="none" cap="none" strike="noStrike">
+        <a:defRPr sz="1400" b="0" i="0" u="none" strike="noStrike" cap="none">
           <a:solidFill>
             <a:srgbClr val="000000"/>
           </a:solidFill>
@@ -6283,7 +6222,7 @@
           <a:sym typeface="Arial"/>
         </a:defRPr>
       </a:lvl5pPr>
-      <a:lvl6pPr lvl="5" marR="0" rtl="0" algn="l">
+      <a:lvl6pPr marR="0" lvl="5" algn="l" rtl="0">
         <a:lnSpc>
           <a:spcPct val="100000"/>
         </a:lnSpc>
@@ -6297,7 +6236,7 @@
           <a:srgbClr val="000000"/>
         </a:buClr>
         <a:buFont typeface="Arial"/>
-        <a:defRPr b="0" i="0" sz="1400" u="none" cap="none" strike="noStrike">
+        <a:defRPr sz="1400" b="0" i="0" u="none" strike="noStrike" cap="none">
           <a:solidFill>
             <a:srgbClr val="000000"/>
           </a:solidFill>
@@ -6307,7 +6246,7 @@
           <a:sym typeface="Arial"/>
         </a:defRPr>
       </a:lvl6pPr>
-      <a:lvl7pPr lvl="6" marR="0" rtl="0" algn="l">
+      <a:lvl7pPr marR="0" lvl="6" algn="l" rtl="0">
         <a:lnSpc>
           <a:spcPct val="100000"/>
         </a:lnSpc>
@@ -6321,7 +6260,7 @@
           <a:srgbClr val="000000"/>
         </a:buClr>
         <a:buFont typeface="Arial"/>
-        <a:defRPr b="0" i="0" sz="1400" u="none" cap="none" strike="noStrike">
+        <a:defRPr sz="1400" b="0" i="0" u="none" strike="noStrike" cap="none">
           <a:solidFill>
             <a:srgbClr val="000000"/>
           </a:solidFill>
@@ -6331,7 +6270,7 @@
           <a:sym typeface="Arial"/>
         </a:defRPr>
       </a:lvl7pPr>
-      <a:lvl8pPr lvl="7" marR="0" rtl="0" algn="l">
+      <a:lvl8pPr marR="0" lvl="7" algn="l" rtl="0">
         <a:lnSpc>
           <a:spcPct val="100000"/>
         </a:lnSpc>
@@ -6345,7 +6284,7 @@
           <a:srgbClr val="000000"/>
         </a:buClr>
         <a:buFont typeface="Arial"/>
-        <a:defRPr b="0" i="0" sz="1400" u="none" cap="none" strike="noStrike">
+        <a:defRPr sz="1400" b="0" i="0" u="none" strike="noStrike" cap="none">
           <a:solidFill>
             <a:srgbClr val="000000"/>
           </a:solidFill>
@@ -6355,7 +6294,7 @@
           <a:sym typeface="Arial"/>
         </a:defRPr>
       </a:lvl8pPr>
-      <a:lvl9pPr lvl="8" marR="0" rtl="0" algn="l">
+      <a:lvl9pPr marR="0" lvl="8" algn="l" rtl="0">
         <a:lnSpc>
           <a:spcPct val="100000"/>
         </a:lnSpc>
@@ -6369,7 +6308,7 @@
           <a:srgbClr val="000000"/>
         </a:buClr>
         <a:buFont typeface="Arial"/>
-        <a:defRPr b="0" i="0" sz="1400" u="none" cap="none" strike="noStrike">
+        <a:defRPr sz="1400" b="0" i="0" u="none" strike="noStrike" cap="none">
           <a:solidFill>
             <a:srgbClr val="000000"/>
           </a:solidFill>
@@ -6381,7 +6320,7 @@
       </a:lvl9pPr>
     </p:bodyStyle>
     <p:otherStyle>
-      <a:defPPr lvl="0" marR="0" rtl="0" algn="l">
+      <a:defPPr marR="0" lvl="0" algn="l" rtl="0">
         <a:lnSpc>
           <a:spcPct val="100000"/>
         </a:lnSpc>
@@ -6392,7 +6331,7 @@
           <a:spcPts val="0"/>
         </a:spcAft>
       </a:defPPr>
-      <a:lvl1pPr lvl="0" marR="0" rtl="0" algn="l">
+      <a:lvl1pPr marR="0" lvl="0" algn="l" rtl="0">
         <a:lnSpc>
           <a:spcPct val="100000"/>
         </a:lnSpc>
@@ -6406,7 +6345,7 @@
           <a:srgbClr val="000000"/>
         </a:buClr>
         <a:buFont typeface="Arial"/>
-        <a:defRPr b="0" i="0" sz="1400" u="none" cap="none" strike="noStrike">
+        <a:defRPr sz="1400" b="0" i="0" u="none" strike="noStrike" cap="none">
           <a:solidFill>
             <a:srgbClr val="000000"/>
           </a:solidFill>
@@ -6416,7 +6355,7 @@
           <a:sym typeface="Arial"/>
         </a:defRPr>
       </a:lvl1pPr>
-      <a:lvl2pPr lvl="1" marR="0" rtl="0" algn="l">
+      <a:lvl2pPr marR="0" lvl="1" algn="l" rtl="0">
         <a:lnSpc>
           <a:spcPct val="100000"/>
         </a:lnSpc>
@@ -6430,7 +6369,7 @@
           <a:srgbClr val="000000"/>
         </a:buClr>
         <a:buFont typeface="Arial"/>
-        <a:defRPr b="0" i="0" sz="1400" u="none" cap="none" strike="noStrike">
+        <a:defRPr sz="1400" b="0" i="0" u="none" strike="noStrike" cap="none">
           <a:solidFill>
             <a:srgbClr val="000000"/>
           </a:solidFill>
@@ -6440,7 +6379,7 @@
           <a:sym typeface="Arial"/>
         </a:defRPr>
       </a:lvl2pPr>
-      <a:lvl3pPr lvl="2" marR="0" rtl="0" algn="l">
+      <a:lvl3pPr marR="0" lvl="2" algn="l" rtl="0">
         <a:lnSpc>
           <a:spcPct val="100000"/>
         </a:lnSpc>
@@ -6454,7 +6393,7 @@
           <a:srgbClr val="000000"/>
         </a:buClr>
         <a:buFont typeface="Arial"/>
-        <a:defRPr b="0" i="0" sz="1400" u="none" cap="none" strike="noStrike">
+        <a:defRPr sz="1400" b="0" i="0" u="none" strike="noStrike" cap="none">
           <a:solidFill>
             <a:srgbClr val="000000"/>
           </a:solidFill>
@@ -6464,7 +6403,7 @@
           <a:sym typeface="Arial"/>
         </a:defRPr>
       </a:lvl3pPr>
-      <a:lvl4pPr lvl="3" marR="0" rtl="0" algn="l">
+      <a:lvl4pPr marR="0" lvl="3" algn="l" rtl="0">
         <a:lnSpc>
           <a:spcPct val="100000"/>
         </a:lnSpc>
@@ -6478,7 +6417,7 @@
           <a:srgbClr val="000000"/>
         </a:buClr>
         <a:buFont typeface="Arial"/>
-        <a:defRPr b="0" i="0" sz="1400" u="none" cap="none" strike="noStrike">
+        <a:defRPr sz="1400" b="0" i="0" u="none" strike="noStrike" cap="none">
           <a:solidFill>
             <a:srgbClr val="000000"/>
           </a:solidFill>
@@ -6488,7 +6427,7 @@
           <a:sym typeface="Arial"/>
         </a:defRPr>
       </a:lvl4pPr>
-      <a:lvl5pPr lvl="4" marR="0" rtl="0" algn="l">
+      <a:lvl5pPr marR="0" lvl="4" algn="l" rtl="0">
         <a:lnSpc>
           <a:spcPct val="100000"/>
         </a:lnSpc>
@@ -6502,7 +6441,7 @@
           <a:srgbClr val="000000"/>
         </a:buClr>
         <a:buFont typeface="Arial"/>
-        <a:defRPr b="0" i="0" sz="1400" u="none" cap="none" strike="noStrike">
+        <a:defRPr sz="1400" b="0" i="0" u="none" strike="noStrike" cap="none">
           <a:solidFill>
             <a:srgbClr val="000000"/>
           </a:solidFill>
@@ -6512,7 +6451,7 @@
           <a:sym typeface="Arial"/>
         </a:defRPr>
       </a:lvl5pPr>
-      <a:lvl6pPr lvl="5" marR="0" rtl="0" algn="l">
+      <a:lvl6pPr marR="0" lvl="5" algn="l" rtl="0">
         <a:lnSpc>
           <a:spcPct val="100000"/>
         </a:lnSpc>
@@ -6526,7 +6465,7 @@
           <a:srgbClr val="000000"/>
         </a:buClr>
         <a:buFont typeface="Arial"/>
-        <a:defRPr b="0" i="0" sz="1400" u="none" cap="none" strike="noStrike">
+        <a:defRPr sz="1400" b="0" i="0" u="none" strike="noStrike" cap="none">
           <a:solidFill>
             <a:srgbClr val="000000"/>
           </a:solidFill>
@@ -6536,7 +6475,7 @@
           <a:sym typeface="Arial"/>
         </a:defRPr>
       </a:lvl6pPr>
-      <a:lvl7pPr lvl="6" marR="0" rtl="0" algn="l">
+      <a:lvl7pPr marR="0" lvl="6" algn="l" rtl="0">
         <a:lnSpc>
           <a:spcPct val="100000"/>
         </a:lnSpc>
@@ -6550,7 +6489,7 @@
           <a:srgbClr val="000000"/>
         </a:buClr>
         <a:buFont typeface="Arial"/>
-        <a:defRPr b="0" i="0" sz="1400" u="none" cap="none" strike="noStrike">
+        <a:defRPr sz="1400" b="0" i="0" u="none" strike="noStrike" cap="none">
           <a:solidFill>
             <a:srgbClr val="000000"/>
           </a:solidFill>
@@ -6560,7 +6499,7 @@
           <a:sym typeface="Arial"/>
         </a:defRPr>
       </a:lvl7pPr>
-      <a:lvl8pPr lvl="7" marR="0" rtl="0" algn="l">
+      <a:lvl8pPr marR="0" lvl="7" algn="l" rtl="0">
         <a:lnSpc>
           <a:spcPct val="100000"/>
         </a:lnSpc>
@@ -6574,7 +6513,7 @@
           <a:srgbClr val="000000"/>
         </a:buClr>
         <a:buFont typeface="Arial"/>
-        <a:defRPr b="0" i="0" sz="1400" u="none" cap="none" strike="noStrike">
+        <a:defRPr sz="1400" b="0" i="0" u="none" strike="noStrike" cap="none">
           <a:solidFill>
             <a:srgbClr val="000000"/>
           </a:solidFill>
@@ -6584,7 +6523,7 @@
           <a:sym typeface="Arial"/>
         </a:defRPr>
       </a:lvl8pPr>
-      <a:lvl9pPr lvl="8" marR="0" rtl="0" algn="l">
+      <a:lvl9pPr marR="0" lvl="8" algn="l" rtl="0">
         <a:lnSpc>
           <a:spcPct val="100000"/>
         </a:lnSpc>
@@ -6598,7 +6537,7 @@
           <a:srgbClr val="000000"/>
         </a:buClr>
         <a:buFont typeface="Arial"/>
-        <a:defRPr b="0" i="0" sz="1400" u="none" cap="none" strike="noStrike">
+        <a:defRPr sz="1400" b="0" i="0" u="none" strike="noStrike" cap="none">
           <a:solidFill>
             <a:srgbClr val="000000"/>
           </a:solidFill>
@@ -6614,11 +6553,11 @@
 </file>
 
 <file path=ppt/slides/slide1.xml><?xml version="1.0" encoding="utf-8"?>
-<p:sld xmlns:a="http://schemas.openxmlformats.org/drawingml/2006/main" xmlns:r="http://schemas.openxmlformats.org/officeDocument/2006/relationships" xmlns:mc="http://schemas.openxmlformats.org/markup-compatibility/2006" xmlns:mv="urn:schemas-microsoft-com:mac:vml" xmlns:p="http://schemas.openxmlformats.org/presentationml/2006/main" xmlns:c="http://schemas.openxmlformats.org/drawingml/2006/chart" xmlns:dgm="http://schemas.openxmlformats.org/drawingml/2006/diagram" xmlns:o="urn:schemas-microsoft-com:office:office" xmlns:v="urn:schemas-microsoft-com:vml" xmlns:pvml="urn:schemas-microsoft-com:office:powerpoint" xmlns:com="http://schemas.openxmlformats.org/drawingml/2006/compatibility" xmlns:p14="http://schemas.microsoft.com/office/powerpoint/2010/main" xmlns:p15="http://schemas.microsoft.com/office/powerpoint/2012/main" xmlns:ahyp="http://schemas.microsoft.com/office/drawing/2018/hyperlinkcolor">
+<p:sld xmlns:a="http://schemas.openxmlformats.org/drawingml/2006/main" xmlns:r="http://schemas.openxmlformats.org/officeDocument/2006/relationships" xmlns:p="http://schemas.openxmlformats.org/presentationml/2006/main">
   <p:cSld>
     <p:spTree>
       <p:nvGrpSpPr>
-        <p:cNvPr id="62" name="Shape 62"/>
+        <p:cNvPr id="1" name="Shape 62"/>
         <p:cNvGrpSpPr/>
         <p:nvPr/>
       </p:nvGrpSpPr>
@@ -6652,12 +6591,12 @@
           </a:ln>
         </p:spPr>
         <p:txBody>
-          <a:bodyPr anchorCtr="0" anchor="ctr" bIns="91425" lIns="91425" spcFirstLastPara="1" rIns="91425" wrap="square" tIns="91425">
+          <a:bodyPr spcFirstLastPara="1" wrap="square" lIns="91425" tIns="91425" rIns="91425" bIns="91425" anchor="ctr" anchorCtr="0">
             <a:noAutofit/>
           </a:bodyPr>
           <a:lstStyle/>
           <a:p>
-            <a:pPr indent="0" lvl="0" marL="0" rtl="0" algn="l">
+            <a:pPr marL="0" lvl="0" indent="0" algn="l" rtl="0">
               <a:spcBef>
                 <a:spcPts val="0"/>
               </a:spcBef>
@@ -6666,9 +6605,6 @@
               </a:spcAft>
               <a:buNone/>
             </a:pPr>
-            <a:r>
-              <a:t/>
-            </a:r>
             <a:endParaRPr/>
           </a:p>
         </p:txBody>
@@ -6682,7 +6618,7 @@
         <p:spPr>
           <a:xfrm>
             <a:off x="1339750" y="2710050"/>
-            <a:ext cx="4979400" cy="1539900"/>
+            <a:ext cx="4979400" cy="1565014"/>
           </a:xfrm>
           <a:prstGeom prst="rect">
             <a:avLst/>
@@ -6693,12 +6629,12 @@
           </a:ln>
         </p:spPr>
         <p:txBody>
-          <a:bodyPr anchorCtr="0" anchor="t" bIns="91425" lIns="91425" spcFirstLastPara="1" rIns="91425" wrap="square" tIns="91425">
+          <a:bodyPr spcFirstLastPara="1" wrap="square" lIns="91425" tIns="91425" rIns="91425" bIns="91425" anchor="t" anchorCtr="0">
             <a:spAutoFit/>
           </a:bodyPr>
           <a:lstStyle/>
           <a:p>
-            <a:pPr indent="0" lvl="0" marL="0" rtl="0" algn="l">
+            <a:pPr marL="0" lvl="0" indent="0" algn="l" rtl="0">
               <a:lnSpc>
                 <a:spcPct val="115000"/>
               </a:lnSpc>
@@ -6711,21 +6647,21 @@
               <a:buNone/>
             </a:pPr>
             <a:r>
-              <a:rPr b="1" lang="ko" sz="2500">
+              <a:rPr lang="ko" sz="2500" b="1" dirty="0">
                 <a:solidFill>
                   <a:srgbClr val="19264B"/>
                 </a:solidFill>
               </a:rPr>
               <a:t>CUAI 0팀</a:t>
             </a:r>
-            <a:endParaRPr b="1" sz="2500">
+            <a:endParaRPr sz="2500" b="1" dirty="0">
               <a:solidFill>
                 <a:srgbClr val="19264B"/>
               </a:solidFill>
             </a:endParaRPr>
           </a:p>
           <a:p>
-            <a:pPr indent="0" lvl="0" marL="0" rtl="0" algn="l">
+            <a:pPr marL="0" lvl="0" indent="0" algn="l" rtl="0">
               <a:lnSpc>
                 <a:spcPct val="115000"/>
               </a:lnSpc>
@@ -6737,22 +6673,38 @@
               </a:spcAft>
               <a:buNone/>
             </a:pPr>
+            <a:r>
+              <a:rPr lang="ko" dirty="0">
+                <a:solidFill>
+                  <a:srgbClr val="19264B"/>
+                </a:solidFill>
+              </a:rPr>
+              <a:t>202</a:t>
+            </a:r>
+            <a:r>
+              <a:rPr lang="en-US" altLang="ko">
+                <a:solidFill>
+                  <a:srgbClr val="19264B"/>
+                </a:solidFill>
+              </a:rPr>
+              <a:t>6</a:t>
+            </a:r>
             <a:r>
               <a:rPr lang="ko">
                 <a:solidFill>
                   <a:srgbClr val="19264B"/>
                 </a:solidFill>
               </a:rPr>
-              <a:t>2025.03.04</a:t>
+              <a:t>.03.04</a:t>
             </a:r>
-            <a:endParaRPr>
+            <a:endParaRPr dirty="0">
               <a:solidFill>
                 <a:srgbClr val="19264B"/>
               </a:solidFill>
             </a:endParaRPr>
           </a:p>
           <a:p>
-            <a:pPr indent="0" lvl="0" marL="0" rtl="0" algn="l">
+            <a:pPr marL="0" lvl="0" indent="0" algn="l" rtl="0">
               <a:lnSpc>
                 <a:spcPct val="115000"/>
               </a:lnSpc>
@@ -6764,17 +6716,14 @@
               </a:spcAft>
               <a:buNone/>
             </a:pPr>
-            <a:r>
-              <a:t/>
-            </a:r>
-            <a:endParaRPr>
+            <a:endParaRPr dirty="0">
               <a:solidFill>
                 <a:srgbClr val="19264B"/>
               </a:solidFill>
             </a:endParaRPr>
           </a:p>
           <a:p>
-            <a:pPr indent="0" lvl="0" marL="0" rtl="0" algn="l">
+            <a:pPr marL="0" lvl="0" indent="0" algn="l" rtl="0">
               <a:lnSpc>
                 <a:spcPct val="115000"/>
               </a:lnSpc>
@@ -6786,17 +6735,14 @@
               </a:spcAft>
               <a:buNone/>
             </a:pPr>
-            <a:r>
-              <a:t/>
-            </a:r>
-            <a:endParaRPr>
+            <a:endParaRPr dirty="0">
               <a:solidFill>
                 <a:srgbClr val="19264B"/>
               </a:solidFill>
             </a:endParaRPr>
           </a:p>
           <a:p>
-            <a:pPr indent="0" lvl="0" marL="0" rtl="0" algn="l">
+            <a:pPr marL="0" lvl="0" indent="0" algn="l" rtl="0">
               <a:lnSpc>
                 <a:spcPct val="115000"/>
               </a:lnSpc>
@@ -6809,14 +6755,14 @@
               <a:buNone/>
             </a:pPr>
             <a:r>
-              <a:rPr lang="ko" sz="1100">
+              <a:rPr lang="ko" sz="1100" dirty="0">
                 <a:solidFill>
                   <a:srgbClr val="19264B"/>
                 </a:solidFill>
               </a:rPr>
               <a:t>발표자 : 홍길동</a:t>
             </a:r>
-            <a:endParaRPr sz="1100">
+            <a:endParaRPr sz="1100" dirty="0">
               <a:solidFill>
                 <a:srgbClr val="19264B"/>
               </a:solidFill>
@@ -6839,14 +6785,14 @@
             <a:avLst/>
           </a:prstGeom>
           <a:noFill/>
-          <a:ln cap="flat" cmpd="sng" w="38100">
+          <a:ln w="38100" cap="flat" cmpd="sng">
             <a:solidFill>
               <a:schemeClr val="lt1"/>
             </a:solidFill>
             <a:prstDash val="solid"/>
             <a:round/>
-            <a:headEnd len="med" w="med" type="none"/>
-            <a:tailEnd len="med" w="med" type="none"/>
+            <a:headEnd type="none" w="med" len="med"/>
+            <a:tailEnd type="none" w="med" len="med"/>
           </a:ln>
         </p:spPr>
       </p:cxnSp>
@@ -6887,428 +6833,11 @@
 </file>
 
 <file path=ppt/slides/slide2.xml><?xml version="1.0" encoding="utf-8"?>
-<p:sld xmlns:a="http://schemas.openxmlformats.org/drawingml/2006/main" xmlns:r="http://schemas.openxmlformats.org/officeDocument/2006/relationships" xmlns:mc="http://schemas.openxmlformats.org/markup-compatibility/2006" xmlns:mv="urn:schemas-microsoft-com:mac:vml" xmlns:p="http://schemas.openxmlformats.org/presentationml/2006/main" xmlns:c="http://schemas.openxmlformats.org/drawingml/2006/chart" xmlns:dgm="http://schemas.openxmlformats.org/drawingml/2006/diagram" xmlns:o="urn:schemas-microsoft-com:office:office" xmlns:v="urn:schemas-microsoft-com:vml" xmlns:pvml="urn:schemas-microsoft-com:office:powerpoint" xmlns:com="http://schemas.openxmlformats.org/drawingml/2006/compatibility" xmlns:p14="http://schemas.microsoft.com/office/powerpoint/2010/main" xmlns:p15="http://schemas.microsoft.com/office/powerpoint/2012/main" xmlns:ahyp="http://schemas.microsoft.com/office/drawing/2018/hyperlinkcolor">
+<p:sld xmlns:a="http://schemas.openxmlformats.org/drawingml/2006/main" xmlns:r="http://schemas.openxmlformats.org/officeDocument/2006/relationships" xmlns:p="http://schemas.openxmlformats.org/presentationml/2006/main">
   <p:cSld>
     <p:spTree>
       <p:nvGrpSpPr>
-        <p:cNvPr id="70" name="Shape 70"/>
-        <p:cNvGrpSpPr/>
-        <p:nvPr/>
-      </p:nvGrpSpPr>
-      <p:grpSpPr>
-        <a:xfrm>
-          <a:off x="0" y="0"/>
-          <a:ext cx="0" cy="0"/>
-          <a:chOff x="0" y="0"/>
-          <a:chExt cx="0" cy="0"/>
-        </a:xfrm>
-      </p:grpSpPr>
-      <p:sp>
-        <p:nvSpPr>
-          <p:cNvPr id="71" name="Google Shape;71;p14"/>
-          <p:cNvSpPr/>
-          <p:nvPr/>
-        </p:nvSpPr>
-        <p:spPr>
-          <a:xfrm>
-            <a:off x="0" y="-37950"/>
-            <a:ext cx="1181100" cy="5219400"/>
-          </a:xfrm>
-          <a:prstGeom prst="rect">
-            <a:avLst/>
-          </a:prstGeom>
-          <a:solidFill>
-            <a:srgbClr val="19264B"/>
-          </a:solidFill>
-          <a:ln>
-            <a:noFill/>
-          </a:ln>
-        </p:spPr>
-        <p:txBody>
-          <a:bodyPr anchorCtr="0" anchor="ctr" bIns="91425" lIns="91425" spcFirstLastPara="1" rIns="91425" wrap="square" tIns="91425">
-            <a:noAutofit/>
-          </a:bodyPr>
-          <a:lstStyle/>
-          <a:p>
-            <a:pPr indent="0" lvl="0" marL="0" rtl="0" algn="l">
-              <a:spcBef>
-                <a:spcPts val="0"/>
-              </a:spcBef>
-              <a:spcAft>
-                <a:spcPts val="0"/>
-              </a:spcAft>
-              <a:buNone/>
-            </a:pPr>
-            <a:r>
-              <a:t/>
-            </a:r>
-            <a:endParaRPr/>
-          </a:p>
-        </p:txBody>
-      </p:sp>
-      <p:cxnSp>
-        <p:nvCxnSpPr>
-          <p:cNvPr id="72" name="Google Shape;72;p14"/>
-          <p:cNvCxnSpPr/>
-          <p:nvPr/>
-        </p:nvCxnSpPr>
-        <p:spPr>
-          <a:xfrm>
-            <a:off x="172875" y="-37950"/>
-            <a:ext cx="0" cy="2187000"/>
-          </a:xfrm>
-          <a:prstGeom prst="straightConnector1">
-            <a:avLst/>
-          </a:prstGeom>
-          <a:noFill/>
-          <a:ln cap="flat" cmpd="sng" w="38100">
-            <a:solidFill>
-              <a:schemeClr val="lt1"/>
-            </a:solidFill>
-            <a:prstDash val="solid"/>
-            <a:round/>
-            <a:headEnd len="med" w="med" type="none"/>
-            <a:tailEnd len="med" w="med" type="none"/>
-          </a:ln>
-        </p:spPr>
-      </p:cxnSp>
-      <p:pic>
-        <p:nvPicPr>
-          <p:cNvPr id="73" name="Google Shape;73;p14"/>
-          <p:cNvPicPr preferRelativeResize="0"/>
-          <p:nvPr/>
-        </p:nvPicPr>
-        <p:blipFill>
-          <a:blip r:embed="rId3">
-            <a:alphaModFix/>
-          </a:blip>
-          <a:stretch>
-            <a:fillRect/>
-          </a:stretch>
-        </p:blipFill>
-        <p:spPr>
-          <a:xfrm rot="5400000">
-            <a:off x="-928700" y="3071650"/>
-            <a:ext cx="3038475" cy="1181100"/>
-          </a:xfrm>
-          <a:prstGeom prst="rect">
-            <a:avLst/>
-          </a:prstGeom>
-          <a:noFill/>
-          <a:ln>
-            <a:noFill/>
-          </a:ln>
-        </p:spPr>
-      </p:pic>
-      <p:sp>
-        <p:nvSpPr>
-          <p:cNvPr id="74" name="Google Shape;74;p14"/>
-          <p:cNvSpPr/>
-          <p:nvPr/>
-        </p:nvSpPr>
-        <p:spPr>
-          <a:xfrm>
-            <a:off x="1599250" y="1262100"/>
-            <a:ext cx="4287600" cy="3414600"/>
-          </a:xfrm>
-          <a:prstGeom prst="rect">
-            <a:avLst/>
-          </a:prstGeom>
-          <a:solidFill>
-            <a:srgbClr val="EFEFEF"/>
-          </a:solidFill>
-          <a:ln cap="flat" cmpd="sng" w="38100">
-            <a:solidFill>
-              <a:srgbClr val="19264B"/>
-            </a:solidFill>
-            <a:prstDash val="solid"/>
-            <a:round/>
-            <a:headEnd len="sm" w="sm" type="none"/>
-            <a:tailEnd len="sm" w="sm" type="none"/>
-          </a:ln>
-        </p:spPr>
-        <p:txBody>
-          <a:bodyPr anchorCtr="0" anchor="ctr" bIns="91425" lIns="91425" spcFirstLastPara="1" rIns="91425" wrap="square" tIns="91425">
-            <a:noAutofit/>
-          </a:bodyPr>
-          <a:lstStyle/>
-          <a:p>
-            <a:pPr indent="0" lvl="0" marL="0" rtl="0" algn="ctr">
-              <a:spcBef>
-                <a:spcPts val="0"/>
-              </a:spcBef>
-              <a:spcAft>
-                <a:spcPts val="0"/>
-              </a:spcAft>
-              <a:buNone/>
-            </a:pPr>
-            <a:r>
-              <a:rPr lang="ko" sz="1200"/>
-              <a:t>활동 사진이 있다면 사진을 넣어주세요.</a:t>
-            </a:r>
-            <a:endParaRPr sz="1200"/>
-          </a:p>
-          <a:p>
-            <a:pPr indent="0" lvl="0" marL="0" rtl="0" algn="ctr">
-              <a:spcBef>
-                <a:spcPts val="0"/>
-              </a:spcBef>
-              <a:spcAft>
-                <a:spcPts val="0"/>
-              </a:spcAft>
-              <a:buNone/>
-            </a:pPr>
-            <a:r>
-              <a:rPr lang="ko" sz="1200"/>
-              <a:t>(</a:t>
-            </a:r>
-            <a:r>
-              <a:rPr lang="ko" sz="1200"/>
-              <a:t>카카오톡 대화 </a:t>
-            </a:r>
-            <a:r>
-              <a:rPr lang="ko" sz="1200"/>
-              <a:t>화면 캡쳐 이용 </a:t>
-            </a:r>
-            <a:r>
-              <a:rPr lang="ko" sz="1200"/>
-              <a:t>가능</a:t>
-            </a:r>
-            <a:r>
-              <a:rPr lang="ko" sz="1200"/>
-              <a:t>)</a:t>
-            </a:r>
-            <a:endParaRPr sz="1200"/>
-          </a:p>
-        </p:txBody>
-      </p:sp>
-      <p:sp>
-        <p:nvSpPr>
-          <p:cNvPr id="75" name="Google Shape;75;p14"/>
-          <p:cNvSpPr txBox="1"/>
-          <p:nvPr/>
-        </p:nvSpPr>
-        <p:spPr>
-          <a:xfrm>
-            <a:off x="1408975" y="306875"/>
-            <a:ext cx="4979400" cy="492600"/>
-          </a:xfrm>
-          <a:prstGeom prst="rect">
-            <a:avLst/>
-          </a:prstGeom>
-          <a:noFill/>
-          <a:ln>
-            <a:noFill/>
-          </a:ln>
-        </p:spPr>
-        <p:txBody>
-          <a:bodyPr anchorCtr="0" anchor="t" bIns="91425" lIns="91425" spcFirstLastPara="1" rIns="91425" wrap="square" tIns="91425">
-            <a:spAutoFit/>
-          </a:bodyPr>
-          <a:lstStyle/>
-          <a:p>
-            <a:pPr indent="0" lvl="0" marL="0" rtl="0" algn="l">
-              <a:lnSpc>
-                <a:spcPct val="115000"/>
-              </a:lnSpc>
-              <a:spcBef>
-                <a:spcPts val="0"/>
-              </a:spcBef>
-              <a:spcAft>
-                <a:spcPts val="0"/>
-              </a:spcAft>
-              <a:buNone/>
-            </a:pPr>
-            <a:r>
-              <a:rPr lang="ko" sz="2000">
-                <a:solidFill>
-                  <a:srgbClr val="19264B"/>
-                </a:solidFill>
-                <a:latin typeface="NanumGothicExtraBold"/>
-                <a:ea typeface="NanumGothicExtraBold"/>
-                <a:cs typeface="NanumGothicExtraBold"/>
-                <a:sym typeface="NanumGothicExtraBold"/>
-              </a:rPr>
-              <a:t>스터디원 소개 및 만남 인증</a:t>
-            </a:r>
-            <a:endParaRPr sz="2000">
-              <a:solidFill>
-                <a:srgbClr val="19264B"/>
-              </a:solidFill>
-              <a:latin typeface="NanumGothicExtraBold"/>
-              <a:ea typeface="NanumGothicExtraBold"/>
-              <a:cs typeface="NanumGothicExtraBold"/>
-              <a:sym typeface="NanumGothicExtraBold"/>
-            </a:endParaRPr>
-          </a:p>
-        </p:txBody>
-      </p:sp>
-      <p:sp>
-        <p:nvSpPr>
-          <p:cNvPr id="76" name="Google Shape;76;p14"/>
-          <p:cNvSpPr txBox="1"/>
-          <p:nvPr/>
-        </p:nvSpPr>
-        <p:spPr>
-          <a:xfrm>
-            <a:off x="6137600" y="1820125"/>
-            <a:ext cx="2282100" cy="1908600"/>
-          </a:xfrm>
-          <a:prstGeom prst="rect">
-            <a:avLst/>
-          </a:prstGeom>
-          <a:noFill/>
-          <a:ln>
-            <a:noFill/>
-          </a:ln>
-        </p:spPr>
-        <p:txBody>
-          <a:bodyPr anchorCtr="0" anchor="t" bIns="91425" lIns="91425" spcFirstLastPara="1" rIns="91425" wrap="square" tIns="91425">
-            <a:spAutoFit/>
-          </a:bodyPr>
-          <a:lstStyle/>
-          <a:p>
-            <a:pPr indent="0" lvl="0" marL="0" rtl="0" algn="l">
-              <a:spcBef>
-                <a:spcPts val="0"/>
-              </a:spcBef>
-              <a:spcAft>
-                <a:spcPts val="0"/>
-              </a:spcAft>
-              <a:buNone/>
-            </a:pPr>
-            <a:r>
-              <a:rPr lang="ko"/>
-              <a:t>스터디원 1 : 김XX</a:t>
-            </a:r>
-            <a:endParaRPr/>
-          </a:p>
-          <a:p>
-            <a:pPr indent="0" lvl="0" marL="0" rtl="0" algn="l">
-              <a:spcBef>
-                <a:spcPts val="0"/>
-              </a:spcBef>
-              <a:spcAft>
-                <a:spcPts val="0"/>
-              </a:spcAft>
-              <a:buNone/>
-            </a:pPr>
-            <a:r>
-              <a:t/>
-            </a:r>
-            <a:endParaRPr/>
-          </a:p>
-          <a:p>
-            <a:pPr indent="0" lvl="0" marL="0" rtl="0" algn="l">
-              <a:spcBef>
-                <a:spcPts val="0"/>
-              </a:spcBef>
-              <a:spcAft>
-                <a:spcPts val="0"/>
-              </a:spcAft>
-              <a:buNone/>
-            </a:pPr>
-            <a:r>
-              <a:rPr lang="ko"/>
-              <a:t>스터디원 2 : 이XX</a:t>
-            </a:r>
-            <a:endParaRPr/>
-          </a:p>
-          <a:p>
-            <a:pPr indent="0" lvl="0" marL="0" rtl="0" algn="l">
-              <a:spcBef>
-                <a:spcPts val="0"/>
-              </a:spcBef>
-              <a:spcAft>
-                <a:spcPts val="0"/>
-              </a:spcAft>
-              <a:buNone/>
-            </a:pPr>
-            <a:r>
-              <a:t/>
-            </a:r>
-            <a:endParaRPr/>
-          </a:p>
-          <a:p>
-            <a:pPr indent="0" lvl="0" marL="0" rtl="0" algn="l">
-              <a:spcBef>
-                <a:spcPts val="0"/>
-              </a:spcBef>
-              <a:spcAft>
-                <a:spcPts val="0"/>
-              </a:spcAft>
-              <a:buNone/>
-            </a:pPr>
-            <a:r>
-              <a:rPr lang="ko"/>
-              <a:t>스터디원 3 : 박XX</a:t>
-            </a:r>
-            <a:endParaRPr/>
-          </a:p>
-          <a:p>
-            <a:pPr indent="0" lvl="0" marL="0" rtl="0" algn="l">
-              <a:spcBef>
-                <a:spcPts val="0"/>
-              </a:spcBef>
-              <a:spcAft>
-                <a:spcPts val="0"/>
-              </a:spcAft>
-              <a:buNone/>
-            </a:pPr>
-            <a:r>
-              <a:rPr lang="ko"/>
-              <a:t>.</a:t>
-            </a:r>
-            <a:endParaRPr/>
-          </a:p>
-          <a:p>
-            <a:pPr indent="0" lvl="0" marL="0" rtl="0" algn="l">
-              <a:spcBef>
-                <a:spcPts val="0"/>
-              </a:spcBef>
-              <a:spcAft>
-                <a:spcPts val="0"/>
-              </a:spcAft>
-              <a:buNone/>
-            </a:pPr>
-            <a:r>
-              <a:rPr lang="ko"/>
-              <a:t>.</a:t>
-            </a:r>
-            <a:endParaRPr/>
-          </a:p>
-          <a:p>
-            <a:pPr indent="0" lvl="0" marL="0" rtl="0" algn="l">
-              <a:spcBef>
-                <a:spcPts val="0"/>
-              </a:spcBef>
-              <a:spcAft>
-                <a:spcPts val="0"/>
-              </a:spcAft>
-              <a:buNone/>
-            </a:pPr>
-            <a:r>
-              <a:rPr lang="ko"/>
-              <a:t>.</a:t>
-            </a:r>
-            <a:endParaRPr/>
-          </a:p>
-        </p:txBody>
-      </p:sp>
-    </p:spTree>
-  </p:cSld>
-  <p:clrMapOvr>
-    <a:masterClrMapping/>
-  </p:clrMapOvr>
-</p:sld>
-</file>
-
-<file path=ppt/slides/slide3.xml><?xml version="1.0" encoding="utf-8"?>
-<p:sld xmlns:a="http://schemas.openxmlformats.org/drawingml/2006/main" xmlns:r="http://schemas.openxmlformats.org/officeDocument/2006/relationships" xmlns:mc="http://schemas.openxmlformats.org/markup-compatibility/2006" xmlns:mv="urn:schemas-microsoft-com:mac:vml" xmlns:p="http://schemas.openxmlformats.org/presentationml/2006/main" xmlns:c="http://schemas.openxmlformats.org/drawingml/2006/chart" xmlns:dgm="http://schemas.openxmlformats.org/drawingml/2006/diagram" xmlns:o="urn:schemas-microsoft-com:office:office" xmlns:v="urn:schemas-microsoft-com:vml" xmlns:pvml="urn:schemas-microsoft-com:office:powerpoint" xmlns:com="http://schemas.openxmlformats.org/drawingml/2006/compatibility" xmlns:p14="http://schemas.microsoft.com/office/powerpoint/2010/main" xmlns:p15="http://schemas.microsoft.com/office/powerpoint/2012/main" xmlns:ahyp="http://schemas.microsoft.com/office/drawing/2018/hyperlinkcolor">
-  <p:cSld>
-    <p:spTree>
-      <p:nvGrpSpPr>
-        <p:cNvPr id="80" name="Shape 80"/>
+        <p:cNvPr id="1" name="Shape 80"/>
         <p:cNvGrpSpPr/>
         <p:nvPr/>
       </p:nvGrpSpPr>
@@ -7342,12 +6871,12 @@
           </a:ln>
         </p:spPr>
         <p:txBody>
-          <a:bodyPr anchorCtr="0" anchor="ctr" bIns="91425" lIns="91425" spcFirstLastPara="1" rIns="91425" wrap="square" tIns="91425">
+          <a:bodyPr spcFirstLastPara="1" wrap="square" lIns="91425" tIns="91425" rIns="91425" bIns="91425" anchor="ctr" anchorCtr="0">
             <a:noAutofit/>
           </a:bodyPr>
           <a:lstStyle/>
           <a:p>
-            <a:pPr indent="0" lvl="0" marL="0" rtl="0" algn="l">
+            <a:pPr marL="0" lvl="0" indent="0" algn="l" rtl="0">
               <a:spcBef>
                 <a:spcPts val="0"/>
               </a:spcBef>
@@ -7356,9 +6885,6 @@
               </a:spcAft>
               <a:buNone/>
             </a:pPr>
-            <a:r>
-              <a:t/>
-            </a:r>
             <a:endParaRPr/>
           </a:p>
         </p:txBody>
@@ -7378,14 +6904,14 @@
             <a:avLst/>
           </a:prstGeom>
           <a:noFill/>
-          <a:ln cap="flat" cmpd="sng" w="38100">
+          <a:ln w="38100" cap="flat" cmpd="sng">
             <a:solidFill>
               <a:schemeClr val="lt1"/>
             </a:solidFill>
             <a:prstDash val="solid"/>
             <a:round/>
-            <a:headEnd len="med" w="med" type="none"/>
-            <a:tailEnd len="med" w="med" type="none"/>
+            <a:headEnd type="none" w="med" len="med"/>
+            <a:tailEnd type="none" w="med" len="med"/>
           </a:ln>
         </p:spPr>
       </p:cxnSp>
@@ -7437,12 +6963,12 @@
           </a:ln>
         </p:spPr>
         <p:txBody>
-          <a:bodyPr anchorCtr="0" anchor="t" bIns="91425" lIns="91425" spcFirstLastPara="1" rIns="91425" wrap="square" tIns="91425">
+          <a:bodyPr spcFirstLastPara="1" wrap="square" lIns="91425" tIns="91425" rIns="91425" bIns="91425" anchor="t" anchorCtr="0">
             <a:spAutoFit/>
           </a:bodyPr>
           <a:lstStyle/>
           <a:p>
-            <a:pPr indent="0" lvl="0" marL="0" rtl="0" algn="l">
+            <a:pPr marL="0" lvl="0" indent="0" algn="l" rtl="0">
               <a:lnSpc>
                 <a:spcPct val="115000"/>
               </a:lnSpc>
@@ -7486,12 +7012,12 @@
 </p:sld>
 </file>
 
-<file path=ppt/slides/slide4.xml><?xml version="1.0" encoding="utf-8"?>
-<p:sld xmlns:a="http://schemas.openxmlformats.org/drawingml/2006/main" xmlns:r="http://schemas.openxmlformats.org/officeDocument/2006/relationships" xmlns:mc="http://schemas.openxmlformats.org/markup-compatibility/2006" xmlns:mv="urn:schemas-microsoft-com:mac:vml" xmlns:p="http://schemas.openxmlformats.org/presentationml/2006/main" xmlns:c="http://schemas.openxmlformats.org/drawingml/2006/chart" xmlns:dgm="http://schemas.openxmlformats.org/drawingml/2006/diagram" xmlns:o="urn:schemas-microsoft-com:office:office" xmlns:v="urn:schemas-microsoft-com:vml" xmlns:pvml="urn:schemas-microsoft-com:office:powerpoint" xmlns:com="http://schemas.openxmlformats.org/drawingml/2006/compatibility" xmlns:p14="http://schemas.microsoft.com/office/powerpoint/2010/main" xmlns:p15="http://schemas.microsoft.com/office/powerpoint/2012/main" xmlns:ahyp="http://schemas.microsoft.com/office/drawing/2018/hyperlinkcolor">
+<file path=ppt/slides/slide3.xml><?xml version="1.0" encoding="utf-8"?>
+<p:sld xmlns:a="http://schemas.openxmlformats.org/drawingml/2006/main" xmlns:r="http://schemas.openxmlformats.org/officeDocument/2006/relationships" xmlns:p="http://schemas.openxmlformats.org/presentationml/2006/main">
   <p:cSld>
     <p:spTree>
       <p:nvGrpSpPr>
-        <p:cNvPr id="88" name="Shape 88"/>
+        <p:cNvPr id="1" name="Shape 88"/>
         <p:cNvGrpSpPr/>
         <p:nvPr/>
       </p:nvGrpSpPr>
@@ -7525,12 +7051,12 @@
           </a:ln>
         </p:spPr>
         <p:txBody>
-          <a:bodyPr anchorCtr="0" anchor="ctr" bIns="91425" lIns="91425" spcFirstLastPara="1" rIns="91425" wrap="square" tIns="91425">
+          <a:bodyPr spcFirstLastPara="1" wrap="square" lIns="91425" tIns="91425" rIns="91425" bIns="91425" anchor="ctr" anchorCtr="0">
             <a:noAutofit/>
           </a:bodyPr>
           <a:lstStyle/>
           <a:p>
-            <a:pPr indent="0" lvl="0" marL="0" rtl="0" algn="l">
+            <a:pPr marL="0" lvl="0" indent="0" algn="l" rtl="0">
               <a:spcBef>
                 <a:spcPts val="0"/>
               </a:spcBef>
@@ -7539,9 +7065,6 @@
               </a:spcAft>
               <a:buNone/>
             </a:pPr>
-            <a:r>
-              <a:t/>
-            </a:r>
             <a:endParaRPr/>
           </a:p>
         </p:txBody>
@@ -7561,14 +7084,14 @@
             <a:avLst/>
           </a:prstGeom>
           <a:noFill/>
-          <a:ln cap="flat" cmpd="sng" w="38100">
+          <a:ln w="38100" cap="flat" cmpd="sng">
             <a:solidFill>
               <a:schemeClr val="lt1"/>
             </a:solidFill>
             <a:prstDash val="solid"/>
             <a:round/>
-            <a:headEnd len="med" w="med" type="none"/>
-            <a:tailEnd len="med" w="med" type="none"/>
+            <a:headEnd type="none" w="med" len="med"/>
+            <a:tailEnd type="none" w="med" len="med"/>
           </a:ln>
         </p:spPr>
       </p:cxnSp>
@@ -7620,12 +7143,12 @@
           </a:ln>
         </p:spPr>
         <p:txBody>
-          <a:bodyPr anchorCtr="0" anchor="t" bIns="91425" lIns="91425" spcFirstLastPara="1" rIns="91425" wrap="square" tIns="91425">
+          <a:bodyPr spcFirstLastPara="1" wrap="square" lIns="91425" tIns="91425" rIns="91425" bIns="91425" anchor="t" anchorCtr="0">
             <a:spAutoFit/>
           </a:bodyPr>
           <a:lstStyle/>
           <a:p>
-            <a:pPr indent="0" lvl="0" marL="0" rtl="0" algn="l">
+            <a:pPr marL="0" lvl="0" indent="0" algn="l" rtl="0">
               <a:lnSpc>
                 <a:spcPct val="115000"/>
               </a:lnSpc>
@@ -7669,19 +7192,20 @@
 </p:sld>
 </file>
 
-<file path=ppt/slides/slide5.xml><?xml version="1.0" encoding="utf-8"?>
-<p:sld xmlns:a="http://schemas.openxmlformats.org/drawingml/2006/main" xmlns:r="http://schemas.openxmlformats.org/officeDocument/2006/relationships" xmlns:mc="http://schemas.openxmlformats.org/markup-compatibility/2006" xmlns:mv="urn:schemas-microsoft-com:mac:vml" xmlns:p="http://schemas.openxmlformats.org/presentationml/2006/main" xmlns:c="http://schemas.openxmlformats.org/drawingml/2006/chart" xmlns:dgm="http://schemas.openxmlformats.org/drawingml/2006/diagram" xmlns:o="urn:schemas-microsoft-com:office:office" xmlns:v="urn:schemas-microsoft-com:vml" xmlns:pvml="urn:schemas-microsoft-com:office:powerpoint" xmlns:com="http://schemas.openxmlformats.org/drawingml/2006/compatibility" xmlns:p14="http://schemas.microsoft.com/office/powerpoint/2010/main" xmlns:p15="http://schemas.microsoft.com/office/powerpoint/2012/main" xmlns:ahyp="http://schemas.microsoft.com/office/drawing/2018/hyperlinkcolor">
+<file path=ppt/slides/slide4.xml><?xml version="1.0" encoding="utf-8"?>
+<p:sld xmlns:a="http://schemas.openxmlformats.org/drawingml/2006/main" xmlns:r="http://schemas.openxmlformats.org/officeDocument/2006/relationships" xmlns:p="http://schemas.openxmlformats.org/presentationml/2006/main">
   <p:cSld>
     <p:bg>
       <p:bgPr>
         <a:solidFill>
           <a:srgbClr val="19264B"/>
         </a:solidFill>
+        <a:effectLst/>
       </p:bgPr>
     </p:bg>
     <p:spTree>
       <p:nvGrpSpPr>
-        <p:cNvPr id="96" name="Shape 96"/>
+        <p:cNvPr id="1" name="Shape 96"/>
         <p:cNvGrpSpPr/>
         <p:nvPr/>
       </p:nvGrpSpPr>
@@ -7736,23 +7260,23 @@
             <a:avLst/>
           </a:prstGeom>
           <a:noFill/>
-          <a:ln cap="flat" cmpd="sng" w="38100">
+          <a:ln w="38100" cap="flat" cmpd="sng">
             <a:solidFill>
               <a:schemeClr val="lt1"/>
             </a:solidFill>
             <a:prstDash val="solid"/>
             <a:round/>
-            <a:headEnd len="sm" w="sm" type="none"/>
-            <a:tailEnd len="sm" w="sm" type="none"/>
+            <a:headEnd type="none" w="sm" len="sm"/>
+            <a:tailEnd type="none" w="sm" len="sm"/>
           </a:ln>
         </p:spPr>
         <p:txBody>
-          <a:bodyPr anchorCtr="0" anchor="ctr" bIns="91425" lIns="91425" spcFirstLastPara="1" rIns="91425" wrap="square" tIns="91425">
+          <a:bodyPr spcFirstLastPara="1" wrap="square" lIns="91425" tIns="91425" rIns="91425" bIns="91425" anchor="ctr" anchorCtr="0">
             <a:noAutofit/>
           </a:bodyPr>
           <a:lstStyle/>
           <a:p>
-            <a:pPr indent="0" lvl="0" marL="0" rtl="0" algn="l">
+            <a:pPr marL="0" lvl="0" indent="0" algn="l" rtl="0">
               <a:spcBef>
                 <a:spcPts val="0"/>
               </a:spcBef>
@@ -7761,9 +7285,6 @@
               </a:spcAft>
               <a:buNone/>
             </a:pPr>
-            <a:r>
-              <a:t/>
-            </a:r>
             <a:endParaRPr/>
           </a:p>
         </p:txBody>
@@ -7783,23 +7304,23 @@
             <a:avLst/>
           </a:prstGeom>
           <a:noFill/>
-          <a:ln cap="flat" cmpd="sng" w="38100">
+          <a:ln w="38100" cap="flat" cmpd="sng">
             <a:solidFill>
               <a:schemeClr val="lt1"/>
             </a:solidFill>
             <a:prstDash val="solid"/>
             <a:round/>
-            <a:headEnd len="sm" w="sm" type="none"/>
-            <a:tailEnd len="sm" w="sm" type="none"/>
+            <a:headEnd type="none" w="sm" len="sm"/>
+            <a:tailEnd type="none" w="sm" len="sm"/>
           </a:ln>
         </p:spPr>
         <p:txBody>
-          <a:bodyPr anchorCtr="0" anchor="ctr" bIns="91425" lIns="91425" spcFirstLastPara="1" rIns="91425" wrap="square" tIns="91425">
+          <a:bodyPr spcFirstLastPara="1" wrap="square" lIns="91425" tIns="91425" rIns="91425" bIns="91425" anchor="ctr" anchorCtr="0">
             <a:noAutofit/>
           </a:bodyPr>
           <a:lstStyle/>
           <a:p>
-            <a:pPr indent="0" lvl="0" marL="0" rtl="0" algn="l">
+            <a:pPr marL="0" lvl="0" indent="0" algn="l" rtl="0">
               <a:spcBef>
                 <a:spcPts val="0"/>
               </a:spcBef>
@@ -7808,9 +7329,6 @@
               </a:spcAft>
               <a:buNone/>
             </a:pPr>
-            <a:r>
-              <a:t/>
-            </a:r>
             <a:endParaRPr/>
           </a:p>
         </p:txBody>
@@ -7832,23 +7350,23 @@
           <a:solidFill>
             <a:schemeClr val="lt1"/>
           </a:solidFill>
-          <a:ln cap="flat" cmpd="sng" w="38100">
+          <a:ln w="38100" cap="flat" cmpd="sng">
             <a:solidFill>
               <a:schemeClr val="lt1"/>
             </a:solidFill>
             <a:prstDash val="solid"/>
             <a:round/>
-            <a:headEnd len="sm" w="sm" type="none"/>
-            <a:tailEnd len="sm" w="sm" type="none"/>
+            <a:headEnd type="none" w="sm" len="sm"/>
+            <a:tailEnd type="none" w="sm" len="sm"/>
           </a:ln>
         </p:spPr>
         <p:txBody>
-          <a:bodyPr anchorCtr="0" anchor="ctr" bIns="91425" lIns="91425" spcFirstLastPara="1" rIns="91425" wrap="square" tIns="91425">
+          <a:bodyPr spcFirstLastPara="1" wrap="square" lIns="91425" tIns="91425" rIns="91425" bIns="91425" anchor="ctr" anchorCtr="0">
             <a:noAutofit/>
           </a:bodyPr>
           <a:lstStyle/>
           <a:p>
-            <a:pPr indent="0" lvl="0" marL="0" rtl="0" algn="l">
+            <a:pPr marL="0" lvl="0" indent="0" algn="l" rtl="0">
               <a:spcBef>
                 <a:spcPts val="0"/>
               </a:spcBef>
@@ -7857,9 +7375,6 @@
               </a:spcAft>
               <a:buNone/>
             </a:pPr>
-            <a:r>
-              <a:t/>
-            </a:r>
             <a:endParaRPr/>
           </a:p>
         </p:txBody>
@@ -7879,14 +7394,14 @@
             <a:avLst/>
           </a:prstGeom>
           <a:noFill/>
-          <a:ln cap="flat" cmpd="sng" w="28575">
+          <a:ln w="28575" cap="flat" cmpd="sng">
             <a:solidFill>
               <a:schemeClr val="lt1"/>
             </a:solidFill>
             <a:prstDash val="solid"/>
             <a:round/>
-            <a:headEnd len="med" w="med" type="none"/>
-            <a:tailEnd len="med" w="med" type="none"/>
+            <a:headEnd type="none" w="med" len="med"/>
+            <a:tailEnd type="none" w="med" len="med"/>
           </a:ln>
         </p:spPr>
       </p:cxnSp>
@@ -7910,12 +7425,12 @@
           </a:ln>
         </p:spPr>
         <p:txBody>
-          <a:bodyPr anchorCtr="0" anchor="t" bIns="91425" lIns="91425" spcFirstLastPara="1" rIns="91425" wrap="square" tIns="91425">
+          <a:bodyPr spcFirstLastPara="1" wrap="square" lIns="91425" tIns="91425" rIns="91425" bIns="91425" anchor="t" anchorCtr="0">
             <a:spAutoFit/>
           </a:bodyPr>
           <a:lstStyle/>
           <a:p>
-            <a:pPr indent="0" lvl="0" marL="0" rtl="0" algn="l">
+            <a:pPr marL="0" lvl="0" indent="0" algn="l" rtl="0">
               <a:spcBef>
                 <a:spcPts val="0"/>
               </a:spcBef>
@@ -7924,9 +7439,6 @@
               </a:spcAft>
               <a:buNone/>
             </a:pPr>
-            <a:r>
-              <a:t/>
-            </a:r>
             <a:endParaRPr/>
           </a:p>
         </p:txBody>
@@ -7951,12 +7463,12 @@
           </a:ln>
         </p:spPr>
         <p:txBody>
-          <a:bodyPr anchorCtr="0" anchor="t" bIns="91425" lIns="91425" spcFirstLastPara="1" rIns="91425" wrap="square" tIns="91425">
+          <a:bodyPr spcFirstLastPara="1" wrap="square" lIns="91425" tIns="91425" rIns="91425" bIns="91425" anchor="t" anchorCtr="0">
             <a:spAutoFit/>
           </a:bodyPr>
           <a:lstStyle/>
           <a:p>
-            <a:pPr indent="0" lvl="0" marL="0" rtl="0" algn="ctr">
+            <a:pPr marL="0" lvl="0" indent="0" algn="ctr" rtl="0">
               <a:spcBef>
                 <a:spcPts val="0"/>
               </a:spcBef>
@@ -7965,9 +7477,6 @@
               </a:spcAft>
               <a:buNone/>
             </a:pPr>
-            <a:r>
-              <a:t/>
-            </a:r>
             <a:endParaRPr sz="4800">
               <a:solidFill>
                 <a:schemeClr val="lt1"/>
@@ -7989,7 +7498,288 @@
 </file>
 
 <file path=ppt/theme/theme1.xml><?xml version="1.0" encoding="utf-8"?>
-<a:theme xmlns:a="http://schemas.openxmlformats.org/drawingml/2006/main" xmlns:r="http://schemas.openxmlformats.org/officeDocument/2006/relationships">
+<a:theme xmlns:a="http://schemas.openxmlformats.org/drawingml/2006/main" name="Simple Light">
+  <a:themeElements>
+    <a:clrScheme name="Simple Light">
+      <a:dk1>
+        <a:srgbClr val="000000"/>
+      </a:dk1>
+      <a:lt1>
+        <a:srgbClr val="FFFFFF"/>
+      </a:lt1>
+      <a:dk2>
+        <a:srgbClr val="595959"/>
+      </a:dk2>
+      <a:lt2>
+        <a:srgbClr val="EEEEEE"/>
+      </a:lt2>
+      <a:accent1>
+        <a:srgbClr val="4285F4"/>
+      </a:accent1>
+      <a:accent2>
+        <a:srgbClr val="212121"/>
+      </a:accent2>
+      <a:accent3>
+        <a:srgbClr val="78909C"/>
+      </a:accent3>
+      <a:accent4>
+        <a:srgbClr val="FFAB40"/>
+      </a:accent4>
+      <a:accent5>
+        <a:srgbClr val="0097A7"/>
+      </a:accent5>
+      <a:accent6>
+        <a:srgbClr val="EEFF41"/>
+      </a:accent6>
+      <a:hlink>
+        <a:srgbClr val="0097A7"/>
+      </a:hlink>
+      <a:folHlink>
+        <a:srgbClr val="0097A7"/>
+      </a:folHlink>
+    </a:clrScheme>
+    <a:fontScheme name="Office">
+      <a:majorFont>
+        <a:latin typeface="Arial"/>
+        <a:ea typeface=""/>
+        <a:cs typeface=""/>
+        <a:font script="Jpan" typeface="ＭＳ Ｐゴシック"/>
+        <a:font script="Hang" typeface="맑은 고딕"/>
+        <a:font script="Hans" typeface="宋体"/>
+        <a:font script="Hant" typeface="新細明體"/>
+        <a:font script="Arab" typeface="Times New Roman"/>
+        <a:font script="Hebr" typeface="Times New Roman"/>
+        <a:font script="Thai" typeface="Angsana New"/>
+        <a:font script="Ethi" typeface="Nyala"/>
+        <a:font script="Beng" typeface="Vrinda"/>
+        <a:font script="Gujr" typeface="Shruti"/>
+        <a:font script="Khmr" typeface="MoolBoran"/>
+        <a:font script="Knda" typeface="Tunga"/>
+        <a:font script="Guru" typeface="Raavi"/>
+        <a:font script="Cans" typeface="Euphemia"/>
+        <a:font script="Cher" typeface="Plantagenet Cherokee"/>
+        <a:font script="Yiii" typeface="Microsoft Yi Baiti"/>
+        <a:font script="Tibt" typeface="Microsoft Himalaya"/>
+        <a:font script="Thaa" typeface="MV Boli"/>
+        <a:font script="Deva" typeface="Mangal"/>
+        <a:font script="Telu" typeface="Gautami"/>
+        <a:font script="Taml" typeface="Latha"/>
+        <a:font script="Syrc" typeface="Estrangelo Edessa"/>
+        <a:font script="Orya" typeface="Kalinga"/>
+        <a:font script="Mlym" typeface="Kartika"/>
+        <a:font script="Laoo" typeface="DokChampa"/>
+        <a:font script="Sinh" typeface="Iskoola Pota"/>
+        <a:font script="Mong" typeface="Mongolian Baiti"/>
+        <a:font script="Viet" typeface="Times New Roman"/>
+        <a:font script="Uigh" typeface="Microsoft Uighur"/>
+        <a:font script="Geor" typeface="Sylfaen"/>
+      </a:majorFont>
+      <a:minorFont>
+        <a:latin typeface="Arial"/>
+        <a:ea typeface=""/>
+        <a:cs typeface=""/>
+        <a:font script="Jpan" typeface="ＭＳ Ｐゴシック"/>
+        <a:font script="Hang" typeface="맑은 고딕"/>
+        <a:font script="Hans" typeface="宋体"/>
+        <a:font script="Hant" typeface="新細明體"/>
+        <a:font script="Arab" typeface="Arial"/>
+        <a:font script="Hebr" typeface="Arial"/>
+        <a:font script="Thai" typeface="Cordia New"/>
+        <a:font script="Ethi" typeface="Nyala"/>
+        <a:font script="Beng" typeface="Vrinda"/>
+        <a:font script="Gujr" typeface="Shruti"/>
+        <a:font script="Khmr" typeface="DaunPenh"/>
+        <a:font script="Knda" typeface="Tunga"/>
+        <a:font script="Guru" typeface="Raavi"/>
+        <a:font script="Cans" typeface="Euphemia"/>
+        <a:font script="Cher" typeface="Plantagenet Cherokee"/>
+        <a:font script="Yiii" typeface="Microsoft Yi Baiti"/>
+        <a:font script="Tibt" typeface="Microsoft Himalaya"/>
+        <a:font script="Thaa" typeface="MV Boli"/>
+        <a:font script="Deva" typeface="Mangal"/>
+        <a:font script="Telu" typeface="Gautami"/>
+        <a:font script="Taml" typeface="Latha"/>
+        <a:font script="Syrc" typeface="Estrangelo Edessa"/>
+        <a:font script="Orya" typeface="Kalinga"/>
+        <a:font script="Mlym" typeface="Kartika"/>
+        <a:font script="Laoo" typeface="DokChampa"/>
+        <a:font script="Sinh" typeface="Iskoola Pota"/>
+        <a:font script="Mong" typeface="Mongolian Baiti"/>
+        <a:font script="Viet" typeface="Arial"/>
+        <a:font script="Uigh" typeface="Microsoft Uighur"/>
+        <a:font script="Geor" typeface="Sylfaen"/>
+      </a:minorFont>
+    </a:fontScheme>
+    <a:fmtScheme name="Office">
+      <a:fillStyleLst>
+        <a:solidFill>
+          <a:schemeClr val="phClr"/>
+        </a:solidFill>
+        <a:gradFill rotWithShape="1">
+          <a:gsLst>
+            <a:gs pos="0">
+              <a:schemeClr val="phClr">
+                <a:tint val="50000"/>
+                <a:satMod val="300000"/>
+              </a:schemeClr>
+            </a:gs>
+            <a:gs pos="35000">
+              <a:schemeClr val="phClr">
+                <a:tint val="37000"/>
+                <a:satMod val="300000"/>
+              </a:schemeClr>
+            </a:gs>
+            <a:gs pos="100000">
+              <a:schemeClr val="phClr">
+                <a:tint val="15000"/>
+                <a:satMod val="350000"/>
+              </a:schemeClr>
+            </a:gs>
+          </a:gsLst>
+          <a:lin ang="16200000" scaled="1"/>
+        </a:gradFill>
+        <a:gradFill rotWithShape="1">
+          <a:gsLst>
+            <a:gs pos="0">
+              <a:schemeClr val="phClr">
+                <a:tint val="100000"/>
+                <a:shade val="100000"/>
+                <a:satMod val="130000"/>
+              </a:schemeClr>
+            </a:gs>
+            <a:gs pos="100000">
+              <a:schemeClr val="phClr">
+                <a:tint val="50000"/>
+                <a:shade val="100000"/>
+                <a:satMod val="350000"/>
+              </a:schemeClr>
+            </a:gs>
+          </a:gsLst>
+          <a:lin ang="16200000" scaled="0"/>
+        </a:gradFill>
+      </a:fillStyleLst>
+      <a:lnStyleLst>
+        <a:ln w="9525" cap="flat" cmpd="sng" algn="ctr">
+          <a:solidFill>
+            <a:schemeClr val="phClr">
+              <a:shade val="95000"/>
+              <a:satMod val="105000"/>
+            </a:schemeClr>
+          </a:solidFill>
+          <a:prstDash val="solid"/>
+        </a:ln>
+        <a:ln w="25400" cap="flat" cmpd="sng" algn="ctr">
+          <a:solidFill>
+            <a:schemeClr val="phClr"/>
+          </a:solidFill>
+          <a:prstDash val="solid"/>
+        </a:ln>
+        <a:ln w="38100" cap="flat" cmpd="sng" algn="ctr">
+          <a:solidFill>
+            <a:schemeClr val="phClr"/>
+          </a:solidFill>
+          <a:prstDash val="solid"/>
+        </a:ln>
+      </a:lnStyleLst>
+      <a:effectStyleLst>
+        <a:effectStyle>
+          <a:effectLst>
+            <a:outerShdw blurRad="40000" dist="20000" dir="5400000" rotWithShape="0">
+              <a:srgbClr val="000000">
+                <a:alpha val="38000"/>
+              </a:srgbClr>
+            </a:outerShdw>
+          </a:effectLst>
+        </a:effectStyle>
+        <a:effectStyle>
+          <a:effectLst>
+            <a:outerShdw blurRad="40000" dist="23000" dir="5400000" rotWithShape="0">
+              <a:srgbClr val="000000">
+                <a:alpha val="35000"/>
+              </a:srgbClr>
+            </a:outerShdw>
+          </a:effectLst>
+        </a:effectStyle>
+        <a:effectStyle>
+          <a:effectLst>
+            <a:outerShdw blurRad="40000" dist="23000" dir="5400000" rotWithShape="0">
+              <a:srgbClr val="000000">
+                <a:alpha val="35000"/>
+              </a:srgbClr>
+            </a:outerShdw>
+          </a:effectLst>
+          <a:scene3d>
+            <a:camera prst="orthographicFront">
+              <a:rot lat="0" lon="0" rev="0"/>
+            </a:camera>
+            <a:lightRig rig="threePt" dir="t">
+              <a:rot lat="0" lon="0" rev="1200000"/>
+            </a:lightRig>
+          </a:scene3d>
+          <a:sp3d>
+            <a:bevelT w="63500" h="25400"/>
+          </a:sp3d>
+        </a:effectStyle>
+      </a:effectStyleLst>
+      <a:bgFillStyleLst>
+        <a:solidFill>
+          <a:schemeClr val="phClr"/>
+        </a:solidFill>
+        <a:gradFill rotWithShape="1">
+          <a:gsLst>
+            <a:gs pos="0">
+              <a:schemeClr val="phClr">
+                <a:tint val="40000"/>
+                <a:satMod val="350000"/>
+              </a:schemeClr>
+            </a:gs>
+            <a:gs pos="40000">
+              <a:schemeClr val="phClr">
+                <a:tint val="45000"/>
+                <a:shade val="99000"/>
+                <a:satMod val="350000"/>
+              </a:schemeClr>
+            </a:gs>
+            <a:gs pos="100000">
+              <a:schemeClr val="phClr">
+                <a:shade val="20000"/>
+                <a:satMod val="255000"/>
+              </a:schemeClr>
+            </a:gs>
+          </a:gsLst>
+          <a:path path="circle">
+            <a:fillToRect l="50000" t="-80000" r="50000" b="180000"/>
+          </a:path>
+        </a:gradFill>
+        <a:gradFill rotWithShape="1">
+          <a:gsLst>
+            <a:gs pos="0">
+              <a:schemeClr val="phClr">
+                <a:tint val="80000"/>
+                <a:satMod val="300000"/>
+              </a:schemeClr>
+            </a:gs>
+            <a:gs pos="100000">
+              <a:schemeClr val="phClr">
+                <a:shade val="30000"/>
+                <a:satMod val="200000"/>
+              </a:schemeClr>
+            </a:gs>
+          </a:gsLst>
+          <a:path path="circle">
+            <a:fillToRect l="50000" t="50000" r="50000" b="50000"/>
+          </a:path>
+        </a:gradFill>
+      </a:bgFillStyleLst>
+    </a:fmtScheme>
+  </a:themeElements>
+  <a:objectDefaults/>
+  <a:extraClrSchemeLst/>
+</a:theme>
+</file>
+
+<file path=ppt/theme/theme2.xml><?xml version="1.0" encoding="utf-8"?>
+<a:theme xmlns:a="http://schemas.openxmlformats.org/drawingml/2006/main">
   <a:themeElements>
     <a:clrScheme name="Default">
       <a:dk1>
@@ -8264,284 +8054,7 @@
       </a:bgFillStyleLst>
     </a:fmtScheme>
   </a:themeElements>
-</a:theme>
-</file>
-
-<file path=ppt/theme/theme2.xml><?xml version="1.0" encoding="utf-8"?>
-<a:theme xmlns:a="http://schemas.openxmlformats.org/drawingml/2006/main" xmlns:r="http://schemas.openxmlformats.org/officeDocument/2006/relationships" name="Simple Light">
-  <a:themeElements>
-    <a:clrScheme name="Simple Light">
-      <a:dk1>
-        <a:srgbClr val="000000"/>
-      </a:dk1>
-      <a:lt1>
-        <a:srgbClr val="FFFFFF"/>
-      </a:lt1>
-      <a:dk2>
-        <a:srgbClr val="595959"/>
-      </a:dk2>
-      <a:lt2>
-        <a:srgbClr val="EEEEEE"/>
-      </a:lt2>
-      <a:accent1>
-        <a:srgbClr val="4285F4"/>
-      </a:accent1>
-      <a:accent2>
-        <a:srgbClr val="212121"/>
-      </a:accent2>
-      <a:accent3>
-        <a:srgbClr val="78909C"/>
-      </a:accent3>
-      <a:accent4>
-        <a:srgbClr val="FFAB40"/>
-      </a:accent4>
-      <a:accent5>
-        <a:srgbClr val="0097A7"/>
-      </a:accent5>
-      <a:accent6>
-        <a:srgbClr val="EEFF41"/>
-      </a:accent6>
-      <a:hlink>
-        <a:srgbClr val="0097A7"/>
-      </a:hlink>
-      <a:folHlink>
-        <a:srgbClr val="0097A7"/>
-      </a:folHlink>
-    </a:clrScheme>
-    <a:fontScheme name="Office">
-      <a:majorFont>
-        <a:latin typeface="Arial"/>
-        <a:ea typeface=""/>
-        <a:cs typeface=""/>
-        <a:font script="Jpan" typeface="ＭＳ Ｐゴシック"/>
-        <a:font script="Hang" typeface="맑은 고딕"/>
-        <a:font script="Hans" typeface="宋体"/>
-        <a:font script="Hant" typeface="新細明體"/>
-        <a:font script="Arab" typeface="Times New Roman"/>
-        <a:font script="Hebr" typeface="Times New Roman"/>
-        <a:font script="Thai" typeface="Angsana New"/>
-        <a:font script="Ethi" typeface="Nyala"/>
-        <a:font script="Beng" typeface="Vrinda"/>
-        <a:font script="Gujr" typeface="Shruti"/>
-        <a:font script="Khmr" typeface="MoolBoran"/>
-        <a:font script="Knda" typeface="Tunga"/>
-        <a:font script="Guru" typeface="Raavi"/>
-        <a:font script="Cans" typeface="Euphemia"/>
-        <a:font script="Cher" typeface="Plantagenet Cherokee"/>
-        <a:font script="Yiii" typeface="Microsoft Yi Baiti"/>
-        <a:font script="Tibt" typeface="Microsoft Himalaya"/>
-        <a:font script="Thaa" typeface="MV Boli"/>
-        <a:font script="Deva" typeface="Mangal"/>
-        <a:font script="Telu" typeface="Gautami"/>
-        <a:font script="Taml" typeface="Latha"/>
-        <a:font script="Syrc" typeface="Estrangelo Edessa"/>
-        <a:font script="Orya" typeface="Kalinga"/>
-        <a:font script="Mlym" typeface="Kartika"/>
-        <a:font script="Laoo" typeface="DokChampa"/>
-        <a:font script="Sinh" typeface="Iskoola Pota"/>
-        <a:font script="Mong" typeface="Mongolian Baiti"/>
-        <a:font script="Viet" typeface="Times New Roman"/>
-        <a:font script="Uigh" typeface="Microsoft Uighur"/>
-        <a:font script="Geor" typeface="Sylfaen"/>
-      </a:majorFont>
-      <a:minorFont>
-        <a:latin typeface="Arial"/>
-        <a:ea typeface=""/>
-        <a:cs typeface=""/>
-        <a:font script="Jpan" typeface="ＭＳ Ｐゴシック"/>
-        <a:font script="Hang" typeface="맑은 고딕"/>
-        <a:font script="Hans" typeface="宋体"/>
-        <a:font script="Hant" typeface="新細明體"/>
-        <a:font script="Arab" typeface="Arial"/>
-        <a:font script="Hebr" typeface="Arial"/>
-        <a:font script="Thai" typeface="Cordia New"/>
-        <a:font script="Ethi" typeface="Nyala"/>
-        <a:font script="Beng" typeface="Vrinda"/>
-        <a:font script="Gujr" typeface="Shruti"/>
-        <a:font script="Khmr" typeface="DaunPenh"/>
-        <a:font script="Knda" typeface="Tunga"/>
-        <a:font script="Guru" typeface="Raavi"/>
-        <a:font script="Cans" typeface="Euphemia"/>
-        <a:font script="Cher" typeface="Plantagenet Cherokee"/>
-        <a:font script="Yiii" typeface="Microsoft Yi Baiti"/>
-        <a:font script="Tibt" typeface="Microsoft Himalaya"/>
-        <a:font script="Thaa" typeface="MV Boli"/>
-        <a:font script="Deva" typeface="Mangal"/>
-        <a:font script="Telu" typeface="Gautami"/>
-        <a:font script="Taml" typeface="Latha"/>
-        <a:font script="Syrc" typeface="Estrangelo Edessa"/>
-        <a:font script="Orya" typeface="Kalinga"/>
-        <a:font script="Mlym" typeface="Kartika"/>
-        <a:font script="Laoo" typeface="DokChampa"/>
-        <a:font script="Sinh" typeface="Iskoola Pota"/>
-        <a:font script="Mong" typeface="Mongolian Baiti"/>
-        <a:font script="Viet" typeface="Arial"/>
-        <a:font script="Uigh" typeface="Microsoft Uighur"/>
-        <a:font script="Geor" typeface="Sylfaen"/>
-      </a:minorFont>
-    </a:fontScheme>
-    <a:fmtScheme name="Office">
-      <a:fillStyleLst>
-        <a:solidFill>
-          <a:schemeClr val="phClr"/>
-        </a:solidFill>
-        <a:gradFill rotWithShape="1">
-          <a:gsLst>
-            <a:gs pos="0">
-              <a:schemeClr val="phClr">
-                <a:tint val="50000"/>
-                <a:satMod val="300000"/>
-              </a:schemeClr>
-            </a:gs>
-            <a:gs pos="35000">
-              <a:schemeClr val="phClr">
-                <a:tint val="37000"/>
-                <a:satMod val="300000"/>
-              </a:schemeClr>
-            </a:gs>
-            <a:gs pos="100000">
-              <a:schemeClr val="phClr">
-                <a:tint val="15000"/>
-                <a:satMod val="350000"/>
-              </a:schemeClr>
-            </a:gs>
-          </a:gsLst>
-          <a:lin ang="16200000" scaled="1"/>
-        </a:gradFill>
-        <a:gradFill rotWithShape="1">
-          <a:gsLst>
-            <a:gs pos="0">
-              <a:schemeClr val="phClr">
-                <a:tint val="100000"/>
-                <a:shade val="100000"/>
-                <a:satMod val="130000"/>
-              </a:schemeClr>
-            </a:gs>
-            <a:gs pos="100000">
-              <a:schemeClr val="phClr">
-                <a:tint val="50000"/>
-                <a:shade val="100000"/>
-                <a:satMod val="350000"/>
-              </a:schemeClr>
-            </a:gs>
-          </a:gsLst>
-          <a:lin ang="16200000" scaled="0"/>
-        </a:gradFill>
-      </a:fillStyleLst>
-      <a:lnStyleLst>
-        <a:ln w="9525" cap="flat" cmpd="sng" algn="ctr">
-          <a:solidFill>
-            <a:schemeClr val="phClr">
-              <a:shade val="95000"/>
-              <a:satMod val="105000"/>
-            </a:schemeClr>
-          </a:solidFill>
-          <a:prstDash val="solid"/>
-        </a:ln>
-        <a:ln w="25400" cap="flat" cmpd="sng" algn="ctr">
-          <a:solidFill>
-            <a:schemeClr val="phClr"/>
-          </a:solidFill>
-          <a:prstDash val="solid"/>
-        </a:ln>
-        <a:ln w="38100" cap="flat" cmpd="sng" algn="ctr">
-          <a:solidFill>
-            <a:schemeClr val="phClr"/>
-          </a:solidFill>
-          <a:prstDash val="solid"/>
-        </a:ln>
-      </a:lnStyleLst>
-      <a:effectStyleLst>
-        <a:effectStyle>
-          <a:effectLst>
-            <a:outerShdw blurRad="40000" dist="20000" dir="5400000" rotWithShape="0">
-              <a:srgbClr val="000000">
-                <a:alpha val="38000"/>
-              </a:srgbClr>
-            </a:outerShdw>
-          </a:effectLst>
-        </a:effectStyle>
-        <a:effectStyle>
-          <a:effectLst>
-            <a:outerShdw blurRad="40000" dist="23000" dir="5400000" rotWithShape="0">
-              <a:srgbClr val="000000">
-                <a:alpha val="35000"/>
-              </a:srgbClr>
-            </a:outerShdw>
-          </a:effectLst>
-        </a:effectStyle>
-        <a:effectStyle>
-          <a:effectLst>
-            <a:outerShdw blurRad="40000" dist="23000" dir="5400000" rotWithShape="0">
-              <a:srgbClr val="000000">
-                <a:alpha val="35000"/>
-              </a:srgbClr>
-            </a:outerShdw>
-          </a:effectLst>
-          <a:scene3d>
-            <a:camera prst="orthographicFront">
-              <a:rot lat="0" lon="0" rev="0"/>
-            </a:camera>
-            <a:lightRig rig="threePt" dir="t">
-              <a:rot lat="0" lon="0" rev="1200000"/>
-            </a:lightRig>
-          </a:scene3d>
-          <a:sp3d>
-            <a:bevelT w="63500" h="25400"/>
-          </a:sp3d>
-        </a:effectStyle>
-      </a:effectStyleLst>
-      <a:bgFillStyleLst>
-        <a:solidFill>
-          <a:schemeClr val="phClr"/>
-        </a:solidFill>
-        <a:gradFill rotWithShape="1">
-          <a:gsLst>
-            <a:gs pos="0">
-              <a:schemeClr val="phClr">
-                <a:tint val="40000"/>
-                <a:satMod val="350000"/>
-              </a:schemeClr>
-            </a:gs>
-            <a:gs pos="40000">
-              <a:schemeClr val="phClr">
-                <a:tint val="45000"/>
-                <a:shade val="99000"/>
-                <a:satMod val="350000"/>
-              </a:schemeClr>
-            </a:gs>
-            <a:gs pos="100000">
-              <a:schemeClr val="phClr">
-                <a:shade val="20000"/>
-                <a:satMod val="255000"/>
-              </a:schemeClr>
-            </a:gs>
-          </a:gsLst>
-          <a:path path="circle">
-            <a:fillToRect l="50000" t="-80000" r="50000" b="180000"/>
-          </a:path>
-        </a:gradFill>
-        <a:gradFill rotWithShape="1">
-          <a:gsLst>
-            <a:gs pos="0">
-              <a:schemeClr val="phClr">
-                <a:tint val="80000"/>
-                <a:satMod val="300000"/>
-              </a:schemeClr>
-            </a:gs>
-            <a:gs pos="100000">
-              <a:schemeClr val="phClr">
-                <a:shade val="30000"/>
-                <a:satMod val="200000"/>
-              </a:schemeClr>
-            </a:gs>
-          </a:gsLst>
-          <a:path path="circle">
-            <a:fillToRect l="50000" t="50000" r="50000" b="50000"/>
-          </a:path>
-        </a:gradFill>
-      </a:bgFillStyleLst>
-    </a:fmtScheme>
-  </a:themeElements>
+  <a:objectDefaults/>
+  <a:extraClrSchemeLst/>
 </a:theme>
 </file>